--- a/docs/orays.pptx
+++ b/docs/orays.pptx
@@ -384,7 +384,7 @@
             <a:pPr indent="0" algn="r">
               <a:buNone/>
             </a:pPr>
-            <a:fld id="{38110E5C-C466-4FFD-986A-781A7AC9F146}" type="slidenum">
+            <a:fld id="{963930F9-8F92-47FA-BC27-4D95BEC236D1}" type="slidenum">
               <a:rPr b="0" lang="en-US" sz="1400" spc="-1" strike="noStrike">
                 <a:solidFill>
                   <a:srgbClr val="000000"/>
@@ -427,7 +427,7 @@
       </p:grpSpPr>
       <p:sp>
         <p:nvSpPr>
-          <p:cNvPr id="392" name="PlaceHolder 1"/>
+          <p:cNvPr id="391" name="PlaceHolder 1"/>
           <p:cNvSpPr>
             <a:spLocks noGrp="1"/>
           </p:cNvSpPr>
@@ -438,7 +438,7 @@
         <p:spPr>
           <a:xfrm>
             <a:off x="685800" y="1143000"/>
-            <a:ext cx="5484600" cy="3084480"/>
+            <a:ext cx="5484240" cy="3084120"/>
           </a:xfrm>
           <a:prstGeom prst="rect">
             <a:avLst/>
@@ -450,7 +450,7 @@
       </p:sp>
       <p:sp>
         <p:nvSpPr>
-          <p:cNvPr id="393" name="PlaceHolder 2"/>
+          <p:cNvPr id="392" name="PlaceHolder 2"/>
           <p:cNvSpPr>
             <a:spLocks noGrp="1"/>
           </p:cNvSpPr>
@@ -461,7 +461,7 @@
         <p:spPr>
           <a:xfrm>
             <a:off x="685800" y="4400640"/>
-            <a:ext cx="5484600" cy="3598560"/>
+            <a:ext cx="5484240" cy="3598200"/>
           </a:xfrm>
           <a:prstGeom prst="rect">
             <a:avLst/>
@@ -490,7 +490,7 @@
       </p:sp>
       <p:sp>
         <p:nvSpPr>
-          <p:cNvPr id="394" name="PlaceHolder 3"/>
+          <p:cNvPr id="393" name="PlaceHolder 3"/>
           <p:cNvSpPr>
             <a:spLocks noGrp="1"/>
           </p:cNvSpPr>
@@ -501,7 +501,7 @@
         <p:spPr>
           <a:xfrm>
             <a:off x="3884760" y="8685360"/>
-            <a:ext cx="2970000" cy="456840"/>
+            <a:ext cx="2969640" cy="456480"/>
           </a:xfrm>
           <a:prstGeom prst="rect">
             <a:avLst/>
@@ -606,7 +606,7 @@
         <p:txBody>
           <a:bodyPr/>
           <a:p>
-            <a:fld id="{9109BBEA-7C27-41EF-968A-626924E9EF5C}" type="slidenum">
+            <a:fld id="{039AE424-652C-4A5A-BAD3-BCFAD5D2C4DA}" type="slidenum">
               <a:t>&lt;#&gt;</a:t>
             </a:fld>
           </a:p>
@@ -769,7 +769,7 @@
         <p:txBody>
           <a:bodyPr/>
           <a:p>
-            <a:fld id="{3CFD3226-41B4-4FCC-AAE8-0F8BC09C9059}" type="slidenum">
+            <a:fld id="{64C272C9-E09F-451F-94EF-45C00DACC3D8}" type="slidenum">
               <a:t>&lt;#&gt;</a:t>
             </a:fld>
           </a:p>
@@ -852,7 +852,7 @@
         <p:txBody>
           <a:bodyPr/>
           <a:p>
-            <a:fld id="{BFBF6722-50A2-4098-87FD-9727F131B1AF}" type="slidenum">
+            <a:fld id="{C41018B9-9E6F-439C-A5BD-ACD4DA0DEAAD}" type="slidenum">
               <a:t>&lt;#&gt;</a:t>
             </a:fld>
           </a:p>
@@ -935,7 +935,7 @@
         <p:txBody>
           <a:bodyPr/>
           <a:p>
-            <a:fld id="{FFB9EDD8-CD17-4EA7-8E32-4C1E4FBB153A}" type="slidenum">
+            <a:fld id="{E3688423-9354-4074-BD5D-D1CA1BD612B4}" type="slidenum">
               <a:t>&lt;#&gt;</a:t>
             </a:fld>
           </a:p>
@@ -1101,7 +1101,7 @@
         <p:txBody>
           <a:bodyPr/>
           <a:p>
-            <a:fld id="{640CD408-BB11-4D45-8AC4-EFE218A19593}" type="slidenum">
+            <a:fld id="{BF4DD08E-68C6-4CFA-A3D0-B50357615692}" type="slidenum">
               <a:t>&lt;#&gt;</a:t>
             </a:fld>
           </a:p>
@@ -1184,7 +1184,7 @@
         <p:txBody>
           <a:bodyPr/>
           <a:p>
-            <a:fld id="{65B463DF-8692-4BA6-A199-FC841A851FC4}" type="slidenum">
+            <a:fld id="{8C0B59D1-C416-4114-89FC-DEDA33771F7A}" type="slidenum">
               <a:t>&lt;#&gt;</a:t>
             </a:fld>
           </a:p>
@@ -1393,7 +1393,7 @@
         <p:txBody>
           <a:bodyPr/>
           <a:p>
-            <a:fld id="{952D2CB6-57A2-47EE-BA80-4B25DC1CA3D1}" type="slidenum">
+            <a:fld id="{2184936C-D959-40E4-A799-8D09E92C0ADD}" type="slidenum">
               <a:t>&lt;#&gt;</a:t>
             </a:fld>
           </a:p>
@@ -1476,7 +1476,7 @@
         <p:txBody>
           <a:bodyPr/>
           <a:p>
-            <a:fld id="{05698F5A-846E-4D9C-9363-D2749FEE9C2F}" type="slidenum">
+            <a:fld id="{ADC4765A-F5D2-4C5C-A932-F045B626627B}" type="slidenum">
               <a:t>&lt;#&gt;</a:t>
             </a:fld>
           </a:p>
@@ -1599,7 +1599,7 @@
         <p:txBody>
           <a:bodyPr/>
           <a:p>
-            <a:fld id="{67BFF112-AF41-4DB9-B228-BE0CEAAAAF8C}" type="slidenum">
+            <a:fld id="{44135C80-F875-4FEB-8662-CD7F426A1D62}" type="slidenum">
               <a:t>&lt;#&gt;</a:t>
             </a:fld>
           </a:p>
@@ -1682,7 +1682,7 @@
         <p:txBody>
           <a:bodyPr/>
           <a:p>
-            <a:fld id="{C5C28122-B8D5-42BD-9678-856590FF0FA5}" type="slidenum">
+            <a:fld id="{5F63F2BE-04B3-4B94-8235-38653BC6D095}" type="slidenum">
               <a:t>&lt;#&gt;</a:t>
             </a:fld>
           </a:p>
@@ -1765,7 +1765,7 @@
         <p:txBody>
           <a:bodyPr/>
           <a:p>
-            <a:fld id="{1B4D8744-E9CB-41AB-864A-0CB18B0590BD}" type="slidenum">
+            <a:fld id="{A6DA8103-8467-47EA-9E63-537BB0F2EAE4}" type="slidenum">
               <a:t>&lt;#&gt;</a:t>
             </a:fld>
           </a:p>
@@ -1848,7 +1848,7 @@
         <p:txBody>
           <a:bodyPr/>
           <a:p>
-            <a:fld id="{2A9CA4B0-AFB8-40CA-B9DD-424B466F14E6}" type="slidenum">
+            <a:fld id="{3F1E975F-FFE0-4510-A7A8-DD606B4995FD}" type="slidenum">
               <a:t>&lt;#&gt;</a:t>
             </a:fld>
           </a:p>
@@ -1931,7 +1931,7 @@
         <p:txBody>
           <a:bodyPr/>
           <a:p>
-            <a:fld id="{81B11DF2-6A44-46B6-838A-77535B86D411}" type="slidenum">
+            <a:fld id="{59CB43F9-FC86-4AE8-B104-8B13F8C4311D}" type="slidenum">
               <a:t>&lt;#&gt;</a:t>
             </a:fld>
           </a:p>
@@ -2097,7 +2097,7 @@
         <p:txBody>
           <a:bodyPr/>
           <a:p>
-            <a:fld id="{7C592A3D-2057-4424-B8BB-C50F6E8B0C8C}" type="slidenum">
+            <a:fld id="{8A31770E-0AF2-4584-8589-28CEEF6182F7}" type="slidenum">
               <a:t>&lt;#&gt;</a:t>
             </a:fld>
           </a:p>
@@ -2260,7 +2260,7 @@
         <p:txBody>
           <a:bodyPr/>
           <a:p>
-            <a:fld id="{C5D9991B-33AB-48F6-9988-35DB8896918D}" type="slidenum">
+            <a:fld id="{1DED714F-376D-4909-8034-EA4F4326CB12}" type="slidenum">
               <a:t>&lt;#&gt;</a:t>
             </a:fld>
           </a:p>
@@ -2448,7 +2448,7 @@
         <p:txBody>
           <a:bodyPr/>
           <a:p>
-            <a:fld id="{BCC6FD55-0F1A-416F-8525-A19C4791EB45}" type="slidenum">
+            <a:fld id="{7B037A4A-52E3-4C8F-A832-58A5446D9849}" type="slidenum">
               <a:t>&lt;#&gt;</a:t>
             </a:fld>
           </a:p>
@@ -2531,7 +2531,7 @@
         <p:txBody>
           <a:bodyPr/>
           <a:p>
-            <a:fld id="{BEC706FC-70B4-484E-8271-14B7EF4C4A85}" type="slidenum">
+            <a:fld id="{59D5933D-EF8D-410E-8050-AFAE7A2A8267}" type="slidenum">
               <a:t>&lt;#&gt;</a:t>
             </a:fld>
           </a:p>
@@ -2740,7 +2740,7 @@
         <p:txBody>
           <a:bodyPr/>
           <a:p>
-            <a:fld id="{94BE9C82-80B8-42CE-89CB-10FC17F53808}" type="slidenum">
+            <a:fld id="{413341A4-F633-494A-9C55-AB6261247DAB}" type="slidenum">
               <a:t>&lt;#&gt;</a:t>
             </a:fld>
           </a:p>
@@ -2823,7 +2823,7 @@
         <p:txBody>
           <a:bodyPr/>
           <a:p>
-            <a:fld id="{079CBF97-48D3-4588-87EA-A5285011B1D4}" type="slidenum">
+            <a:fld id="{36F4F942-2036-4C75-B956-BAA37B6CA1E1}" type="slidenum">
               <a:t>&lt;#&gt;</a:t>
             </a:fld>
           </a:p>
@@ -2946,7 +2946,7 @@
         <p:txBody>
           <a:bodyPr/>
           <a:p>
-            <a:fld id="{6D0FF7E2-E56B-4E29-AA81-C50978AD100C}" type="slidenum">
+            <a:fld id="{17916C35-0173-48F1-8EDE-55FCD3EF766C}" type="slidenum">
               <a:t>&lt;#&gt;</a:t>
             </a:fld>
           </a:p>
@@ -3029,7 +3029,7 @@
         <p:txBody>
           <a:bodyPr/>
           <a:p>
-            <a:fld id="{CA682A7F-8E37-4AD9-9FA0-FB4964D43A22}" type="slidenum">
+            <a:fld id="{20E93542-D306-4B1F-AC26-D2386EF04AEE}" type="slidenum">
               <a:t>&lt;#&gt;</a:t>
             </a:fld>
           </a:p>
@@ -3112,7 +3112,7 @@
         <p:txBody>
           <a:bodyPr/>
           <a:p>
-            <a:fld id="{DBE5AC9A-15DF-4777-98B9-2A025C8D73D9}" type="slidenum">
+            <a:fld id="{4A6121AC-0A19-4AC7-9F8F-173A65412EA8}" type="slidenum">
               <a:t>&lt;#&gt;</a:t>
             </a:fld>
           </a:p>
@@ -3206,7 +3206,7 @@
                 </a:solidFill>
                 <a:latin typeface="Arial"/>
               </a:rPr>
-              <a:t>单击以编辑标</a:t>
+              <a:t>单</a:t>
             </a:r>
             <a:r>
               <a:rPr b="0" lang="zh-CN" sz="4400" spc="-1" strike="noStrike">
@@ -3215,7 +3215,88 @@
                 </a:solidFill>
                 <a:latin typeface="Arial"/>
               </a:rPr>
-              <a:t>题文本格式</a:t>
+              <a:t>击</a:t>
+            </a:r>
+            <a:r>
+              <a:rPr b="0" lang="zh-CN" sz="4400" spc="-1" strike="noStrike">
+                <a:solidFill>
+                  <a:srgbClr val="000000"/>
+                </a:solidFill>
+                <a:latin typeface="Arial"/>
+              </a:rPr>
+              <a:t>以</a:t>
+            </a:r>
+            <a:r>
+              <a:rPr b="0" lang="zh-CN" sz="4400" spc="-1" strike="noStrike">
+                <a:solidFill>
+                  <a:srgbClr val="000000"/>
+                </a:solidFill>
+                <a:latin typeface="Arial"/>
+              </a:rPr>
+              <a:t>编</a:t>
+            </a:r>
+            <a:r>
+              <a:rPr b="0" lang="zh-CN" sz="4400" spc="-1" strike="noStrike">
+                <a:solidFill>
+                  <a:srgbClr val="000000"/>
+                </a:solidFill>
+                <a:latin typeface="Arial"/>
+              </a:rPr>
+              <a:t>辑</a:t>
+            </a:r>
+            <a:r>
+              <a:rPr b="0" lang="zh-CN" sz="4400" spc="-1" strike="noStrike">
+                <a:solidFill>
+                  <a:srgbClr val="000000"/>
+                </a:solidFill>
+                <a:latin typeface="Arial"/>
+              </a:rPr>
+              <a:t>标</a:t>
+            </a:r>
+            <a:r>
+              <a:rPr b="0" lang="zh-CN" sz="4400" spc="-1" strike="noStrike">
+                <a:solidFill>
+                  <a:srgbClr val="000000"/>
+                </a:solidFill>
+                <a:latin typeface="Arial"/>
+              </a:rPr>
+              <a:t>题</a:t>
+            </a:r>
+            <a:r>
+              <a:rPr b="0" lang="zh-CN" sz="4400" spc="-1" strike="noStrike">
+                <a:solidFill>
+                  <a:srgbClr val="000000"/>
+                </a:solidFill>
+                <a:latin typeface="Arial"/>
+              </a:rPr>
+              <a:t>文</a:t>
+            </a:r>
+            <a:r>
+              <a:rPr b="0" lang="zh-CN" sz="4400" spc="-1" strike="noStrike">
+                <a:solidFill>
+                  <a:srgbClr val="000000"/>
+                </a:solidFill>
+                <a:latin typeface="Arial"/>
+              </a:rPr>
+              <a:t>本</a:t>
+            </a:r>
+            <a:r>
+              <a:rPr b="0" lang="zh-CN" sz="4400" spc="-1" strike="noStrike">
+                <a:solidFill>
+                  <a:srgbClr val="000000"/>
+                </a:solidFill>
+                <a:latin typeface="Arial"/>
+              </a:rPr>
+              <a:t>格</a:t>
+            </a:r>
+            <a:r>
+              <a:rPr b="0" lang="zh-CN" sz="4400" spc="-1" strike="noStrike">
+                <a:solidFill>
+                  <a:srgbClr val="000000"/>
+                </a:solidFill>
+                <a:latin typeface="Arial"/>
+              </a:rPr>
+              <a:t>式</a:t>
             </a:r>
             <a:endParaRPr b="0" lang="en-US" sz="4400" spc="-1" strike="noStrike">
               <a:solidFill>
@@ -3497,7 +3578,7 @@
         <p:spPr>
           <a:xfrm>
             <a:off x="4038480" y="6356520"/>
-            <a:ext cx="4113000" cy="363240"/>
+            <a:ext cx="4112640" cy="362880"/>
           </a:xfrm>
           <a:prstGeom prst="rect">
             <a:avLst/>
@@ -3569,7 +3650,7 @@
         <p:spPr>
           <a:xfrm>
             <a:off x="8610480" y="6356520"/>
-            <a:ext cx="2741400" cy="363240"/>
+            <a:ext cx="2741040" cy="362880"/>
           </a:xfrm>
           <a:prstGeom prst="rect">
             <a:avLst/>
@@ -3610,7 +3691,7 @@
                 <a:tab algn="l" pos="0"/>
               </a:tabLst>
             </a:pPr>
-            <a:fld id="{4E5EDD0A-0FF9-4A92-BC34-8A246FBD1DCF}" type="slidenum">
+            <a:fld id="{A83CFD02-F321-443C-9B22-BFB19376AE5D}" type="slidenum">
               <a:rPr b="0" lang="en-US" sz="1400" spc="-1" strike="noStrike">
                 <a:solidFill>
                   <a:srgbClr val="000000"/>
@@ -3641,7 +3722,7 @@
         <p:spPr>
           <a:xfrm>
             <a:off x="838080" y="6356520"/>
-            <a:ext cx="2741400" cy="363240"/>
+            <a:ext cx="2741040" cy="362880"/>
           </a:xfrm>
           <a:prstGeom prst="rect">
             <a:avLst/>
@@ -3783,7 +3864,7 @@
         <p:spPr>
           <a:xfrm>
             <a:off x="4038480" y="6356520"/>
-            <a:ext cx="4113000" cy="363240"/>
+            <a:ext cx="4112640" cy="362880"/>
           </a:xfrm>
           <a:prstGeom prst="rect">
             <a:avLst/>
@@ -3855,7 +3936,7 @@
         <p:spPr>
           <a:xfrm>
             <a:off x="8610480" y="6356520"/>
-            <a:ext cx="2741400" cy="363240"/>
+            <a:ext cx="2741040" cy="362880"/>
           </a:xfrm>
           <a:prstGeom prst="rect">
             <a:avLst/>
@@ -3896,7 +3977,7 @@
                 <a:tab algn="l" pos="0"/>
               </a:tabLst>
             </a:pPr>
-            <a:fld id="{196F4F63-AA94-4D7C-A246-479CC756C8D1}" type="slidenum">
+            <a:fld id="{A1F25F93-03B6-49A3-ADF8-526832616F50}" type="slidenum">
               <a:rPr b="0" lang="en-US" sz="1400" spc="-1" strike="noStrike">
                 <a:solidFill>
                   <a:srgbClr val="000000"/>
@@ -3927,7 +4008,7 @@
         <p:spPr>
           <a:xfrm>
             <a:off x="838080" y="6356520"/>
-            <a:ext cx="2741400" cy="363240"/>
+            <a:ext cx="2741040" cy="362880"/>
           </a:xfrm>
           <a:prstGeom prst="rect">
             <a:avLst/>
@@ -4020,7 +4101,7 @@
         <p:spPr>
           <a:xfrm>
             <a:off x="4038480" y="6356520"/>
-            <a:ext cx="4113000" cy="363240"/>
+            <a:ext cx="4112640" cy="362880"/>
           </a:xfrm>
           <a:prstGeom prst="rect">
             <a:avLst/>
@@ -4092,7 +4173,7 @@
         <p:spPr>
           <a:xfrm>
             <a:off x="8610480" y="6356520"/>
-            <a:ext cx="2741400" cy="363240"/>
+            <a:ext cx="2741040" cy="362880"/>
           </a:xfrm>
           <a:prstGeom prst="rect">
             <a:avLst/>
@@ -4133,7 +4214,7 @@
                 <a:tab algn="l" pos="0"/>
               </a:tabLst>
             </a:pPr>
-            <a:fld id="{38B9FE60-C53B-4A37-AC0A-252EDA589BD8}" type="slidenum">
+            <a:fld id="{28B10184-A4B6-4093-8EF1-EA56B7469643}" type="slidenum">
               <a:rPr b="0" lang="en-US" sz="1400" spc="-1" strike="noStrike">
                 <a:solidFill>
                   <a:srgbClr val="000000"/>
@@ -4164,7 +4245,7 @@
         <p:spPr>
           <a:xfrm>
             <a:off x="838080" y="6356520"/>
-            <a:ext cx="2741400" cy="363240"/>
+            <a:ext cx="2741040" cy="362880"/>
           </a:xfrm>
           <a:prstGeom prst="rect">
             <a:avLst/>
@@ -4257,7 +4338,7 @@
         <p:spPr>
           <a:xfrm>
             <a:off x="4038480" y="6356520"/>
-            <a:ext cx="4113000" cy="363240"/>
+            <a:ext cx="4112640" cy="362880"/>
           </a:xfrm>
           <a:prstGeom prst="rect">
             <a:avLst/>
@@ -4329,7 +4410,7 @@
         <p:spPr>
           <a:xfrm>
             <a:off x="8610480" y="6356520"/>
-            <a:ext cx="2741400" cy="363240"/>
+            <a:ext cx="2741040" cy="362880"/>
           </a:xfrm>
           <a:prstGeom prst="rect">
             <a:avLst/>
@@ -4370,7 +4451,7 @@
                 <a:tab algn="l" pos="0"/>
               </a:tabLst>
             </a:pPr>
-            <a:fld id="{36249F5E-78E5-4FA7-AC6A-B795075B03A7}" type="slidenum">
+            <a:fld id="{2562D829-1182-4725-ACC2-90525C88614F}" type="slidenum">
               <a:rPr b="0" lang="en-US" sz="1400" spc="-1" strike="noStrike">
                 <a:solidFill>
                   <a:srgbClr val="000000"/>
@@ -4401,7 +4482,7 @@
         <p:spPr>
           <a:xfrm>
             <a:off x="838080" y="6356520"/>
-            <a:ext cx="2741400" cy="363240"/>
+            <a:ext cx="2741040" cy="362880"/>
           </a:xfrm>
           <a:prstGeom prst="rect">
             <a:avLst/>
@@ -4768,7 +4849,7 @@
         <p:spPr>
           <a:xfrm>
             <a:off x="4038480" y="6356520"/>
-            <a:ext cx="4113000" cy="363240"/>
+            <a:ext cx="4112640" cy="362880"/>
           </a:xfrm>
           <a:prstGeom prst="rect">
             <a:avLst/>
@@ -4840,7 +4921,7 @@
         <p:spPr>
           <a:xfrm>
             <a:off x="8610480" y="6356520"/>
-            <a:ext cx="2741400" cy="363240"/>
+            <a:ext cx="2741040" cy="362880"/>
           </a:xfrm>
           <a:prstGeom prst="rect">
             <a:avLst/>
@@ -4881,7 +4962,7 @@
                 <a:tab algn="l" pos="0"/>
               </a:tabLst>
             </a:pPr>
-            <a:fld id="{020862CA-9761-4F9B-8715-3865F05B86D3}" type="slidenum">
+            <a:fld id="{43670DF0-F493-4C19-ADA2-C93F10DFFFD2}" type="slidenum">
               <a:rPr b="0" lang="en-US" sz="1400" spc="-1" strike="noStrike">
                 <a:solidFill>
                   <a:srgbClr val="000000"/>
@@ -4912,7 +4993,7 @@
         <p:spPr>
           <a:xfrm>
             <a:off x="838080" y="6356520"/>
-            <a:ext cx="2741400" cy="363240"/>
+            <a:ext cx="2741040" cy="362880"/>
           </a:xfrm>
           <a:prstGeom prst="rect">
             <a:avLst/>
@@ -5005,7 +5086,7 @@
         <p:spPr>
           <a:xfrm>
             <a:off x="4038480" y="6356520"/>
-            <a:ext cx="4113000" cy="363240"/>
+            <a:ext cx="4112640" cy="362880"/>
           </a:xfrm>
           <a:prstGeom prst="rect">
             <a:avLst/>
@@ -5077,7 +5158,7 @@
         <p:spPr>
           <a:xfrm>
             <a:off x="8610480" y="6356520"/>
-            <a:ext cx="2741400" cy="363240"/>
+            <a:ext cx="2741040" cy="362880"/>
           </a:xfrm>
           <a:prstGeom prst="rect">
             <a:avLst/>
@@ -5118,7 +5199,7 @@
                 <a:tab algn="l" pos="0"/>
               </a:tabLst>
             </a:pPr>
-            <a:fld id="{4F4DAABE-6415-4F6A-BD97-27BA6FF2B6FF}" type="slidenum">
+            <a:fld id="{3A3050CE-44B8-4E18-A1EF-BF0ECA87EBC4}" type="slidenum">
               <a:rPr b="0" lang="en-US" sz="1400" spc="-1" strike="noStrike">
                 <a:solidFill>
                   <a:srgbClr val="000000"/>
@@ -5149,7 +5230,7 @@
         <p:spPr>
           <a:xfrm>
             <a:off x="838080" y="6356520"/>
-            <a:ext cx="2741400" cy="363240"/>
+            <a:ext cx="2741040" cy="362880"/>
           </a:xfrm>
           <a:prstGeom prst="rect">
             <a:avLst/>
@@ -5741,7 +5822,7 @@
         <p:spPr>
           <a:xfrm>
             <a:off x="4038480" y="6356520"/>
-            <a:ext cx="4113000" cy="363240"/>
+            <a:ext cx="4112640" cy="362880"/>
           </a:xfrm>
           <a:prstGeom prst="rect">
             <a:avLst/>
@@ -5813,7 +5894,7 @@
         <p:spPr>
           <a:xfrm>
             <a:off x="8610480" y="6356520"/>
-            <a:ext cx="2741400" cy="363240"/>
+            <a:ext cx="2741040" cy="362880"/>
           </a:xfrm>
           <a:prstGeom prst="rect">
             <a:avLst/>
@@ -5854,7 +5935,7 @@
                 <a:tab algn="l" pos="0"/>
               </a:tabLst>
             </a:pPr>
-            <a:fld id="{FEBEF2D9-A195-4F6E-9DDD-880115289CFE}" type="slidenum">
+            <a:fld id="{D9052A99-E880-4741-970C-BB905D0799DA}" type="slidenum">
               <a:rPr b="0" lang="en-US" sz="1400" spc="-1" strike="noStrike">
                 <a:solidFill>
                   <a:srgbClr val="000000"/>
@@ -5885,7 +5966,7 @@
         <p:spPr>
           <a:xfrm>
             <a:off x="838080" y="6356520"/>
-            <a:ext cx="2741400" cy="363240"/>
+            <a:ext cx="2741040" cy="362880"/>
           </a:xfrm>
           <a:prstGeom prst="rect">
             <a:avLst/>
@@ -5978,7 +6059,7 @@
         <p:spPr>
           <a:xfrm>
             <a:off x="4038480" y="6356520"/>
-            <a:ext cx="4113000" cy="363240"/>
+            <a:ext cx="4112640" cy="362880"/>
           </a:xfrm>
           <a:prstGeom prst="rect">
             <a:avLst/>
@@ -6050,7 +6131,7 @@
         <p:spPr>
           <a:xfrm>
             <a:off x="8610480" y="6356520"/>
-            <a:ext cx="2741400" cy="363240"/>
+            <a:ext cx="2741040" cy="362880"/>
           </a:xfrm>
           <a:prstGeom prst="rect">
             <a:avLst/>
@@ -6091,7 +6172,7 @@
                 <a:tab algn="l" pos="0"/>
               </a:tabLst>
             </a:pPr>
-            <a:fld id="{CE6E0166-9384-4272-A6CE-E749D986271C}" type="slidenum">
+            <a:fld id="{75A936E0-2785-4EA6-AFA4-7BC2D55BB40E}" type="slidenum">
               <a:rPr b="0" lang="en-US" sz="1400" spc="-1" strike="noStrike">
                 <a:solidFill>
                   <a:srgbClr val="000000"/>
@@ -6122,7 +6203,7 @@
         <p:spPr>
           <a:xfrm>
             <a:off x="838080" y="6356520"/>
-            <a:ext cx="2741400" cy="363240"/>
+            <a:ext cx="2741040" cy="362880"/>
           </a:xfrm>
           <a:prstGeom prst="rect">
             <a:avLst/>
@@ -6264,7 +6345,7 @@
         <p:spPr>
           <a:xfrm>
             <a:off x="4038480" y="6356520"/>
-            <a:ext cx="4113000" cy="363240"/>
+            <a:ext cx="4112640" cy="362880"/>
           </a:xfrm>
           <a:prstGeom prst="rect">
             <a:avLst/>
@@ -6336,7 +6417,7 @@
         <p:spPr>
           <a:xfrm>
             <a:off x="8610480" y="6356520"/>
-            <a:ext cx="2741400" cy="363240"/>
+            <a:ext cx="2741040" cy="362880"/>
           </a:xfrm>
           <a:prstGeom prst="rect">
             <a:avLst/>
@@ -6377,7 +6458,7 @@
                 <a:tab algn="l" pos="0"/>
               </a:tabLst>
             </a:pPr>
-            <a:fld id="{0485E235-AF64-4457-A4DB-7A06834F4423}" type="slidenum">
+            <a:fld id="{94F59FB1-650A-4C69-B96B-AF4682302F3D}" type="slidenum">
               <a:rPr b="0" lang="en-US" sz="1400" spc="-1" strike="noStrike">
                 <a:solidFill>
                   <a:srgbClr val="000000"/>
@@ -6408,7 +6489,7 @@
         <p:spPr>
           <a:xfrm>
             <a:off x="838080" y="6356520"/>
-            <a:ext cx="2741400" cy="363240"/>
+            <a:ext cx="2741040" cy="362880"/>
           </a:xfrm>
           <a:prstGeom prst="rect">
             <a:avLst/>
@@ -6501,7 +6582,7 @@
         <p:spPr>
           <a:xfrm>
             <a:off x="4038480" y="6356520"/>
-            <a:ext cx="4113000" cy="363240"/>
+            <a:ext cx="4112640" cy="362880"/>
           </a:xfrm>
           <a:prstGeom prst="rect">
             <a:avLst/>
@@ -6573,7 +6654,7 @@
         <p:spPr>
           <a:xfrm>
             <a:off x="8610480" y="6356520"/>
-            <a:ext cx="2741400" cy="363240"/>
+            <a:ext cx="2741040" cy="362880"/>
           </a:xfrm>
           <a:prstGeom prst="rect">
             <a:avLst/>
@@ -6614,7 +6695,7 @@
                 <a:tab algn="l" pos="0"/>
               </a:tabLst>
             </a:pPr>
-            <a:fld id="{FA7214D3-E4AB-46DE-94DE-77688DE703B1}" type="slidenum">
+            <a:fld id="{0A4439E9-3B21-467F-A296-DB150CC55505}" type="slidenum">
               <a:rPr b="0" lang="en-US" sz="1400" spc="-1" strike="noStrike">
                 <a:solidFill>
                   <a:srgbClr val="000000"/>
@@ -6645,7 +6726,7 @@
         <p:spPr>
           <a:xfrm>
             <a:off x="838080" y="6356520"/>
-            <a:ext cx="2741400" cy="363240"/>
+            <a:ext cx="2741040" cy="362880"/>
           </a:xfrm>
           <a:prstGeom prst="rect">
             <a:avLst/>
@@ -6738,7 +6819,7 @@
         <p:spPr>
           <a:xfrm>
             <a:off x="4038480" y="6356520"/>
-            <a:ext cx="4113000" cy="363240"/>
+            <a:ext cx="4112640" cy="362880"/>
           </a:xfrm>
           <a:prstGeom prst="rect">
             <a:avLst/>
@@ -6810,7 +6891,7 @@
         <p:spPr>
           <a:xfrm>
             <a:off x="8610480" y="6356520"/>
-            <a:ext cx="2741400" cy="363240"/>
+            <a:ext cx="2741040" cy="362880"/>
           </a:xfrm>
           <a:prstGeom prst="rect">
             <a:avLst/>
@@ -6851,7 +6932,7 @@
                 <a:tab algn="l" pos="0"/>
               </a:tabLst>
             </a:pPr>
-            <a:fld id="{6A046D6E-6DFC-44BD-A4E1-6A81A5E173B3}" type="slidenum">
+            <a:fld id="{66C6A4E1-5029-44BD-98A9-0588713BF5EF}" type="slidenum">
               <a:rPr b="0" lang="en-US" sz="1400" spc="-1" strike="noStrike">
                 <a:solidFill>
                   <a:srgbClr val="000000"/>
@@ -6882,7 +6963,7 @@
         <p:spPr>
           <a:xfrm>
             <a:off x="838080" y="6356520"/>
-            <a:ext cx="2741400" cy="363240"/>
+            <a:ext cx="2741040" cy="362880"/>
           </a:xfrm>
           <a:prstGeom prst="rect">
             <a:avLst/>
@@ -6975,7 +7056,7 @@
         <p:spPr>
           <a:xfrm>
             <a:off x="4038480" y="6356520"/>
-            <a:ext cx="4113000" cy="363240"/>
+            <a:ext cx="4112640" cy="362880"/>
           </a:xfrm>
           <a:prstGeom prst="rect">
             <a:avLst/>
@@ -7047,7 +7128,7 @@
         <p:spPr>
           <a:xfrm>
             <a:off x="8610480" y="6356520"/>
-            <a:ext cx="2741400" cy="363240"/>
+            <a:ext cx="2741040" cy="362880"/>
           </a:xfrm>
           <a:prstGeom prst="rect">
             <a:avLst/>
@@ -7088,7 +7169,7 @@
                 <a:tab algn="l" pos="0"/>
               </a:tabLst>
             </a:pPr>
-            <a:fld id="{F2D85AA4-B76B-4326-B039-A8EC33571B97}" type="slidenum">
+            <a:fld id="{21426A31-3138-45A7-9236-EA24DCC9B5EE}" type="slidenum">
               <a:rPr b="0" lang="en-US" sz="1400" spc="-1" strike="noStrike">
                 <a:solidFill>
                   <a:srgbClr val="000000"/>
@@ -7119,7 +7200,7 @@
         <p:spPr>
           <a:xfrm>
             <a:off x="838080" y="6356520"/>
-            <a:ext cx="2741400" cy="363240"/>
+            <a:ext cx="2741040" cy="362880"/>
           </a:xfrm>
           <a:prstGeom prst="rect">
             <a:avLst/>
@@ -7212,7 +7293,7 @@
         <p:spPr>
           <a:xfrm>
             <a:off x="4038480" y="6356520"/>
-            <a:ext cx="4113000" cy="363240"/>
+            <a:ext cx="4112640" cy="362880"/>
           </a:xfrm>
           <a:prstGeom prst="rect">
             <a:avLst/>
@@ -7284,7 +7365,7 @@
         <p:spPr>
           <a:xfrm>
             <a:off x="8610480" y="6356520"/>
-            <a:ext cx="2741400" cy="363240"/>
+            <a:ext cx="2741040" cy="362880"/>
           </a:xfrm>
           <a:prstGeom prst="rect">
             <a:avLst/>
@@ -7325,7 +7406,7 @@
                 <a:tab algn="l" pos="0"/>
               </a:tabLst>
             </a:pPr>
-            <a:fld id="{42A57086-D93A-4089-97FE-4863977E4162}" type="slidenum">
+            <a:fld id="{A6FBA3F6-03C0-4E25-805D-1C6277310782}" type="slidenum">
               <a:rPr b="0" lang="en-US" sz="1400" spc="-1" strike="noStrike">
                 <a:solidFill>
                   <a:srgbClr val="000000"/>
@@ -7356,7 +7437,7 @@
         <p:spPr>
           <a:xfrm>
             <a:off x="838080" y="6356520"/>
-            <a:ext cx="2741400" cy="363240"/>
+            <a:ext cx="2741040" cy="362880"/>
           </a:xfrm>
           <a:prstGeom prst="rect">
             <a:avLst/>
@@ -7723,7 +7804,7 @@
         <p:spPr>
           <a:xfrm>
             <a:off x="4038480" y="6356520"/>
-            <a:ext cx="4112640" cy="362880"/>
+            <a:ext cx="4112280" cy="362520"/>
           </a:xfrm>
           <a:prstGeom prst="rect">
             <a:avLst/>
@@ -7795,7 +7876,7 @@
         <p:spPr>
           <a:xfrm>
             <a:off x="8610480" y="6356520"/>
-            <a:ext cx="2741040" cy="362880"/>
+            <a:ext cx="2740680" cy="362520"/>
           </a:xfrm>
           <a:prstGeom prst="rect">
             <a:avLst/>
@@ -7836,7 +7917,7 @@
                 <a:tab algn="l" pos="0"/>
               </a:tabLst>
             </a:pPr>
-            <a:fld id="{890317C5-5585-4D03-8211-CCD9CB19B6D5}" type="slidenum">
+            <a:fld id="{6918E40A-E70A-4106-8E77-F4465492452F}" type="slidenum">
               <a:rPr b="0" lang="en-US" sz="1400" spc="-1" strike="noStrike">
                 <a:solidFill>
                   <a:srgbClr val="000000"/>
@@ -7867,7 +7948,7 @@
         <p:spPr>
           <a:xfrm>
             <a:off x="838080" y="6356520"/>
-            <a:ext cx="2741040" cy="362880"/>
+            <a:ext cx="2740680" cy="362520"/>
           </a:xfrm>
           <a:prstGeom prst="rect">
             <a:avLst/>
@@ -8009,7 +8090,7 @@
         <p:spPr>
           <a:xfrm>
             <a:off x="4038480" y="6356520"/>
-            <a:ext cx="4112640" cy="362880"/>
+            <a:ext cx="4112280" cy="362520"/>
           </a:xfrm>
           <a:prstGeom prst="rect">
             <a:avLst/>
@@ -8081,7 +8162,7 @@
         <p:spPr>
           <a:xfrm>
             <a:off x="8610480" y="6356520"/>
-            <a:ext cx="2741040" cy="362880"/>
+            <a:ext cx="2740680" cy="362520"/>
           </a:xfrm>
           <a:prstGeom prst="rect">
             <a:avLst/>
@@ -8122,7 +8203,7 @@
                 <a:tab algn="l" pos="0"/>
               </a:tabLst>
             </a:pPr>
-            <a:fld id="{7F8B12E1-5D6E-4230-9389-4F3A94FDCFA2}" type="slidenum">
+            <a:fld id="{5DA4AF04-C1BB-4717-9328-2B110E09D349}" type="slidenum">
               <a:rPr b="0" lang="en-US" sz="1400" spc="-1" strike="noStrike">
                 <a:solidFill>
                   <a:srgbClr val="000000"/>
@@ -8153,7 +8234,7 @@
         <p:spPr>
           <a:xfrm>
             <a:off x="838080" y="6356520"/>
-            <a:ext cx="2741040" cy="362880"/>
+            <a:ext cx="2740680" cy="362520"/>
           </a:xfrm>
           <a:prstGeom prst="rect">
             <a:avLst/>
@@ -8578,7 +8659,7 @@
                 </a:solidFill>
                 <a:latin typeface="Arial"/>
               </a:rPr>
-              <a:t>单击以编辑标</a:t>
+              <a:t>单</a:t>
             </a:r>
             <a:r>
               <a:rPr b="0" lang="zh-CN" sz="1800" spc="-1" strike="noStrike">
@@ -8587,7 +8668,88 @@
                 </a:solidFill>
                 <a:latin typeface="Arial"/>
               </a:rPr>
-              <a:t>题文本格式</a:t>
+              <a:t>击</a:t>
+            </a:r>
+            <a:r>
+              <a:rPr b="0" lang="zh-CN" sz="1800" spc="-1" strike="noStrike">
+                <a:solidFill>
+                  <a:srgbClr val="000000"/>
+                </a:solidFill>
+                <a:latin typeface="Arial"/>
+              </a:rPr>
+              <a:t>以</a:t>
+            </a:r>
+            <a:r>
+              <a:rPr b="0" lang="zh-CN" sz="1800" spc="-1" strike="noStrike">
+                <a:solidFill>
+                  <a:srgbClr val="000000"/>
+                </a:solidFill>
+                <a:latin typeface="Arial"/>
+              </a:rPr>
+              <a:t>编</a:t>
+            </a:r>
+            <a:r>
+              <a:rPr b="0" lang="zh-CN" sz="1800" spc="-1" strike="noStrike">
+                <a:solidFill>
+                  <a:srgbClr val="000000"/>
+                </a:solidFill>
+                <a:latin typeface="Arial"/>
+              </a:rPr>
+              <a:t>辑</a:t>
+            </a:r>
+            <a:r>
+              <a:rPr b="0" lang="zh-CN" sz="1800" spc="-1" strike="noStrike">
+                <a:solidFill>
+                  <a:srgbClr val="000000"/>
+                </a:solidFill>
+                <a:latin typeface="Arial"/>
+              </a:rPr>
+              <a:t>标</a:t>
+            </a:r>
+            <a:r>
+              <a:rPr b="0" lang="zh-CN" sz="1800" spc="-1" strike="noStrike">
+                <a:solidFill>
+                  <a:srgbClr val="000000"/>
+                </a:solidFill>
+                <a:latin typeface="Arial"/>
+              </a:rPr>
+              <a:t>题</a:t>
+            </a:r>
+            <a:r>
+              <a:rPr b="0" lang="zh-CN" sz="1800" spc="-1" strike="noStrike">
+                <a:solidFill>
+                  <a:srgbClr val="000000"/>
+                </a:solidFill>
+                <a:latin typeface="Arial"/>
+              </a:rPr>
+              <a:t>文</a:t>
+            </a:r>
+            <a:r>
+              <a:rPr b="0" lang="zh-CN" sz="1800" spc="-1" strike="noStrike">
+                <a:solidFill>
+                  <a:srgbClr val="000000"/>
+                </a:solidFill>
+                <a:latin typeface="Arial"/>
+              </a:rPr>
+              <a:t>本</a:t>
+            </a:r>
+            <a:r>
+              <a:rPr b="0" lang="zh-CN" sz="1800" spc="-1" strike="noStrike">
+                <a:solidFill>
+                  <a:srgbClr val="000000"/>
+                </a:solidFill>
+                <a:latin typeface="Arial"/>
+              </a:rPr>
+              <a:t>格</a:t>
+            </a:r>
+            <a:r>
+              <a:rPr b="0" lang="zh-CN" sz="1800" spc="-1" strike="noStrike">
+                <a:solidFill>
+                  <a:srgbClr val="000000"/>
+                </a:solidFill>
+                <a:latin typeface="Arial"/>
+              </a:rPr>
+              <a:t>式</a:t>
             </a:r>
             <a:endParaRPr b="0" lang="en-US" sz="1800" spc="-1" strike="noStrike">
               <a:solidFill>
@@ -8836,7 +8998,7 @@
         <p:spPr>
           <a:xfrm>
             <a:off x="4038480" y="6356520"/>
-            <a:ext cx="4113000" cy="363240"/>
+            <a:ext cx="4112640" cy="362880"/>
           </a:xfrm>
           <a:prstGeom prst="rect">
             <a:avLst/>
@@ -8908,7 +9070,7 @@
         <p:spPr>
           <a:xfrm>
             <a:off x="8610480" y="6356520"/>
-            <a:ext cx="2741400" cy="363240"/>
+            <a:ext cx="2741040" cy="362880"/>
           </a:xfrm>
           <a:prstGeom prst="rect">
             <a:avLst/>
@@ -8949,7 +9111,7 @@
                 <a:tab algn="l" pos="0"/>
               </a:tabLst>
             </a:pPr>
-            <a:fld id="{C963C45E-CD3F-4643-944D-732645D69ED0}" type="slidenum">
+            <a:fld id="{C31CCE0D-F172-4FB6-9933-2C8E74CE6D77}" type="slidenum">
               <a:rPr b="0" lang="en-US" sz="1400" spc="-1" strike="noStrike">
                 <a:solidFill>
                   <a:srgbClr val="000000"/>
@@ -8980,7 +9142,7 @@
         <p:spPr>
           <a:xfrm>
             <a:off x="838080" y="6356520"/>
-            <a:ext cx="2741400" cy="363240"/>
+            <a:ext cx="2741040" cy="362880"/>
           </a:xfrm>
           <a:prstGeom prst="rect">
             <a:avLst/>
@@ -9073,7 +9235,7 @@
         <p:spPr>
           <a:xfrm>
             <a:off x="4038480" y="6356520"/>
-            <a:ext cx="4113000" cy="363240"/>
+            <a:ext cx="4112640" cy="362880"/>
           </a:xfrm>
           <a:prstGeom prst="rect">
             <a:avLst/>
@@ -9145,7 +9307,7 @@
         <p:spPr>
           <a:xfrm>
             <a:off x="8610480" y="6356520"/>
-            <a:ext cx="2741400" cy="363240"/>
+            <a:ext cx="2741040" cy="362880"/>
           </a:xfrm>
           <a:prstGeom prst="rect">
             <a:avLst/>
@@ -9186,7 +9348,7 @@
                 <a:tab algn="l" pos="0"/>
               </a:tabLst>
             </a:pPr>
-            <a:fld id="{B3C47233-99A6-4351-9FD2-E5688AC26B8A}" type="slidenum">
+            <a:fld id="{38BE5360-69B8-481D-B4AB-528F063A25FD}" type="slidenum">
               <a:rPr b="0" lang="en-US" sz="1400" spc="-1" strike="noStrike">
                 <a:solidFill>
                   <a:srgbClr val="000000"/>
@@ -9217,7 +9379,7 @@
         <p:spPr>
           <a:xfrm>
             <a:off x="838080" y="6356520"/>
-            <a:ext cx="2741400" cy="363240"/>
+            <a:ext cx="2741040" cy="362880"/>
           </a:xfrm>
           <a:prstGeom prst="rect">
             <a:avLst/>
@@ -9809,7 +9971,7 @@
         <p:spPr>
           <a:xfrm>
             <a:off x="4038480" y="6356520"/>
-            <a:ext cx="4113000" cy="363240"/>
+            <a:ext cx="4112640" cy="362880"/>
           </a:xfrm>
           <a:prstGeom prst="rect">
             <a:avLst/>
@@ -9881,7 +10043,7 @@
         <p:spPr>
           <a:xfrm>
             <a:off x="8610480" y="6356520"/>
-            <a:ext cx="2741400" cy="363240"/>
+            <a:ext cx="2741040" cy="362880"/>
           </a:xfrm>
           <a:prstGeom prst="rect">
             <a:avLst/>
@@ -9922,7 +10084,7 @@
                 <a:tab algn="l" pos="0"/>
               </a:tabLst>
             </a:pPr>
-            <a:fld id="{34DE2988-8FE1-4BA4-8579-0EDA02D786F3}" type="slidenum">
+            <a:fld id="{28F7DFD9-7485-4221-BB4C-781195D31C14}" type="slidenum">
               <a:rPr b="0" lang="en-US" sz="1400" spc="-1" strike="noStrike">
                 <a:solidFill>
                   <a:srgbClr val="000000"/>
@@ -9953,7 +10115,7 @@
         <p:spPr>
           <a:xfrm>
             <a:off x="838080" y="6356520"/>
-            <a:ext cx="2741400" cy="363240"/>
+            <a:ext cx="2741040" cy="362880"/>
           </a:xfrm>
           <a:prstGeom prst="rect">
             <a:avLst/>
@@ -10046,7 +10208,7 @@
         <p:spPr>
           <a:xfrm>
             <a:off x="4038480" y="6356520"/>
-            <a:ext cx="4113000" cy="363240"/>
+            <a:ext cx="4112640" cy="362880"/>
           </a:xfrm>
           <a:prstGeom prst="rect">
             <a:avLst/>
@@ -10118,7 +10280,7 @@
         <p:spPr>
           <a:xfrm>
             <a:off x="8610480" y="6356520"/>
-            <a:ext cx="2741400" cy="363240"/>
+            <a:ext cx="2741040" cy="362880"/>
           </a:xfrm>
           <a:prstGeom prst="rect">
             <a:avLst/>
@@ -10159,7 +10321,7 @@
                 <a:tab algn="l" pos="0"/>
               </a:tabLst>
             </a:pPr>
-            <a:fld id="{E4068C37-5B22-48A0-841D-06D18583F256}" type="slidenum">
+            <a:fld id="{A9D117BD-7D39-4AE8-80DA-C63800036AA2}" type="slidenum">
               <a:rPr b="0" lang="en-US" sz="1400" spc="-1" strike="noStrike">
                 <a:solidFill>
                   <a:srgbClr val="000000"/>
@@ -10190,7 +10352,7 @@
         <p:spPr>
           <a:xfrm>
             <a:off x="838080" y="6356520"/>
-            <a:ext cx="2741400" cy="363240"/>
+            <a:ext cx="2741040" cy="362880"/>
           </a:xfrm>
           <a:prstGeom prst="rect">
             <a:avLst/>
@@ -10332,7 +10494,7 @@
         <p:spPr>
           <a:xfrm>
             <a:off x="4038480" y="6356520"/>
-            <a:ext cx="4113000" cy="363240"/>
+            <a:ext cx="4112640" cy="362880"/>
           </a:xfrm>
           <a:prstGeom prst="rect">
             <a:avLst/>
@@ -10404,7 +10566,7 @@
         <p:spPr>
           <a:xfrm>
             <a:off x="8610480" y="6356520"/>
-            <a:ext cx="2741400" cy="363240"/>
+            <a:ext cx="2741040" cy="362880"/>
           </a:xfrm>
           <a:prstGeom prst="rect">
             <a:avLst/>
@@ -10445,7 +10607,7 @@
                 <a:tab algn="l" pos="0"/>
               </a:tabLst>
             </a:pPr>
-            <a:fld id="{F55BCD7E-A62C-4AB2-BAC5-5039B888372D}" type="slidenum">
+            <a:fld id="{DA36266A-EE1F-4795-A718-0400D718404E}" type="slidenum">
               <a:rPr b="0" lang="en-US" sz="1400" spc="-1" strike="noStrike">
                 <a:solidFill>
                   <a:srgbClr val="000000"/>
@@ -10476,7 +10638,7 @@
         <p:spPr>
           <a:xfrm>
             <a:off x="838080" y="6356520"/>
-            <a:ext cx="2741400" cy="363240"/>
+            <a:ext cx="2741040" cy="362880"/>
           </a:xfrm>
           <a:prstGeom prst="rect">
             <a:avLst/>
@@ -10569,7 +10731,7 @@
         <p:spPr>
           <a:xfrm>
             <a:off x="4038480" y="6356520"/>
-            <a:ext cx="4113000" cy="363240"/>
+            <a:ext cx="4112640" cy="362880"/>
           </a:xfrm>
           <a:prstGeom prst="rect">
             <a:avLst/>
@@ -10641,7 +10803,7 @@
         <p:spPr>
           <a:xfrm>
             <a:off x="8610480" y="6356520"/>
-            <a:ext cx="2741400" cy="363240"/>
+            <a:ext cx="2741040" cy="362880"/>
           </a:xfrm>
           <a:prstGeom prst="rect">
             <a:avLst/>
@@ -10682,7 +10844,7 @@
                 <a:tab algn="l" pos="0"/>
               </a:tabLst>
             </a:pPr>
-            <a:fld id="{92B0A9F6-50FA-40E3-A4E2-09E3BE5A01EB}" type="slidenum">
+            <a:fld id="{B6AE6486-2772-47FC-9080-A1A6E9EF3C48}" type="slidenum">
               <a:rPr b="0" lang="en-US" sz="1400" spc="-1" strike="noStrike">
                 <a:solidFill>
                   <a:srgbClr val="000000"/>
@@ -10713,7 +10875,7 @@
         <p:spPr>
           <a:xfrm>
             <a:off x="838080" y="6356520"/>
-            <a:ext cx="2741400" cy="363240"/>
+            <a:ext cx="2741040" cy="362880"/>
           </a:xfrm>
           <a:prstGeom prst="rect">
             <a:avLst/>
@@ -10806,7 +10968,7 @@
         <p:spPr>
           <a:xfrm>
             <a:off x="4038480" y="6356520"/>
-            <a:ext cx="4113000" cy="363240"/>
+            <a:ext cx="4112640" cy="362880"/>
           </a:xfrm>
           <a:prstGeom prst="rect">
             <a:avLst/>
@@ -10878,7 +11040,7 @@
         <p:spPr>
           <a:xfrm>
             <a:off x="8610480" y="6356520"/>
-            <a:ext cx="2741400" cy="363240"/>
+            <a:ext cx="2741040" cy="362880"/>
           </a:xfrm>
           <a:prstGeom prst="rect">
             <a:avLst/>
@@ -10919,7 +11081,7 @@
                 <a:tab algn="l" pos="0"/>
               </a:tabLst>
             </a:pPr>
-            <a:fld id="{0541D2AB-C4F6-420A-A156-E4676999D8A2}" type="slidenum">
+            <a:fld id="{8CA4DF7B-4CBF-49F8-9F53-5FDAE86DCEF9}" type="slidenum">
               <a:rPr b="0" lang="en-US" sz="1400" spc="-1" strike="noStrike">
                 <a:solidFill>
                   <a:srgbClr val="000000"/>
@@ -10950,7 +11112,7 @@
         <p:spPr>
           <a:xfrm>
             <a:off x="838080" y="6356520"/>
-            <a:ext cx="2741400" cy="363240"/>
+            <a:ext cx="2741040" cy="362880"/>
           </a:xfrm>
           <a:prstGeom prst="rect">
             <a:avLst/>
@@ -11032,7 +11194,7 @@
         <p:spPr>
           <a:xfrm>
             <a:off x="0" y="0"/>
-            <a:ext cx="12191760" cy="6857640"/>
+            <a:ext cx="12191400" cy="6857280"/>
           </a:xfrm>
           <a:prstGeom prst="rect">
             <a:avLst/>
@@ -11055,6 +11217,11 @@
             <a:noAutofit/>
           </a:bodyPr>
           <a:p>
+            <a:pPr>
+              <a:lnSpc>
+                <a:spcPct val="100000"/>
+              </a:lnSpc>
+            </a:pPr>
             <a:endParaRPr b="0" lang="en-US" sz="1800" spc="-1" strike="noStrike">
               <a:solidFill>
                 <a:srgbClr val="000000"/>
@@ -11077,7 +11244,7 @@
         <p:spPr>
           <a:xfrm>
             <a:off x="259920" y="164880"/>
-            <a:ext cx="2149560" cy="457560"/>
+            <a:ext cx="2149200" cy="457200"/>
           </a:xfrm>
           <a:prstGeom prst="rect">
             <a:avLst/>
@@ -11100,7 +11267,7 @@
         <p:spPr>
           <a:xfrm>
             <a:off x="8492040" y="114840"/>
-            <a:ext cx="3349800" cy="789480"/>
+            <a:ext cx="3349440" cy="789120"/>
           </a:xfrm>
           <a:prstGeom prst="rect">
             <a:avLst/>
@@ -11119,7 +11286,7 @@
         <p:spPr>
           <a:xfrm>
             <a:off x="1159920" y="2270160"/>
-            <a:ext cx="9871560" cy="1899720"/>
+            <a:ext cx="9871200" cy="1899360"/>
           </a:xfrm>
           <a:prstGeom prst="rect">
             <a:avLst/>
@@ -11142,6 +11309,11 @@
             <a:noAutofit/>
           </a:bodyPr>
           <a:p>
+            <a:pPr>
+              <a:lnSpc>
+                <a:spcPct val="100000"/>
+              </a:lnSpc>
+            </a:pPr>
             <a:endParaRPr b="0" lang="en-US" sz="1800" spc="-1" strike="noStrike">
               <a:solidFill>
                 <a:srgbClr val="000000"/>
@@ -11164,7 +11336,7 @@
         <p:spPr>
           <a:xfrm>
             <a:off x="360" y="2260440"/>
-            <a:ext cx="12191760" cy="2419560"/>
+            <a:ext cx="12191400" cy="2419200"/>
           </a:xfrm>
           <a:prstGeom prst="rect">
             <a:avLst/>
@@ -11183,7 +11355,7 @@
         <p:spPr>
           <a:xfrm>
             <a:off x="1029960" y="2810160"/>
-            <a:ext cx="10131480" cy="919800"/>
+            <a:ext cx="10131120" cy="919440"/>
           </a:xfrm>
           <a:prstGeom prst="rect">
             <a:avLst/>
@@ -11217,7 +11389,7 @@
                 <a:latin typeface="Microsoft YaHei"/>
                 <a:ea typeface="Microsoft YaHei"/>
               </a:rPr>
-              <a:t>OrayS OS</a:t>
+              <a:t>OrayS</a:t>
             </a:r>
             <a:endParaRPr b="0" lang="en-US" sz="5600" spc="-1" strike="noStrike">
               <a:solidFill>
@@ -11237,7 +11409,7 @@
         <p:spPr>
           <a:xfrm>
             <a:off x="3960000" y="3820320"/>
-            <a:ext cx="10291680" cy="499680"/>
+            <a:ext cx="10291320" cy="499320"/>
           </a:xfrm>
           <a:prstGeom prst="rect">
             <a:avLst/>
@@ -11314,68 +11486,14 @@
       </p:sp>
       <p:sp>
         <p:nvSpPr>
-          <p:cNvPr id="117" name="cover-course"/>
+          <p:cNvPr id="117" name="cover-school"/>
           <p:cNvSpPr/>
           <p:nvPr/>
         </p:nvSpPr>
         <p:spPr>
           <a:xfrm>
-            <a:off x="3650040" y="5150160"/>
-            <a:ext cx="4619520" cy="449640"/>
-          </a:xfrm>
-          <a:prstGeom prst="rect">
-            <a:avLst/>
-          </a:prstGeom>
-          <a:noFill/>
-          <a:ln w="0">
-            <a:noFill/>
-          </a:ln>
-        </p:spPr>
-        <p:style>
-          <a:lnRef idx="0"/>
-          <a:fillRef idx="0"/>
-          <a:effectRef idx="0"/>
-          <a:fontRef idx="minor"/>
-        </p:style>
-        <p:txBody>
-          <a:bodyPr lIns="0" rIns="0" tIns="0" bIns="0" anchor="t">
-            <a:noAutofit/>
-          </a:bodyPr>
-          <a:p>
-            <a:pPr algn="ctr">
-              <a:lnSpc>
-                <a:spcPct val="100000"/>
-              </a:lnSpc>
-            </a:pPr>
-            <a:r>
-              <a:rPr b="1" lang="en-US" sz="1700" spc="-1" strike="noStrike">
-                <a:solidFill>
-                  <a:srgbClr val="0078bd"/>
-                </a:solidFill>
-                <a:latin typeface="Microsoft YaHei"/>
-                <a:ea typeface="Microsoft YaHei"/>
-              </a:rPr>
-              <a:t>OSKernel 2026</a:t>
-            </a:r>
-            <a:endParaRPr b="0" lang="en-US" sz="1700" spc="-1" strike="noStrike">
-              <a:solidFill>
-                <a:srgbClr val="000000"/>
-              </a:solidFill>
-              <a:latin typeface="Arial"/>
-            </a:endParaRPr>
-          </a:p>
-        </p:txBody>
-      </p:sp>
-      <p:sp>
-        <p:nvSpPr>
-          <p:cNvPr id="118" name="cover-school"/>
-          <p:cNvSpPr/>
-          <p:nvPr/>
-        </p:nvSpPr>
-        <p:spPr>
-          <a:xfrm>
             <a:off x="6099840" y="5749920"/>
-            <a:ext cx="4999680" cy="519480"/>
+            <a:ext cx="4999320" cy="519120"/>
           </a:xfrm>
           <a:prstGeom prst="rect">
             <a:avLst/>
@@ -11452,14 +11570,14 @@
       </p:grpSpPr>
       <p:sp>
         <p:nvSpPr>
-          <p:cNvPr id="218" name="StarryXTransition-bg"/>
+          <p:cNvPr id="217" name="StarryXTransition-bg"/>
           <p:cNvSpPr/>
           <p:nvPr/>
         </p:nvSpPr>
         <p:spPr>
           <a:xfrm>
             <a:off x="0" y="0"/>
-            <a:ext cx="12190680" cy="6856560"/>
+            <a:ext cx="12190320" cy="6856200"/>
           </a:xfrm>
           <a:prstGeom prst="rect">
             <a:avLst/>
@@ -11498,14 +11616,14 @@
       </p:sp>
       <p:sp>
         <p:nvSpPr>
-          <p:cNvPr id="219" name="StarryXTransition-blue-band"/>
+          <p:cNvPr id="218" name="StarryXTransition-blue-band"/>
           <p:cNvSpPr/>
           <p:nvPr/>
         </p:nvSpPr>
         <p:spPr>
           <a:xfrm>
             <a:off x="0" y="0"/>
-            <a:ext cx="12190680" cy="3736080"/>
+            <a:ext cx="12190320" cy="3735720"/>
           </a:xfrm>
           <a:prstGeom prst="rect">
             <a:avLst/>
@@ -11544,14 +11662,14 @@
       </p:sp>
       <p:sp>
         <p:nvSpPr>
-          <p:cNvPr id="220" name="StarryXTransition-blue-shadow"/>
+          <p:cNvPr id="219" name="StarryXTransition-blue-shadow"/>
           <p:cNvSpPr/>
           <p:nvPr/>
         </p:nvSpPr>
         <p:spPr>
           <a:xfrm>
             <a:off x="0" y="3669120"/>
-            <a:ext cx="12190680" cy="26640"/>
+            <a:ext cx="12190320" cy="26280"/>
           </a:xfrm>
           <a:prstGeom prst="rect">
             <a:avLst/>
@@ -11590,7 +11708,7 @@
       </p:sp>
       <p:pic>
         <p:nvPicPr>
-          <p:cNvPr id="221" name="StarryXTransition-cscc-logo" descr=""/>
+          <p:cNvPr id="220" name="StarryXTransition-cscc-logo" descr=""/>
           <p:cNvPicPr/>
           <p:nvPr/>
         </p:nvPicPr>
@@ -11601,7 +11719,7 @@
         <p:spPr>
           <a:xfrm>
             <a:off x="97560" y="219600"/>
-            <a:ext cx="2949120" cy="608760"/>
+            <a:ext cx="2948760" cy="608400"/>
           </a:xfrm>
           <a:prstGeom prst="rect">
             <a:avLst/>
@@ -11613,7 +11731,7 @@
       </p:pic>
       <p:pic>
         <p:nvPicPr>
-          <p:cNvPr id="222" name="StarryXTransition-hzdu-logo" descr=""/>
+          <p:cNvPr id="221" name="StarryXTransition-hzdu-logo" descr=""/>
           <p:cNvPicPr/>
           <p:nvPr/>
         </p:nvPicPr>
@@ -11624,7 +11742,7 @@
         <p:spPr>
           <a:xfrm>
             <a:off x="8558640" y="102960"/>
-            <a:ext cx="3546360" cy="828360"/>
+            <a:ext cx="3546000" cy="828000"/>
           </a:xfrm>
           <a:prstGeom prst="rect">
             <a:avLst/>
@@ -11636,14 +11754,14 @@
       </p:pic>
       <p:sp>
         <p:nvSpPr>
-          <p:cNvPr id="223" name="StarryXTransition-part-hex"/>
+          <p:cNvPr id="222" name="StarryXTransition-part-hex"/>
           <p:cNvSpPr/>
           <p:nvPr/>
         </p:nvSpPr>
         <p:spPr>
           <a:xfrm>
             <a:off x="5157360" y="2983320"/>
-            <a:ext cx="1875960" cy="1542240"/>
+            <a:ext cx="1875600" cy="1541880"/>
           </a:xfrm>
           <a:prstGeom prst="hexagon">
             <a:avLst>
@@ -11688,14 +11806,14 @@
       </p:sp>
       <p:sp>
         <p:nvSpPr>
-          <p:cNvPr id="224" name="StarryXTransition-part-text"/>
+          <p:cNvPr id="223" name="StarryXTransition-part-text"/>
           <p:cNvSpPr/>
           <p:nvPr/>
         </p:nvSpPr>
         <p:spPr>
           <a:xfrm>
             <a:off x="5157360" y="3633120"/>
-            <a:ext cx="1875960" cy="379080"/>
+            <a:ext cx="1875600" cy="378720"/>
           </a:xfrm>
           <a:prstGeom prst="rect">
             <a:avLst/>
@@ -11742,14 +11860,14 @@
       </p:sp>
       <p:sp>
         <p:nvSpPr>
-          <p:cNvPr id="225" name="StarryXTransition-title"/>
+          <p:cNvPr id="224" name="StarryXTransition-title"/>
           <p:cNvSpPr/>
           <p:nvPr/>
         </p:nvSpPr>
         <p:spPr>
           <a:xfrm>
             <a:off x="1219320" y="4526280"/>
-            <a:ext cx="9752040" cy="1027440"/>
+            <a:ext cx="9751680" cy="1027080"/>
           </a:xfrm>
           <a:prstGeom prst="rect">
             <a:avLst/>
@@ -11826,14 +11944,14 @@
       </p:grpSpPr>
       <p:sp>
         <p:nvSpPr>
-          <p:cNvPr id="226" name="rect 52"/>
+          <p:cNvPr id="225" name="rect 52"/>
           <p:cNvSpPr/>
           <p:nvPr/>
         </p:nvSpPr>
         <p:spPr>
           <a:xfrm>
             <a:off x="1800" y="0"/>
-            <a:ext cx="12188880" cy="6856560"/>
+            <a:ext cx="12188520" cy="6856200"/>
           </a:xfrm>
           <a:prstGeom prst="rect">
             <a:avLst/>
@@ -11872,14 +11990,14 @@
       </p:sp>
       <p:sp>
         <p:nvSpPr>
-          <p:cNvPr id="227" name="Title"/>
+          <p:cNvPr id="226" name="Title"/>
           <p:cNvSpPr/>
           <p:nvPr/>
         </p:nvSpPr>
         <p:spPr>
           <a:xfrm>
             <a:off x="650160" y="1187280"/>
-            <a:ext cx="10197720" cy="432720"/>
+            <a:ext cx="10197360" cy="432720"/>
           </a:xfrm>
           <a:prstGeom prst="rect">
             <a:avLst/>
@@ -11926,7 +12044,7 @@
       </p:sp>
       <p:pic>
         <p:nvPicPr>
-          <p:cNvPr id="228" name="orays-03-memory-management.png" descr=""/>
+          <p:cNvPr id="227" name="orays-03-memory-management.png" descr=""/>
           <p:cNvPicPr/>
           <p:nvPr/>
         </p:nvPicPr>
@@ -11937,7 +12055,7 @@
         <p:spPr>
           <a:xfrm>
             <a:off x="5488920" y="2100600"/>
-            <a:ext cx="6126840" cy="3562200"/>
+            <a:ext cx="6126480" cy="3561840"/>
           </a:xfrm>
           <a:prstGeom prst="rect">
             <a:avLst/>
@@ -11949,14 +12067,14 @@
       </p:pic>
       <p:sp>
         <p:nvSpPr>
-          <p:cNvPr id="229" name="Caption"/>
+          <p:cNvPr id="228" name="Caption"/>
           <p:cNvSpPr/>
           <p:nvPr/>
         </p:nvSpPr>
         <p:spPr>
           <a:xfrm>
             <a:off x="6539400" y="5978160"/>
-            <a:ext cx="4980600" cy="227160"/>
+            <a:ext cx="4980240" cy="227160"/>
           </a:xfrm>
           <a:prstGeom prst="rect">
             <a:avLst/>
@@ -12073,14 +12191,14 @@
       </p:sp>
       <p:sp>
         <p:nvSpPr>
-          <p:cNvPr id="230" name="Body"/>
+          <p:cNvPr id="229" name="Body"/>
           <p:cNvSpPr/>
           <p:nvPr/>
         </p:nvSpPr>
         <p:spPr>
           <a:xfrm>
             <a:off x="674640" y="1822320"/>
-            <a:ext cx="4698720" cy="4545720"/>
+            <a:ext cx="4698360" cy="4545720"/>
           </a:xfrm>
           <a:prstGeom prst="roundRect">
             <a:avLst>
@@ -12591,7 +12709,7 @@
       </p:sp>
       <p:pic>
         <p:nvPicPr>
-          <p:cNvPr id="231" name="StarryXStyle-header-logo" descr=""/>
+          <p:cNvPr id="230" name="StarryXStyle-header-logo" descr=""/>
           <p:cNvPicPr/>
           <p:nvPr/>
         </p:nvPicPr>
@@ -12602,7 +12720,7 @@
         <p:spPr>
           <a:xfrm>
             <a:off x="150120" y="119880"/>
-            <a:ext cx="2548440" cy="608400"/>
+            <a:ext cx="2548080" cy="608040"/>
           </a:xfrm>
           <a:prstGeom prst="rect">
             <a:avLst/>
@@ -12614,14 +12732,14 @@
       </p:pic>
       <p:sp>
         <p:nvSpPr>
-          <p:cNvPr id="232" name="StarryXStyle-nav-active"/>
+          <p:cNvPr id="231" name="StarryXStyle-nav-active"/>
           <p:cNvSpPr/>
           <p:nvPr/>
         </p:nvSpPr>
         <p:spPr>
           <a:xfrm>
             <a:off x="7553880" y="0"/>
-            <a:ext cx="1083240" cy="708480"/>
+            <a:ext cx="1082880" cy="708120"/>
           </a:xfrm>
           <a:prstGeom prst="rect">
             <a:avLst/>
@@ -12660,14 +12778,14 @@
       </p:sp>
       <p:sp>
         <p:nvSpPr>
-          <p:cNvPr id="233" name="StarryXStyle-nav-1"/>
+          <p:cNvPr id="232" name="StarryXStyle-nav-1"/>
           <p:cNvSpPr/>
           <p:nvPr/>
         </p:nvSpPr>
         <p:spPr>
           <a:xfrm>
             <a:off x="4299840" y="245160"/>
-            <a:ext cx="1083240" cy="258480"/>
+            <a:ext cx="1082880" cy="258120"/>
           </a:xfrm>
           <a:prstGeom prst="rect">
             <a:avLst/>
@@ -12714,14 +12832,14 @@
       </p:sp>
       <p:sp>
         <p:nvSpPr>
-          <p:cNvPr id="234" name="StarryXStyle-nav-2"/>
+          <p:cNvPr id="233" name="StarryXStyle-nav-2"/>
           <p:cNvSpPr/>
           <p:nvPr/>
         </p:nvSpPr>
         <p:spPr>
           <a:xfrm>
             <a:off x="5384520" y="245160"/>
-            <a:ext cx="1083240" cy="258480"/>
+            <a:ext cx="1082880" cy="258120"/>
           </a:xfrm>
           <a:prstGeom prst="rect">
             <a:avLst/>
@@ -12768,14 +12886,14 @@
       </p:sp>
       <p:sp>
         <p:nvSpPr>
-          <p:cNvPr id="235" name="StarryXStyle-nav-3"/>
+          <p:cNvPr id="234" name="StarryXStyle-nav-3"/>
           <p:cNvSpPr/>
           <p:nvPr/>
         </p:nvSpPr>
         <p:spPr>
           <a:xfrm>
             <a:off x="6469200" y="245160"/>
-            <a:ext cx="1083240" cy="258480"/>
+            <a:ext cx="1082880" cy="258120"/>
           </a:xfrm>
           <a:prstGeom prst="rect">
             <a:avLst/>
@@ -12822,14 +12940,14 @@
       </p:sp>
       <p:sp>
         <p:nvSpPr>
-          <p:cNvPr id="236" name="StarryXStyle-nav-4"/>
+          <p:cNvPr id="235" name="StarryXStyle-nav-4"/>
           <p:cNvSpPr/>
           <p:nvPr/>
         </p:nvSpPr>
         <p:spPr>
           <a:xfrm>
             <a:off x="7553880" y="190080"/>
-            <a:ext cx="1083240" cy="258480"/>
+            <a:ext cx="1082880" cy="258120"/>
           </a:xfrm>
           <a:prstGeom prst="rect">
             <a:avLst/>
@@ -12876,14 +12994,14 @@
       </p:sp>
       <p:sp>
         <p:nvSpPr>
-          <p:cNvPr id="237" name="StarryXStyle-nav-5"/>
+          <p:cNvPr id="236" name="StarryXStyle-nav-5"/>
           <p:cNvSpPr/>
           <p:nvPr/>
         </p:nvSpPr>
         <p:spPr>
           <a:xfrm>
             <a:off x="8638200" y="245160"/>
-            <a:ext cx="1083240" cy="258480"/>
+            <a:ext cx="1082880" cy="258120"/>
           </a:xfrm>
           <a:prstGeom prst="rect">
             <a:avLst/>
@@ -12940,14 +13058,14 @@
       </p:sp>
       <p:sp>
         <p:nvSpPr>
-          <p:cNvPr id="238" name="StarryXStyle-nav-6"/>
+          <p:cNvPr id="237" name="StarryXStyle-nav-6"/>
           <p:cNvSpPr/>
           <p:nvPr/>
         </p:nvSpPr>
         <p:spPr>
           <a:xfrm>
             <a:off x="9722880" y="245160"/>
-            <a:ext cx="1083240" cy="258480"/>
+            <a:ext cx="1082880" cy="258120"/>
           </a:xfrm>
           <a:prstGeom prst="rect">
             <a:avLst/>
@@ -12994,14 +13112,14 @@
       </p:sp>
       <p:sp>
         <p:nvSpPr>
-          <p:cNvPr id="239" name="StarryXStyle-nav-7"/>
+          <p:cNvPr id="238" name="StarryXStyle-nav-7"/>
           <p:cNvSpPr/>
           <p:nvPr/>
         </p:nvSpPr>
         <p:spPr>
           <a:xfrm>
             <a:off x="10807560" y="245160"/>
-            <a:ext cx="1083240" cy="258480"/>
+            <a:ext cx="1082880" cy="258120"/>
           </a:xfrm>
           <a:prstGeom prst="rect">
             <a:avLst/>
@@ -13048,14 +13166,14 @@
       </p:sp>
       <p:sp>
         <p:nvSpPr>
-          <p:cNvPr id="240" name="StarryXStyle-title-marker"/>
+          <p:cNvPr id="239" name="StarryXStyle-title-marker"/>
           <p:cNvSpPr/>
           <p:nvPr/>
         </p:nvSpPr>
         <p:spPr>
           <a:xfrm>
             <a:off x="529920" y="1239840"/>
-            <a:ext cx="168480" cy="228600"/>
+            <a:ext cx="168120" cy="228240"/>
           </a:xfrm>
           <a:prstGeom prst="rect">
             <a:avLst/>
@@ -13132,14 +13250,14 @@
       </p:grpSpPr>
       <p:sp>
         <p:nvSpPr>
-          <p:cNvPr id="241" name="rect 52"/>
+          <p:cNvPr id="240" name="rect 52"/>
           <p:cNvSpPr/>
           <p:nvPr/>
         </p:nvSpPr>
         <p:spPr>
           <a:xfrm>
             <a:off x="0" y="-16560"/>
-            <a:ext cx="12188880" cy="6856560"/>
+            <a:ext cx="12188520" cy="6856200"/>
           </a:xfrm>
           <a:prstGeom prst="rect">
             <a:avLst/>
@@ -13178,14 +13296,14 @@
       </p:sp>
       <p:sp>
         <p:nvSpPr>
-          <p:cNvPr id="242" name="Title"/>
+          <p:cNvPr id="241" name="Title"/>
           <p:cNvSpPr/>
           <p:nvPr/>
         </p:nvSpPr>
         <p:spPr>
           <a:xfrm>
             <a:off x="650160" y="1187280"/>
-            <a:ext cx="10197720" cy="432720"/>
+            <a:ext cx="10197360" cy="432720"/>
           </a:xfrm>
           <a:prstGeom prst="rect">
             <a:avLst/>
@@ -13232,14 +13350,14 @@
       </p:sp>
       <p:sp>
         <p:nvSpPr>
-          <p:cNvPr id="243" name="Body"/>
+          <p:cNvPr id="242" name="Body"/>
           <p:cNvSpPr/>
           <p:nvPr/>
         </p:nvSpPr>
         <p:spPr>
           <a:xfrm>
             <a:off x="1205280" y="2356920"/>
-            <a:ext cx="9774720" cy="2323080"/>
+            <a:ext cx="9774360" cy="2323080"/>
           </a:xfrm>
           <a:prstGeom prst="roundRect">
             <a:avLst>
@@ -13611,7 +13729,7 @@
       </p:sp>
       <p:pic>
         <p:nvPicPr>
-          <p:cNvPr id="244" name="StarryXStyle-header-logo" descr=""/>
+          <p:cNvPr id="243" name="StarryXStyle-header-logo" descr=""/>
           <p:cNvPicPr/>
           <p:nvPr/>
         </p:nvPicPr>
@@ -13622,7 +13740,7 @@
         <p:spPr>
           <a:xfrm>
             <a:off x="150120" y="119880"/>
-            <a:ext cx="2548440" cy="608400"/>
+            <a:ext cx="2548080" cy="608040"/>
           </a:xfrm>
           <a:prstGeom prst="rect">
             <a:avLst/>
@@ -13634,14 +13752,14 @@
       </p:pic>
       <p:sp>
         <p:nvSpPr>
-          <p:cNvPr id="245" name="StarryXStyle-nav-active"/>
+          <p:cNvPr id="244" name="StarryXStyle-nav-active"/>
           <p:cNvSpPr/>
           <p:nvPr/>
         </p:nvSpPr>
         <p:spPr>
           <a:xfrm>
             <a:off x="7553880" y="0"/>
-            <a:ext cx="1083240" cy="708480"/>
+            <a:ext cx="1082880" cy="708120"/>
           </a:xfrm>
           <a:prstGeom prst="rect">
             <a:avLst/>
@@ -13680,14 +13798,14 @@
       </p:sp>
       <p:sp>
         <p:nvSpPr>
-          <p:cNvPr id="246" name="StarryXStyle-nav-1"/>
+          <p:cNvPr id="245" name="StarryXStyle-nav-1"/>
           <p:cNvSpPr/>
           <p:nvPr/>
         </p:nvSpPr>
         <p:spPr>
           <a:xfrm>
             <a:off x="4299840" y="245160"/>
-            <a:ext cx="1083240" cy="258480"/>
+            <a:ext cx="1082880" cy="258120"/>
           </a:xfrm>
           <a:prstGeom prst="rect">
             <a:avLst/>
@@ -13734,14 +13852,14 @@
       </p:sp>
       <p:sp>
         <p:nvSpPr>
-          <p:cNvPr id="247" name="StarryXStyle-nav-2"/>
+          <p:cNvPr id="246" name="StarryXStyle-nav-2"/>
           <p:cNvSpPr/>
           <p:nvPr/>
         </p:nvSpPr>
         <p:spPr>
           <a:xfrm>
             <a:off x="5384520" y="245160"/>
-            <a:ext cx="1083240" cy="258480"/>
+            <a:ext cx="1082880" cy="258120"/>
           </a:xfrm>
           <a:prstGeom prst="rect">
             <a:avLst/>
@@ -13788,14 +13906,14 @@
       </p:sp>
       <p:sp>
         <p:nvSpPr>
-          <p:cNvPr id="248" name="StarryXStyle-nav-3"/>
+          <p:cNvPr id="247" name="StarryXStyle-nav-3"/>
           <p:cNvSpPr/>
           <p:nvPr/>
         </p:nvSpPr>
         <p:spPr>
           <a:xfrm>
             <a:off x="6469200" y="245160"/>
-            <a:ext cx="1083240" cy="258480"/>
+            <a:ext cx="1082880" cy="258120"/>
           </a:xfrm>
           <a:prstGeom prst="rect">
             <a:avLst/>
@@ -13842,14 +13960,14 @@
       </p:sp>
       <p:sp>
         <p:nvSpPr>
-          <p:cNvPr id="249" name="StarryXStyle-nav-4"/>
+          <p:cNvPr id="248" name="StarryXStyle-nav-4"/>
           <p:cNvSpPr/>
           <p:nvPr/>
         </p:nvSpPr>
         <p:spPr>
           <a:xfrm>
             <a:off x="7553880" y="190080"/>
-            <a:ext cx="1083240" cy="258480"/>
+            <a:ext cx="1082880" cy="258120"/>
           </a:xfrm>
           <a:prstGeom prst="rect">
             <a:avLst/>
@@ -13896,14 +14014,14 @@
       </p:sp>
       <p:sp>
         <p:nvSpPr>
-          <p:cNvPr id="250" name="StarryXStyle-nav-5"/>
+          <p:cNvPr id="249" name="StarryXStyle-nav-5"/>
           <p:cNvSpPr/>
           <p:nvPr/>
         </p:nvSpPr>
         <p:spPr>
           <a:xfrm>
             <a:off x="8638200" y="245160"/>
-            <a:ext cx="1083240" cy="258480"/>
+            <a:ext cx="1082880" cy="258120"/>
           </a:xfrm>
           <a:prstGeom prst="rect">
             <a:avLst/>
@@ -13960,14 +14078,14 @@
       </p:sp>
       <p:sp>
         <p:nvSpPr>
-          <p:cNvPr id="251" name="StarryXStyle-nav-6"/>
+          <p:cNvPr id="250" name="StarryXStyle-nav-6"/>
           <p:cNvSpPr/>
           <p:nvPr/>
         </p:nvSpPr>
         <p:spPr>
           <a:xfrm>
             <a:off x="9722880" y="245160"/>
-            <a:ext cx="1083240" cy="258480"/>
+            <a:ext cx="1082880" cy="258120"/>
           </a:xfrm>
           <a:prstGeom prst="rect">
             <a:avLst/>
@@ -14014,14 +14132,14 @@
       </p:sp>
       <p:sp>
         <p:nvSpPr>
-          <p:cNvPr id="252" name="StarryXStyle-nav-7"/>
+          <p:cNvPr id="251" name="StarryXStyle-nav-7"/>
           <p:cNvSpPr/>
           <p:nvPr/>
         </p:nvSpPr>
         <p:spPr>
           <a:xfrm>
             <a:off x="10807560" y="245160"/>
-            <a:ext cx="1083240" cy="258480"/>
+            <a:ext cx="1082880" cy="258120"/>
           </a:xfrm>
           <a:prstGeom prst="rect">
             <a:avLst/>
@@ -14068,14 +14186,14 @@
       </p:sp>
       <p:sp>
         <p:nvSpPr>
-          <p:cNvPr id="253" name="StarryXStyle-title-marker"/>
+          <p:cNvPr id="252" name="StarryXStyle-title-marker"/>
           <p:cNvSpPr/>
           <p:nvPr/>
         </p:nvSpPr>
         <p:spPr>
           <a:xfrm>
             <a:off x="529920" y="1239840"/>
-            <a:ext cx="168480" cy="228600"/>
+            <a:ext cx="168120" cy="228240"/>
           </a:xfrm>
           <a:prstGeom prst="rect">
             <a:avLst/>
@@ -14152,14 +14270,14 @@
       </p:grpSpPr>
       <p:sp>
         <p:nvSpPr>
-          <p:cNvPr id="254" name="rect 52"/>
+          <p:cNvPr id="253" name="rect 52"/>
           <p:cNvSpPr/>
           <p:nvPr/>
         </p:nvSpPr>
         <p:spPr>
           <a:xfrm>
             <a:off x="1800" y="0"/>
-            <a:ext cx="12188880" cy="6856560"/>
+            <a:ext cx="12188520" cy="6856200"/>
           </a:xfrm>
           <a:prstGeom prst="rect">
             <a:avLst/>
@@ -14198,14 +14316,14 @@
       </p:sp>
       <p:sp>
         <p:nvSpPr>
-          <p:cNvPr id="255" name="Title"/>
+          <p:cNvPr id="254" name="Title"/>
           <p:cNvSpPr/>
           <p:nvPr/>
         </p:nvSpPr>
         <p:spPr>
           <a:xfrm>
             <a:off x="650160" y="1187280"/>
-            <a:ext cx="10197720" cy="432720"/>
+            <a:ext cx="10197360" cy="432720"/>
           </a:xfrm>
           <a:prstGeom prst="rect">
             <a:avLst/>
@@ -14252,14 +14370,14 @@
       </p:sp>
       <p:sp>
         <p:nvSpPr>
-          <p:cNvPr id="256" name="Body"/>
+          <p:cNvPr id="255" name="Body"/>
           <p:cNvSpPr/>
           <p:nvPr/>
         </p:nvSpPr>
         <p:spPr>
           <a:xfrm>
             <a:off x="640080" y="1994400"/>
-            <a:ext cx="4943160" cy="3593160"/>
+            <a:ext cx="4942800" cy="3593160"/>
           </a:xfrm>
           <a:prstGeom prst="roundRect">
             <a:avLst>
@@ -14659,7 +14777,7 @@
       </p:sp>
       <p:pic>
         <p:nvPicPr>
-          <p:cNvPr id="257" name="orays-04-task-process.png" descr=""/>
+          <p:cNvPr id="256" name="orays-04-task-process.png" descr=""/>
           <p:cNvPicPr/>
           <p:nvPr/>
         </p:nvPicPr>
@@ -14670,7 +14788,7 @@
         <p:spPr>
           <a:xfrm>
             <a:off x="5801040" y="1799640"/>
-            <a:ext cx="5849280" cy="4098600"/>
+            <a:ext cx="5848920" cy="4098240"/>
           </a:xfrm>
           <a:prstGeom prst="rect">
             <a:avLst/>
@@ -14682,14 +14800,14 @@
       </p:pic>
       <p:sp>
         <p:nvSpPr>
-          <p:cNvPr id="258" name="Caption"/>
+          <p:cNvPr id="257" name="Caption"/>
           <p:cNvSpPr/>
           <p:nvPr/>
         </p:nvSpPr>
         <p:spPr>
           <a:xfrm>
             <a:off x="7079400" y="6234480"/>
-            <a:ext cx="4980600" cy="227160"/>
+            <a:ext cx="4980240" cy="227160"/>
           </a:xfrm>
           <a:prstGeom prst="rect">
             <a:avLst/>
@@ -14796,7 +14914,7 @@
       </p:sp>
       <p:pic>
         <p:nvPicPr>
-          <p:cNvPr id="259" name="StarryXStyle-header-logo" descr=""/>
+          <p:cNvPr id="258" name="StarryXStyle-header-logo" descr=""/>
           <p:cNvPicPr/>
           <p:nvPr/>
         </p:nvPicPr>
@@ -14807,7 +14925,7 @@
         <p:spPr>
           <a:xfrm>
             <a:off x="150120" y="119880"/>
-            <a:ext cx="2548440" cy="608400"/>
+            <a:ext cx="2548080" cy="608040"/>
           </a:xfrm>
           <a:prstGeom prst="rect">
             <a:avLst/>
@@ -14819,14 +14937,14 @@
       </p:pic>
       <p:sp>
         <p:nvSpPr>
-          <p:cNvPr id="260" name="StarryXStyle-nav-active"/>
+          <p:cNvPr id="259" name="StarryXStyle-nav-active"/>
           <p:cNvSpPr/>
           <p:nvPr/>
         </p:nvSpPr>
         <p:spPr>
           <a:xfrm>
             <a:off x="7553880" y="0"/>
-            <a:ext cx="1083240" cy="708480"/>
+            <a:ext cx="1082880" cy="708120"/>
           </a:xfrm>
           <a:prstGeom prst="rect">
             <a:avLst/>
@@ -14865,14 +14983,14 @@
       </p:sp>
       <p:sp>
         <p:nvSpPr>
-          <p:cNvPr id="261" name="StarryXStyle-nav-1"/>
+          <p:cNvPr id="260" name="StarryXStyle-nav-1"/>
           <p:cNvSpPr/>
           <p:nvPr/>
         </p:nvSpPr>
         <p:spPr>
           <a:xfrm>
             <a:off x="4299840" y="245160"/>
-            <a:ext cx="1083240" cy="258480"/>
+            <a:ext cx="1082880" cy="258120"/>
           </a:xfrm>
           <a:prstGeom prst="rect">
             <a:avLst/>
@@ -14919,14 +15037,14 @@
       </p:sp>
       <p:sp>
         <p:nvSpPr>
-          <p:cNvPr id="262" name="StarryXStyle-nav-2"/>
+          <p:cNvPr id="261" name="StarryXStyle-nav-2"/>
           <p:cNvSpPr/>
           <p:nvPr/>
         </p:nvSpPr>
         <p:spPr>
           <a:xfrm>
             <a:off x="5384520" y="245160"/>
-            <a:ext cx="1083240" cy="258480"/>
+            <a:ext cx="1082880" cy="258120"/>
           </a:xfrm>
           <a:prstGeom prst="rect">
             <a:avLst/>
@@ -14973,14 +15091,14 @@
       </p:sp>
       <p:sp>
         <p:nvSpPr>
-          <p:cNvPr id="263" name="StarryXStyle-nav-3"/>
+          <p:cNvPr id="262" name="StarryXStyle-nav-3"/>
           <p:cNvSpPr/>
           <p:nvPr/>
         </p:nvSpPr>
         <p:spPr>
           <a:xfrm>
             <a:off x="6469200" y="245160"/>
-            <a:ext cx="1083240" cy="258480"/>
+            <a:ext cx="1082880" cy="258120"/>
           </a:xfrm>
           <a:prstGeom prst="rect">
             <a:avLst/>
@@ -15027,14 +15145,14 @@
       </p:sp>
       <p:sp>
         <p:nvSpPr>
-          <p:cNvPr id="264" name="StarryXStyle-nav-4"/>
+          <p:cNvPr id="263" name="StarryXStyle-nav-4"/>
           <p:cNvSpPr/>
           <p:nvPr/>
         </p:nvSpPr>
         <p:spPr>
           <a:xfrm>
             <a:off x="7553880" y="190080"/>
-            <a:ext cx="1083240" cy="258480"/>
+            <a:ext cx="1082880" cy="258120"/>
           </a:xfrm>
           <a:prstGeom prst="rect">
             <a:avLst/>
@@ -15081,14 +15199,14 @@
       </p:sp>
       <p:sp>
         <p:nvSpPr>
-          <p:cNvPr id="265" name="StarryXStyle-nav-5"/>
+          <p:cNvPr id="264" name="StarryXStyle-nav-5"/>
           <p:cNvSpPr/>
           <p:nvPr/>
         </p:nvSpPr>
         <p:spPr>
           <a:xfrm>
             <a:off x="8638200" y="245160"/>
-            <a:ext cx="1083240" cy="258480"/>
+            <a:ext cx="1082880" cy="258120"/>
           </a:xfrm>
           <a:prstGeom prst="rect">
             <a:avLst/>
@@ -15145,14 +15263,14 @@
       </p:sp>
       <p:sp>
         <p:nvSpPr>
-          <p:cNvPr id="266" name="StarryXStyle-nav-6"/>
+          <p:cNvPr id="265" name="StarryXStyle-nav-6"/>
           <p:cNvSpPr/>
           <p:nvPr/>
         </p:nvSpPr>
         <p:spPr>
           <a:xfrm>
             <a:off x="9722880" y="245160"/>
-            <a:ext cx="1083240" cy="258480"/>
+            <a:ext cx="1082880" cy="258120"/>
           </a:xfrm>
           <a:prstGeom prst="rect">
             <a:avLst/>
@@ -15199,14 +15317,14 @@
       </p:sp>
       <p:sp>
         <p:nvSpPr>
-          <p:cNvPr id="267" name="StarryXStyle-nav-7"/>
+          <p:cNvPr id="266" name="StarryXStyle-nav-7"/>
           <p:cNvSpPr/>
           <p:nvPr/>
         </p:nvSpPr>
         <p:spPr>
           <a:xfrm>
             <a:off x="10807560" y="245160"/>
-            <a:ext cx="1083240" cy="258480"/>
+            <a:ext cx="1082880" cy="258120"/>
           </a:xfrm>
           <a:prstGeom prst="rect">
             <a:avLst/>
@@ -15253,14 +15371,14 @@
       </p:sp>
       <p:sp>
         <p:nvSpPr>
-          <p:cNvPr id="268" name="StarryXStyle-title-marker"/>
+          <p:cNvPr id="267" name="StarryXStyle-title-marker"/>
           <p:cNvSpPr/>
           <p:nvPr/>
         </p:nvSpPr>
         <p:spPr>
           <a:xfrm>
             <a:off x="529920" y="1239840"/>
-            <a:ext cx="168480" cy="228600"/>
+            <a:ext cx="168120" cy="228240"/>
           </a:xfrm>
           <a:prstGeom prst="rect">
             <a:avLst/>
@@ -15337,14 +15455,14 @@
       </p:grpSpPr>
       <p:sp>
         <p:nvSpPr>
-          <p:cNvPr id="269" name="rect 52"/>
+          <p:cNvPr id="268" name="rect 52"/>
           <p:cNvSpPr/>
           <p:nvPr/>
         </p:nvSpPr>
         <p:spPr>
           <a:xfrm>
             <a:off x="1800" y="0"/>
-            <a:ext cx="12188880" cy="6856560"/>
+            <a:ext cx="12188520" cy="6856200"/>
           </a:xfrm>
           <a:prstGeom prst="rect">
             <a:avLst/>
@@ -15383,14 +15501,14 @@
       </p:sp>
       <p:sp>
         <p:nvSpPr>
-          <p:cNvPr id="270" name="Title"/>
+          <p:cNvPr id="269" name="Title"/>
           <p:cNvSpPr/>
           <p:nvPr/>
         </p:nvSpPr>
         <p:spPr>
           <a:xfrm>
             <a:off x="650160" y="1187280"/>
-            <a:ext cx="10197720" cy="432720"/>
+            <a:ext cx="10197360" cy="432720"/>
           </a:xfrm>
           <a:prstGeom prst="rect">
             <a:avLst/>
@@ -15437,14 +15555,14 @@
       </p:sp>
       <p:sp>
         <p:nvSpPr>
-          <p:cNvPr id="271" name="Body"/>
+          <p:cNvPr id="270" name="Body"/>
           <p:cNvSpPr/>
           <p:nvPr/>
         </p:nvSpPr>
         <p:spPr>
           <a:xfrm>
             <a:off x="1205280" y="2399400"/>
-            <a:ext cx="9774720" cy="2640600"/>
+            <a:ext cx="9774360" cy="2640600"/>
           </a:xfrm>
           <a:prstGeom prst="roundRect">
             <a:avLst>
@@ -15885,7 +16003,7 @@
       </p:sp>
       <p:pic>
         <p:nvPicPr>
-          <p:cNvPr id="272" name="StarryXStyle-header-logo" descr=""/>
+          <p:cNvPr id="271" name="StarryXStyle-header-logo" descr=""/>
           <p:cNvPicPr/>
           <p:nvPr/>
         </p:nvPicPr>
@@ -15896,7 +16014,7 @@
         <p:spPr>
           <a:xfrm>
             <a:off x="150120" y="119880"/>
-            <a:ext cx="2548440" cy="608400"/>
+            <a:ext cx="2548080" cy="608040"/>
           </a:xfrm>
           <a:prstGeom prst="rect">
             <a:avLst/>
@@ -15908,14 +16026,14 @@
       </p:pic>
       <p:sp>
         <p:nvSpPr>
-          <p:cNvPr id="273" name="StarryXStyle-nav-active"/>
+          <p:cNvPr id="272" name="StarryXStyle-nav-active"/>
           <p:cNvSpPr/>
           <p:nvPr/>
         </p:nvSpPr>
         <p:spPr>
           <a:xfrm>
             <a:off x="7553880" y="0"/>
-            <a:ext cx="1083240" cy="708480"/>
+            <a:ext cx="1082880" cy="708120"/>
           </a:xfrm>
           <a:prstGeom prst="rect">
             <a:avLst/>
@@ -15954,14 +16072,14 @@
       </p:sp>
       <p:sp>
         <p:nvSpPr>
-          <p:cNvPr id="274" name="StarryXStyle-nav-1"/>
+          <p:cNvPr id="273" name="StarryXStyle-nav-1"/>
           <p:cNvSpPr/>
           <p:nvPr/>
         </p:nvSpPr>
         <p:spPr>
           <a:xfrm>
             <a:off x="4299840" y="245160"/>
-            <a:ext cx="1083240" cy="258480"/>
+            <a:ext cx="1082880" cy="258120"/>
           </a:xfrm>
           <a:prstGeom prst="rect">
             <a:avLst/>
@@ -16008,14 +16126,14 @@
       </p:sp>
       <p:sp>
         <p:nvSpPr>
-          <p:cNvPr id="275" name="StarryXStyle-nav-2"/>
+          <p:cNvPr id="274" name="StarryXStyle-nav-2"/>
           <p:cNvSpPr/>
           <p:nvPr/>
         </p:nvSpPr>
         <p:spPr>
           <a:xfrm>
             <a:off x="5384520" y="245160"/>
-            <a:ext cx="1083240" cy="258480"/>
+            <a:ext cx="1082880" cy="258120"/>
           </a:xfrm>
           <a:prstGeom prst="rect">
             <a:avLst/>
@@ -16062,14 +16180,14 @@
       </p:sp>
       <p:sp>
         <p:nvSpPr>
-          <p:cNvPr id="276" name="StarryXStyle-nav-3"/>
+          <p:cNvPr id="275" name="StarryXStyle-nav-3"/>
           <p:cNvSpPr/>
           <p:nvPr/>
         </p:nvSpPr>
         <p:spPr>
           <a:xfrm>
             <a:off x="6469200" y="245160"/>
-            <a:ext cx="1083240" cy="258480"/>
+            <a:ext cx="1082880" cy="258120"/>
           </a:xfrm>
           <a:prstGeom prst="rect">
             <a:avLst/>
@@ -16116,14 +16234,14 @@
       </p:sp>
       <p:sp>
         <p:nvSpPr>
-          <p:cNvPr id="277" name="StarryXStyle-nav-4"/>
+          <p:cNvPr id="276" name="StarryXStyle-nav-4"/>
           <p:cNvSpPr/>
           <p:nvPr/>
         </p:nvSpPr>
         <p:spPr>
           <a:xfrm>
             <a:off x="7553880" y="190080"/>
-            <a:ext cx="1083240" cy="258480"/>
+            <a:ext cx="1082880" cy="258120"/>
           </a:xfrm>
           <a:prstGeom prst="rect">
             <a:avLst/>
@@ -16170,14 +16288,14 @@
       </p:sp>
       <p:sp>
         <p:nvSpPr>
-          <p:cNvPr id="278" name="StarryXStyle-nav-5"/>
+          <p:cNvPr id="277" name="StarryXStyle-nav-5"/>
           <p:cNvSpPr/>
           <p:nvPr/>
         </p:nvSpPr>
         <p:spPr>
           <a:xfrm>
             <a:off x="8638200" y="245160"/>
-            <a:ext cx="1083240" cy="258480"/>
+            <a:ext cx="1082880" cy="258120"/>
           </a:xfrm>
           <a:prstGeom prst="rect">
             <a:avLst/>
@@ -16234,14 +16352,14 @@
       </p:sp>
       <p:sp>
         <p:nvSpPr>
-          <p:cNvPr id="279" name="StarryXStyle-nav-6"/>
+          <p:cNvPr id="278" name="StarryXStyle-nav-6"/>
           <p:cNvSpPr/>
           <p:nvPr/>
         </p:nvSpPr>
         <p:spPr>
           <a:xfrm>
             <a:off x="9722880" y="245160"/>
-            <a:ext cx="1083240" cy="258480"/>
+            <a:ext cx="1082880" cy="258120"/>
           </a:xfrm>
           <a:prstGeom prst="rect">
             <a:avLst/>
@@ -16288,14 +16406,14 @@
       </p:sp>
       <p:sp>
         <p:nvSpPr>
-          <p:cNvPr id="280" name="StarryXStyle-nav-7"/>
+          <p:cNvPr id="279" name="StarryXStyle-nav-7"/>
           <p:cNvSpPr/>
           <p:nvPr/>
         </p:nvSpPr>
         <p:spPr>
           <a:xfrm>
             <a:off x="10807560" y="245160"/>
-            <a:ext cx="1083240" cy="258480"/>
+            <a:ext cx="1082880" cy="258120"/>
           </a:xfrm>
           <a:prstGeom prst="rect">
             <a:avLst/>
@@ -16342,14 +16460,14 @@
       </p:sp>
       <p:sp>
         <p:nvSpPr>
-          <p:cNvPr id="281" name="StarryXStyle-title-marker"/>
+          <p:cNvPr id="280" name="StarryXStyle-title-marker"/>
           <p:cNvSpPr/>
           <p:nvPr/>
         </p:nvSpPr>
         <p:spPr>
           <a:xfrm>
             <a:off x="529920" y="1239840"/>
-            <a:ext cx="168480" cy="228600"/>
+            <a:ext cx="168120" cy="228240"/>
           </a:xfrm>
           <a:prstGeom prst="rect">
             <a:avLst/>
@@ -16426,14 +16544,14 @@
       </p:grpSpPr>
       <p:sp>
         <p:nvSpPr>
-          <p:cNvPr id="282" name="StarryXTransition-bg"/>
+          <p:cNvPr id="281" name="StarryXTransition-bg"/>
           <p:cNvSpPr/>
           <p:nvPr/>
         </p:nvSpPr>
         <p:spPr>
           <a:xfrm>
             <a:off x="0" y="0"/>
-            <a:ext cx="12190680" cy="6856560"/>
+            <a:ext cx="12190320" cy="6856200"/>
           </a:xfrm>
           <a:prstGeom prst="rect">
             <a:avLst/>
@@ -16472,14 +16590,14 @@
       </p:sp>
       <p:sp>
         <p:nvSpPr>
-          <p:cNvPr id="283" name="StarryXTransition-blue-band"/>
+          <p:cNvPr id="282" name="StarryXTransition-blue-band"/>
           <p:cNvSpPr/>
           <p:nvPr/>
         </p:nvSpPr>
         <p:spPr>
           <a:xfrm>
             <a:off x="0" y="0"/>
-            <a:ext cx="12190680" cy="3736080"/>
+            <a:ext cx="12190320" cy="3735720"/>
           </a:xfrm>
           <a:prstGeom prst="rect">
             <a:avLst/>
@@ -16518,14 +16636,14 @@
       </p:sp>
       <p:sp>
         <p:nvSpPr>
-          <p:cNvPr id="284" name="StarryXTransition-blue-shadow"/>
+          <p:cNvPr id="283" name="StarryXTransition-blue-shadow"/>
           <p:cNvSpPr/>
           <p:nvPr/>
         </p:nvSpPr>
         <p:spPr>
           <a:xfrm>
             <a:off x="0" y="3669120"/>
-            <a:ext cx="12190680" cy="26640"/>
+            <a:ext cx="12190320" cy="26280"/>
           </a:xfrm>
           <a:prstGeom prst="rect">
             <a:avLst/>
@@ -16564,7 +16682,7 @@
       </p:sp>
       <p:pic>
         <p:nvPicPr>
-          <p:cNvPr id="285" name="StarryXTransition-cscc-logo" descr=""/>
+          <p:cNvPr id="284" name="StarryXTransition-cscc-logo" descr=""/>
           <p:cNvPicPr/>
           <p:nvPr/>
         </p:nvPicPr>
@@ -16575,7 +16693,7 @@
         <p:spPr>
           <a:xfrm>
             <a:off x="97560" y="219600"/>
-            <a:ext cx="2949120" cy="608760"/>
+            <a:ext cx="2948760" cy="608400"/>
           </a:xfrm>
           <a:prstGeom prst="rect">
             <a:avLst/>
@@ -16587,7 +16705,7 @@
       </p:pic>
       <p:pic>
         <p:nvPicPr>
-          <p:cNvPr id="286" name="StarryXTransition-hzdu-logo" descr=""/>
+          <p:cNvPr id="285" name="StarryXTransition-hzdu-logo" descr=""/>
           <p:cNvPicPr/>
           <p:nvPr/>
         </p:nvPicPr>
@@ -16598,7 +16716,7 @@
         <p:spPr>
           <a:xfrm>
             <a:off x="8558640" y="102960"/>
-            <a:ext cx="3546360" cy="828360"/>
+            <a:ext cx="3546000" cy="828000"/>
           </a:xfrm>
           <a:prstGeom prst="rect">
             <a:avLst/>
@@ -16610,14 +16728,14 @@
       </p:pic>
       <p:sp>
         <p:nvSpPr>
-          <p:cNvPr id="287" name="StarryXTransition-part-hex"/>
+          <p:cNvPr id="286" name="StarryXTransition-part-hex"/>
           <p:cNvSpPr/>
           <p:nvPr/>
         </p:nvSpPr>
         <p:spPr>
           <a:xfrm>
             <a:off x="5157360" y="2983320"/>
-            <a:ext cx="1861920" cy="1542240"/>
+            <a:ext cx="1861560" cy="1541880"/>
           </a:xfrm>
           <a:prstGeom prst="hexagon">
             <a:avLst>
@@ -16662,14 +16780,14 @@
       </p:sp>
       <p:sp>
         <p:nvSpPr>
-          <p:cNvPr id="288" name="StarryXTransition-part-text"/>
+          <p:cNvPr id="287" name="StarryXTransition-part-text"/>
           <p:cNvSpPr/>
           <p:nvPr/>
         </p:nvSpPr>
         <p:spPr>
           <a:xfrm>
             <a:off x="5157360" y="3633120"/>
-            <a:ext cx="1875960" cy="379080"/>
+            <a:ext cx="1875600" cy="378720"/>
           </a:xfrm>
           <a:prstGeom prst="rect">
             <a:avLst/>
@@ -16716,14 +16834,14 @@
       </p:sp>
       <p:sp>
         <p:nvSpPr>
-          <p:cNvPr id="289" name="StarryXTransition-title"/>
+          <p:cNvPr id="288" name="StarryXTransition-title"/>
           <p:cNvSpPr/>
           <p:nvPr/>
         </p:nvSpPr>
         <p:spPr>
           <a:xfrm>
             <a:off x="1219320" y="4526280"/>
-            <a:ext cx="9752040" cy="1027440"/>
+            <a:ext cx="9751680" cy="1027080"/>
           </a:xfrm>
           <a:prstGeom prst="rect">
             <a:avLst/>
@@ -16810,14 +16928,14 @@
       </p:grpSpPr>
       <p:sp>
         <p:nvSpPr>
-          <p:cNvPr id="290" name="rect 52"/>
+          <p:cNvPr id="289" name="rect 52"/>
           <p:cNvSpPr/>
           <p:nvPr/>
         </p:nvSpPr>
         <p:spPr>
           <a:xfrm>
             <a:off x="3240" y="-16560"/>
-            <a:ext cx="12188880" cy="6856560"/>
+            <a:ext cx="12188520" cy="6856200"/>
           </a:xfrm>
           <a:prstGeom prst="rect">
             <a:avLst/>
@@ -16856,14 +16974,14 @@
       </p:sp>
       <p:sp>
         <p:nvSpPr>
-          <p:cNvPr id="291" name="Title"/>
+          <p:cNvPr id="290" name="Title"/>
           <p:cNvSpPr/>
           <p:nvPr/>
         </p:nvSpPr>
         <p:spPr>
           <a:xfrm>
             <a:off x="650160" y="1187280"/>
-            <a:ext cx="10017360" cy="432720"/>
+            <a:ext cx="10017000" cy="432720"/>
           </a:xfrm>
           <a:prstGeom prst="rect">
             <a:avLst/>
@@ -16910,14 +17028,14 @@
       </p:sp>
       <p:sp>
         <p:nvSpPr>
-          <p:cNvPr id="292" name="Body"/>
+          <p:cNvPr id="291" name="Body"/>
           <p:cNvSpPr/>
           <p:nvPr/>
         </p:nvSpPr>
         <p:spPr>
           <a:xfrm>
             <a:off x="604440" y="2340000"/>
-            <a:ext cx="4615560" cy="2914920"/>
+            <a:ext cx="4615200" cy="2914920"/>
           </a:xfrm>
           <a:prstGeom prst="roundRect">
             <a:avLst>
@@ -17253,7 +17371,7 @@
       </p:sp>
       <p:pic>
         <p:nvPicPr>
-          <p:cNvPr id="293" name="orays-05-fd-vfs.png" descr=""/>
+          <p:cNvPr id="292" name="orays-05-fd-vfs.png" descr=""/>
           <p:cNvPicPr/>
           <p:nvPr/>
         </p:nvPicPr>
@@ -17264,7 +17382,7 @@
         <p:spPr>
           <a:xfrm>
             <a:off x="5834880" y="2048400"/>
-            <a:ext cx="5449320" cy="3817440"/>
+            <a:ext cx="5448960" cy="3817080"/>
           </a:xfrm>
           <a:prstGeom prst="rect">
             <a:avLst/>
@@ -17276,14 +17394,14 @@
       </p:pic>
       <p:sp>
         <p:nvSpPr>
-          <p:cNvPr id="294" name="Caption"/>
+          <p:cNvPr id="293" name="Caption"/>
           <p:cNvSpPr/>
           <p:nvPr/>
         </p:nvSpPr>
         <p:spPr>
           <a:xfrm>
             <a:off x="6807600" y="6120000"/>
-            <a:ext cx="4892400" cy="223560"/>
+            <a:ext cx="4892040" cy="223560"/>
           </a:xfrm>
           <a:prstGeom prst="rect">
             <a:avLst/>
@@ -17380,7 +17498,7 @@
       </p:sp>
       <p:pic>
         <p:nvPicPr>
-          <p:cNvPr id="295" name="StarryXStyle-header-logo" descr=""/>
+          <p:cNvPr id="294" name="StarryXStyle-header-logo" descr=""/>
           <p:cNvPicPr/>
           <p:nvPr/>
         </p:nvPicPr>
@@ -17391,7 +17509,7 @@
         <p:spPr>
           <a:xfrm>
             <a:off x="150120" y="119880"/>
-            <a:ext cx="2548440" cy="608400"/>
+            <a:ext cx="2548080" cy="608040"/>
           </a:xfrm>
           <a:prstGeom prst="rect">
             <a:avLst/>
@@ -17403,14 +17521,14 @@
       </p:pic>
       <p:sp>
         <p:nvSpPr>
-          <p:cNvPr id="296" name="StarryXStyle-nav-active"/>
+          <p:cNvPr id="295" name="StarryXStyle-nav-active"/>
           <p:cNvSpPr/>
           <p:nvPr/>
         </p:nvSpPr>
         <p:spPr>
           <a:xfrm>
             <a:off x="8638200" y="0"/>
-            <a:ext cx="1083240" cy="708480"/>
+            <a:ext cx="1082880" cy="708120"/>
           </a:xfrm>
           <a:prstGeom prst="rect">
             <a:avLst/>
@@ -17449,14 +17567,14 @@
       </p:sp>
       <p:sp>
         <p:nvSpPr>
-          <p:cNvPr id="297" name="StarryXStyle-nav-1"/>
+          <p:cNvPr id="296" name="StarryXStyle-nav-1"/>
           <p:cNvSpPr/>
           <p:nvPr/>
         </p:nvSpPr>
         <p:spPr>
           <a:xfrm>
             <a:off x="4299840" y="245160"/>
-            <a:ext cx="1083240" cy="258480"/>
+            <a:ext cx="1082880" cy="258120"/>
           </a:xfrm>
           <a:prstGeom prst="rect">
             <a:avLst/>
@@ -17503,14 +17621,14 @@
       </p:sp>
       <p:sp>
         <p:nvSpPr>
-          <p:cNvPr id="298" name="StarryXStyle-nav-2"/>
+          <p:cNvPr id="297" name="StarryXStyle-nav-2"/>
           <p:cNvSpPr/>
           <p:nvPr/>
         </p:nvSpPr>
         <p:spPr>
           <a:xfrm>
             <a:off x="5384520" y="245160"/>
-            <a:ext cx="1083240" cy="258480"/>
+            <a:ext cx="1082880" cy="258120"/>
           </a:xfrm>
           <a:prstGeom prst="rect">
             <a:avLst/>
@@ -17557,14 +17675,14 @@
       </p:sp>
       <p:sp>
         <p:nvSpPr>
-          <p:cNvPr id="299" name="StarryXStyle-nav-3"/>
+          <p:cNvPr id="298" name="StarryXStyle-nav-3"/>
           <p:cNvSpPr/>
           <p:nvPr/>
         </p:nvSpPr>
         <p:spPr>
           <a:xfrm>
             <a:off x="6469200" y="245160"/>
-            <a:ext cx="1083240" cy="258480"/>
+            <a:ext cx="1082880" cy="258120"/>
           </a:xfrm>
           <a:prstGeom prst="rect">
             <a:avLst/>
@@ -17611,14 +17729,14 @@
       </p:sp>
       <p:sp>
         <p:nvSpPr>
-          <p:cNvPr id="300" name="StarryXStyle-nav-4"/>
+          <p:cNvPr id="299" name="StarryXStyle-nav-4"/>
           <p:cNvSpPr/>
           <p:nvPr/>
         </p:nvSpPr>
         <p:spPr>
           <a:xfrm>
             <a:off x="7553880" y="245160"/>
-            <a:ext cx="1083240" cy="258480"/>
+            <a:ext cx="1082880" cy="258120"/>
           </a:xfrm>
           <a:prstGeom prst="rect">
             <a:avLst/>
@@ -17665,14 +17783,14 @@
       </p:sp>
       <p:sp>
         <p:nvSpPr>
-          <p:cNvPr id="301" name="StarryXStyle-nav-5"/>
+          <p:cNvPr id="300" name="StarryXStyle-nav-5"/>
           <p:cNvSpPr/>
           <p:nvPr/>
         </p:nvSpPr>
         <p:spPr>
           <a:xfrm>
             <a:off x="8638200" y="190080"/>
-            <a:ext cx="1083240" cy="258480"/>
+            <a:ext cx="1082880" cy="258120"/>
           </a:xfrm>
           <a:prstGeom prst="rect">
             <a:avLst/>
@@ -17729,14 +17847,14 @@
       </p:sp>
       <p:sp>
         <p:nvSpPr>
-          <p:cNvPr id="302" name="StarryXStyle-nav-6"/>
+          <p:cNvPr id="301" name="StarryXStyle-nav-6"/>
           <p:cNvSpPr/>
           <p:nvPr/>
         </p:nvSpPr>
         <p:spPr>
           <a:xfrm>
             <a:off x="9722880" y="245160"/>
-            <a:ext cx="1083240" cy="258480"/>
+            <a:ext cx="1082880" cy="258120"/>
           </a:xfrm>
           <a:prstGeom prst="rect">
             <a:avLst/>
@@ -17783,14 +17901,14 @@
       </p:sp>
       <p:sp>
         <p:nvSpPr>
-          <p:cNvPr id="303" name="StarryXStyle-nav-7"/>
+          <p:cNvPr id="302" name="StarryXStyle-nav-7"/>
           <p:cNvSpPr/>
           <p:nvPr/>
         </p:nvSpPr>
         <p:spPr>
           <a:xfrm>
             <a:off x="10807560" y="245160"/>
-            <a:ext cx="1083240" cy="258480"/>
+            <a:ext cx="1082880" cy="258120"/>
           </a:xfrm>
           <a:prstGeom prst="rect">
             <a:avLst/>
@@ -17837,14 +17955,14 @@
       </p:sp>
       <p:sp>
         <p:nvSpPr>
-          <p:cNvPr id="304" name="StarryXStyle-title-marker"/>
+          <p:cNvPr id="303" name="StarryXStyle-title-marker"/>
           <p:cNvSpPr/>
           <p:nvPr/>
         </p:nvSpPr>
         <p:spPr>
           <a:xfrm>
             <a:off x="529920" y="1239840"/>
-            <a:ext cx="168480" cy="228600"/>
+            <a:ext cx="168120" cy="228240"/>
           </a:xfrm>
           <a:prstGeom prst="rect">
             <a:avLst/>
@@ -17921,14 +18039,14 @@
       </p:grpSpPr>
       <p:sp>
         <p:nvSpPr>
-          <p:cNvPr id="305" name="rect 52"/>
+          <p:cNvPr id="304" name="rect 52"/>
           <p:cNvSpPr/>
           <p:nvPr/>
         </p:nvSpPr>
         <p:spPr>
           <a:xfrm>
             <a:off x="1800" y="0"/>
-            <a:ext cx="12188880" cy="6856560"/>
+            <a:ext cx="12188520" cy="6856200"/>
           </a:xfrm>
           <a:prstGeom prst="rect">
             <a:avLst/>
@@ -17967,14 +18085,14 @@
       </p:sp>
       <p:sp>
         <p:nvSpPr>
-          <p:cNvPr id="306" name="Title"/>
+          <p:cNvPr id="305" name="Title"/>
           <p:cNvSpPr/>
           <p:nvPr/>
         </p:nvSpPr>
         <p:spPr>
           <a:xfrm>
             <a:off x="650160" y="1187280"/>
-            <a:ext cx="10197720" cy="432720"/>
+            <a:ext cx="10197360" cy="432720"/>
           </a:xfrm>
           <a:prstGeom prst="rect">
             <a:avLst/>
@@ -18031,14 +18149,14 @@
       </p:sp>
       <p:sp>
         <p:nvSpPr>
-          <p:cNvPr id="307" name="Body"/>
+          <p:cNvPr id="306" name="Body"/>
           <p:cNvSpPr/>
           <p:nvPr/>
         </p:nvSpPr>
         <p:spPr>
           <a:xfrm>
             <a:off x="1260000" y="2356920"/>
-            <a:ext cx="9774720" cy="2323080"/>
+            <a:ext cx="9774360" cy="2323080"/>
           </a:xfrm>
           <a:prstGeom prst="roundRect">
             <a:avLst>
@@ -18517,7 +18635,7 @@
       </p:sp>
       <p:pic>
         <p:nvPicPr>
-          <p:cNvPr id="308" name="StarryXStyle-header-logo" descr=""/>
+          <p:cNvPr id="307" name="StarryXStyle-header-logo" descr=""/>
           <p:cNvPicPr/>
           <p:nvPr/>
         </p:nvPicPr>
@@ -18528,7 +18646,7 @@
         <p:spPr>
           <a:xfrm>
             <a:off x="150120" y="119880"/>
-            <a:ext cx="2548440" cy="608400"/>
+            <a:ext cx="2548080" cy="608040"/>
           </a:xfrm>
           <a:prstGeom prst="rect">
             <a:avLst/>
@@ -18540,14 +18658,14 @@
       </p:pic>
       <p:sp>
         <p:nvSpPr>
-          <p:cNvPr id="309" name="StarryXStyle-nav-active"/>
+          <p:cNvPr id="308" name="StarryXStyle-nav-active"/>
           <p:cNvSpPr/>
           <p:nvPr/>
         </p:nvSpPr>
         <p:spPr>
           <a:xfrm>
             <a:off x="8638200" y="0"/>
-            <a:ext cx="1083240" cy="708480"/>
+            <a:ext cx="1082880" cy="708120"/>
           </a:xfrm>
           <a:prstGeom prst="rect">
             <a:avLst/>
@@ -18586,14 +18704,14 @@
       </p:sp>
       <p:sp>
         <p:nvSpPr>
-          <p:cNvPr id="310" name="StarryXStyle-nav-1"/>
+          <p:cNvPr id="309" name="StarryXStyle-nav-1"/>
           <p:cNvSpPr/>
           <p:nvPr/>
         </p:nvSpPr>
         <p:spPr>
           <a:xfrm>
             <a:off x="4299840" y="245160"/>
-            <a:ext cx="1083240" cy="258480"/>
+            <a:ext cx="1082880" cy="258120"/>
           </a:xfrm>
           <a:prstGeom prst="rect">
             <a:avLst/>
@@ -18640,14 +18758,14 @@
       </p:sp>
       <p:sp>
         <p:nvSpPr>
-          <p:cNvPr id="311" name="StarryXStyle-nav-2"/>
+          <p:cNvPr id="310" name="StarryXStyle-nav-2"/>
           <p:cNvSpPr/>
           <p:nvPr/>
         </p:nvSpPr>
         <p:spPr>
           <a:xfrm>
             <a:off x="5384520" y="245160"/>
-            <a:ext cx="1083240" cy="258480"/>
+            <a:ext cx="1082880" cy="258120"/>
           </a:xfrm>
           <a:prstGeom prst="rect">
             <a:avLst/>
@@ -18694,14 +18812,14 @@
       </p:sp>
       <p:sp>
         <p:nvSpPr>
-          <p:cNvPr id="312" name="StarryXStyle-nav-3"/>
+          <p:cNvPr id="311" name="StarryXStyle-nav-3"/>
           <p:cNvSpPr/>
           <p:nvPr/>
         </p:nvSpPr>
         <p:spPr>
           <a:xfrm>
             <a:off x="6469200" y="245160"/>
-            <a:ext cx="1083240" cy="258480"/>
+            <a:ext cx="1082880" cy="258120"/>
           </a:xfrm>
           <a:prstGeom prst="rect">
             <a:avLst/>
@@ -18748,14 +18866,14 @@
       </p:sp>
       <p:sp>
         <p:nvSpPr>
-          <p:cNvPr id="313" name="StarryXStyle-nav-4"/>
+          <p:cNvPr id="312" name="StarryXStyle-nav-4"/>
           <p:cNvSpPr/>
           <p:nvPr/>
         </p:nvSpPr>
         <p:spPr>
           <a:xfrm>
             <a:off x="7553880" y="245160"/>
-            <a:ext cx="1083240" cy="258480"/>
+            <a:ext cx="1082880" cy="258120"/>
           </a:xfrm>
           <a:prstGeom prst="rect">
             <a:avLst/>
@@ -18802,14 +18920,14 @@
       </p:sp>
       <p:sp>
         <p:nvSpPr>
-          <p:cNvPr id="314" name="StarryXStyle-nav-5"/>
+          <p:cNvPr id="313" name="StarryXStyle-nav-5"/>
           <p:cNvSpPr/>
           <p:nvPr/>
         </p:nvSpPr>
         <p:spPr>
           <a:xfrm>
             <a:off x="8638200" y="190080"/>
-            <a:ext cx="1083240" cy="258480"/>
+            <a:ext cx="1082880" cy="258120"/>
           </a:xfrm>
           <a:prstGeom prst="rect">
             <a:avLst/>
@@ -18866,14 +18984,14 @@
       </p:sp>
       <p:sp>
         <p:nvSpPr>
-          <p:cNvPr id="315" name="StarryXStyle-nav-6"/>
+          <p:cNvPr id="314" name="StarryXStyle-nav-6"/>
           <p:cNvSpPr/>
           <p:nvPr/>
         </p:nvSpPr>
         <p:spPr>
           <a:xfrm>
             <a:off x="9722880" y="245160"/>
-            <a:ext cx="1083240" cy="258480"/>
+            <a:ext cx="1082880" cy="258120"/>
           </a:xfrm>
           <a:prstGeom prst="rect">
             <a:avLst/>
@@ -18920,14 +19038,14 @@
       </p:sp>
       <p:sp>
         <p:nvSpPr>
-          <p:cNvPr id="316" name="StarryXStyle-nav-7"/>
+          <p:cNvPr id="315" name="StarryXStyle-nav-7"/>
           <p:cNvSpPr/>
           <p:nvPr/>
         </p:nvSpPr>
         <p:spPr>
           <a:xfrm>
             <a:off x="10807560" y="245160"/>
-            <a:ext cx="1083240" cy="258480"/>
+            <a:ext cx="1082880" cy="258120"/>
           </a:xfrm>
           <a:prstGeom prst="rect">
             <a:avLst/>
@@ -18974,14 +19092,14 @@
       </p:sp>
       <p:sp>
         <p:nvSpPr>
-          <p:cNvPr id="317" name="StarryXStyle-title-marker"/>
+          <p:cNvPr id="316" name="StarryXStyle-title-marker"/>
           <p:cNvSpPr/>
           <p:nvPr/>
         </p:nvSpPr>
         <p:spPr>
           <a:xfrm>
             <a:off x="529920" y="1239840"/>
-            <a:ext cx="168480" cy="228600"/>
+            <a:ext cx="168120" cy="228240"/>
           </a:xfrm>
           <a:prstGeom prst="rect">
             <a:avLst/>
@@ -19058,14 +19176,14 @@
       </p:grpSpPr>
       <p:sp>
         <p:nvSpPr>
-          <p:cNvPr id="318" name="rect 52"/>
+          <p:cNvPr id="317" name="rect 52"/>
           <p:cNvSpPr/>
           <p:nvPr/>
         </p:nvSpPr>
         <p:spPr>
           <a:xfrm>
             <a:off x="0" y="-16560"/>
-            <a:ext cx="12188880" cy="6856560"/>
+            <a:ext cx="12188520" cy="6856200"/>
           </a:xfrm>
           <a:prstGeom prst="rect">
             <a:avLst/>
@@ -19104,14 +19222,14 @@
       </p:sp>
       <p:sp>
         <p:nvSpPr>
-          <p:cNvPr id="319" name="Title"/>
+          <p:cNvPr id="318" name="Title"/>
           <p:cNvSpPr/>
           <p:nvPr/>
         </p:nvSpPr>
         <p:spPr>
           <a:xfrm>
             <a:off x="650160" y="1171080"/>
-            <a:ext cx="9686520" cy="432720"/>
+            <a:ext cx="9686160" cy="432720"/>
           </a:xfrm>
           <a:prstGeom prst="rect">
             <a:avLst/>
@@ -19168,7 +19286,7 @@
       </p:sp>
       <p:pic>
         <p:nvPicPr>
-          <p:cNvPr id="320" name="orays-06-ipc-shm.png" descr=""/>
+          <p:cNvPr id="319" name="orays-06-ipc-shm.png" descr=""/>
           <p:cNvPicPr/>
           <p:nvPr/>
         </p:nvPicPr>
@@ -19179,7 +19297,7 @@
         <p:spPr>
           <a:xfrm>
             <a:off x="6135480" y="1603800"/>
-            <a:ext cx="4903200" cy="4305600"/>
+            <a:ext cx="4902840" cy="4305240"/>
           </a:xfrm>
           <a:prstGeom prst="rect">
             <a:avLst/>
@@ -19191,14 +19309,14 @@
       </p:pic>
       <p:sp>
         <p:nvSpPr>
-          <p:cNvPr id="321" name="Caption"/>
+          <p:cNvPr id="320" name="Caption"/>
           <p:cNvSpPr/>
           <p:nvPr/>
         </p:nvSpPr>
         <p:spPr>
           <a:xfrm>
             <a:off x="6654240" y="6097680"/>
-            <a:ext cx="4731120" cy="219240"/>
+            <a:ext cx="4730760" cy="219240"/>
           </a:xfrm>
           <a:prstGeom prst="rect">
             <a:avLst/>
@@ -19335,14 +19453,14 @@
       </p:sp>
       <p:sp>
         <p:nvSpPr>
-          <p:cNvPr id="322" name="Body"/>
+          <p:cNvPr id="321" name="Body"/>
           <p:cNvSpPr/>
           <p:nvPr/>
         </p:nvSpPr>
         <p:spPr>
           <a:xfrm>
             <a:off x="1252080" y="1792440"/>
-            <a:ext cx="4462920" cy="4327560"/>
+            <a:ext cx="4462560" cy="4327560"/>
           </a:xfrm>
           <a:prstGeom prst="roundRect">
             <a:avLst>
@@ -19667,7 +19785,7 @@
       </p:sp>
       <p:pic>
         <p:nvPicPr>
-          <p:cNvPr id="323" name="StarryXStyle-header-logo" descr=""/>
+          <p:cNvPr id="322" name="StarryXStyle-header-logo" descr=""/>
           <p:cNvPicPr/>
           <p:nvPr/>
         </p:nvPicPr>
@@ -19678,7 +19796,7 @@
         <p:spPr>
           <a:xfrm>
             <a:off x="150120" y="119880"/>
-            <a:ext cx="2548440" cy="608400"/>
+            <a:ext cx="2548080" cy="608040"/>
           </a:xfrm>
           <a:prstGeom prst="rect">
             <a:avLst/>
@@ -19690,14 +19808,14 @@
       </p:pic>
       <p:sp>
         <p:nvSpPr>
-          <p:cNvPr id="324" name="StarryXStyle-nav-active"/>
+          <p:cNvPr id="323" name="StarryXStyle-nav-active"/>
           <p:cNvSpPr/>
           <p:nvPr/>
         </p:nvSpPr>
         <p:spPr>
           <a:xfrm>
             <a:off x="8638200" y="0"/>
-            <a:ext cx="1083240" cy="708480"/>
+            <a:ext cx="1082880" cy="708120"/>
           </a:xfrm>
           <a:prstGeom prst="rect">
             <a:avLst/>
@@ -19736,14 +19854,14 @@
       </p:sp>
       <p:sp>
         <p:nvSpPr>
-          <p:cNvPr id="325" name="StarryXStyle-nav-1"/>
+          <p:cNvPr id="324" name="StarryXStyle-nav-1"/>
           <p:cNvSpPr/>
           <p:nvPr/>
         </p:nvSpPr>
         <p:spPr>
           <a:xfrm>
             <a:off x="4299840" y="245160"/>
-            <a:ext cx="1083240" cy="258480"/>
+            <a:ext cx="1082880" cy="258120"/>
           </a:xfrm>
           <a:prstGeom prst="rect">
             <a:avLst/>
@@ -19790,14 +19908,14 @@
       </p:sp>
       <p:sp>
         <p:nvSpPr>
-          <p:cNvPr id="326" name="StarryXStyle-nav-2"/>
+          <p:cNvPr id="325" name="StarryXStyle-nav-2"/>
           <p:cNvSpPr/>
           <p:nvPr/>
         </p:nvSpPr>
         <p:spPr>
           <a:xfrm>
             <a:off x="5384520" y="245160"/>
-            <a:ext cx="1083240" cy="258480"/>
+            <a:ext cx="1082880" cy="258120"/>
           </a:xfrm>
           <a:prstGeom prst="rect">
             <a:avLst/>
@@ -19844,14 +19962,14 @@
       </p:sp>
       <p:sp>
         <p:nvSpPr>
-          <p:cNvPr id="327" name="StarryXStyle-nav-3"/>
+          <p:cNvPr id="326" name="StarryXStyle-nav-3"/>
           <p:cNvSpPr/>
           <p:nvPr/>
         </p:nvSpPr>
         <p:spPr>
           <a:xfrm>
             <a:off x="6469200" y="245160"/>
-            <a:ext cx="1083240" cy="258480"/>
+            <a:ext cx="1082880" cy="258120"/>
           </a:xfrm>
           <a:prstGeom prst="rect">
             <a:avLst/>
@@ -19898,14 +20016,14 @@
       </p:sp>
       <p:sp>
         <p:nvSpPr>
-          <p:cNvPr id="328" name="StarryXStyle-nav-4"/>
+          <p:cNvPr id="327" name="StarryXStyle-nav-4"/>
           <p:cNvSpPr/>
           <p:nvPr/>
         </p:nvSpPr>
         <p:spPr>
           <a:xfrm>
             <a:off x="7553880" y="245160"/>
-            <a:ext cx="1083240" cy="258480"/>
+            <a:ext cx="1082880" cy="258120"/>
           </a:xfrm>
           <a:prstGeom prst="rect">
             <a:avLst/>
@@ -19952,14 +20070,14 @@
       </p:sp>
       <p:sp>
         <p:nvSpPr>
-          <p:cNvPr id="329" name="StarryXStyle-nav-5"/>
+          <p:cNvPr id="328" name="StarryXStyle-nav-5"/>
           <p:cNvSpPr/>
           <p:nvPr/>
         </p:nvSpPr>
         <p:spPr>
           <a:xfrm>
             <a:off x="8638200" y="190080"/>
-            <a:ext cx="1083240" cy="258480"/>
+            <a:ext cx="1082880" cy="258120"/>
           </a:xfrm>
           <a:prstGeom prst="rect">
             <a:avLst/>
@@ -20016,14 +20134,14 @@
       </p:sp>
       <p:sp>
         <p:nvSpPr>
-          <p:cNvPr id="330" name="StarryXStyle-nav-6"/>
+          <p:cNvPr id="329" name="StarryXStyle-nav-6"/>
           <p:cNvSpPr/>
           <p:nvPr/>
         </p:nvSpPr>
         <p:spPr>
           <a:xfrm>
             <a:off x="9722880" y="245160"/>
-            <a:ext cx="1083240" cy="258480"/>
+            <a:ext cx="1082880" cy="258120"/>
           </a:xfrm>
           <a:prstGeom prst="rect">
             <a:avLst/>
@@ -20070,14 +20188,14 @@
       </p:sp>
       <p:sp>
         <p:nvSpPr>
-          <p:cNvPr id="331" name="StarryXStyle-nav-7"/>
+          <p:cNvPr id="330" name="StarryXStyle-nav-7"/>
           <p:cNvSpPr/>
           <p:nvPr/>
         </p:nvSpPr>
         <p:spPr>
           <a:xfrm>
             <a:off x="10807560" y="245160"/>
-            <a:ext cx="1083240" cy="258480"/>
+            <a:ext cx="1082880" cy="258120"/>
           </a:xfrm>
           <a:prstGeom prst="rect">
             <a:avLst/>
@@ -20124,14 +20242,14 @@
       </p:sp>
       <p:sp>
         <p:nvSpPr>
-          <p:cNvPr id="332" name="StarryXStyle-title-marker"/>
+          <p:cNvPr id="331" name="StarryXStyle-title-marker"/>
           <p:cNvSpPr/>
           <p:nvPr/>
         </p:nvSpPr>
         <p:spPr>
           <a:xfrm>
             <a:off x="529920" y="1239840"/>
-            <a:ext cx="168480" cy="228600"/>
+            <a:ext cx="168120" cy="228240"/>
           </a:xfrm>
           <a:prstGeom prst="rect">
             <a:avLst/>
@@ -20208,14 +20326,14 @@
       </p:grpSpPr>
       <p:sp>
         <p:nvSpPr>
-          <p:cNvPr id="333" name="StarryXTransition-bg"/>
+          <p:cNvPr id="332" name="StarryXTransition-bg"/>
           <p:cNvSpPr/>
           <p:nvPr/>
         </p:nvSpPr>
         <p:spPr>
           <a:xfrm>
             <a:off x="0" y="0"/>
-            <a:ext cx="12190680" cy="6856560"/>
+            <a:ext cx="12190320" cy="6856200"/>
           </a:xfrm>
           <a:prstGeom prst="rect">
             <a:avLst/>
@@ -20254,14 +20372,14 @@
       </p:sp>
       <p:sp>
         <p:nvSpPr>
-          <p:cNvPr id="334" name="StarryXTransition-blue-band"/>
+          <p:cNvPr id="333" name="StarryXTransition-blue-band"/>
           <p:cNvSpPr/>
           <p:nvPr/>
         </p:nvSpPr>
         <p:spPr>
           <a:xfrm>
             <a:off x="0" y="0"/>
-            <a:ext cx="12190680" cy="3736080"/>
+            <a:ext cx="12190320" cy="3735720"/>
           </a:xfrm>
           <a:prstGeom prst="rect">
             <a:avLst/>
@@ -20300,14 +20418,14 @@
       </p:sp>
       <p:sp>
         <p:nvSpPr>
-          <p:cNvPr id="335" name="StarryXTransition-blue-shadow"/>
+          <p:cNvPr id="334" name="StarryXTransition-blue-shadow"/>
           <p:cNvSpPr/>
           <p:nvPr/>
         </p:nvSpPr>
         <p:spPr>
           <a:xfrm>
             <a:off x="0" y="3669120"/>
-            <a:ext cx="12190680" cy="26640"/>
+            <a:ext cx="12190320" cy="26280"/>
           </a:xfrm>
           <a:prstGeom prst="rect">
             <a:avLst/>
@@ -20346,7 +20464,7 @@
       </p:sp>
       <p:pic>
         <p:nvPicPr>
-          <p:cNvPr id="336" name="StarryXTransition-cscc-logo" descr=""/>
+          <p:cNvPr id="335" name="StarryXTransition-cscc-logo" descr=""/>
           <p:cNvPicPr/>
           <p:nvPr/>
         </p:nvPicPr>
@@ -20357,7 +20475,7 @@
         <p:spPr>
           <a:xfrm>
             <a:off x="97560" y="219600"/>
-            <a:ext cx="2949120" cy="608760"/>
+            <a:ext cx="2948760" cy="608400"/>
           </a:xfrm>
           <a:prstGeom prst="rect">
             <a:avLst/>
@@ -20369,7 +20487,7 @@
       </p:pic>
       <p:pic>
         <p:nvPicPr>
-          <p:cNvPr id="337" name="StarryXTransition-hzdu-logo" descr=""/>
+          <p:cNvPr id="336" name="StarryXTransition-hzdu-logo" descr=""/>
           <p:cNvPicPr/>
           <p:nvPr/>
         </p:nvPicPr>
@@ -20380,7 +20498,7 @@
         <p:spPr>
           <a:xfrm>
             <a:off x="8558640" y="102960"/>
-            <a:ext cx="3546360" cy="828360"/>
+            <a:ext cx="3546000" cy="828000"/>
           </a:xfrm>
           <a:prstGeom prst="rect">
             <a:avLst/>
@@ -20392,14 +20510,14 @@
       </p:pic>
       <p:sp>
         <p:nvSpPr>
-          <p:cNvPr id="338" name="StarryXTransition-part-hex"/>
+          <p:cNvPr id="337" name="StarryXTransition-part-hex"/>
           <p:cNvSpPr/>
           <p:nvPr/>
         </p:nvSpPr>
         <p:spPr>
           <a:xfrm>
             <a:off x="5157360" y="2983320"/>
-            <a:ext cx="1875960" cy="1542240"/>
+            <a:ext cx="1875600" cy="1541880"/>
           </a:xfrm>
           <a:prstGeom prst="hexagon">
             <a:avLst>
@@ -20444,14 +20562,14 @@
       </p:sp>
       <p:sp>
         <p:nvSpPr>
-          <p:cNvPr id="339" name="StarryXTransition-part-text"/>
+          <p:cNvPr id="338" name="StarryXTransition-part-text"/>
           <p:cNvSpPr/>
           <p:nvPr/>
         </p:nvSpPr>
         <p:spPr>
           <a:xfrm>
             <a:off x="5157360" y="3633120"/>
-            <a:ext cx="1875960" cy="379080"/>
+            <a:ext cx="1875600" cy="378720"/>
           </a:xfrm>
           <a:prstGeom prst="rect">
             <a:avLst/>
@@ -20498,14 +20616,14 @@
       </p:sp>
       <p:sp>
         <p:nvSpPr>
-          <p:cNvPr id="340" name="StarryXTransition-title"/>
+          <p:cNvPr id="339" name="StarryXTransition-title"/>
           <p:cNvSpPr/>
           <p:nvPr/>
         </p:nvSpPr>
         <p:spPr>
           <a:xfrm>
             <a:off x="1219320" y="4526280"/>
-            <a:ext cx="9752040" cy="1027440"/>
+            <a:ext cx="9751680" cy="1027080"/>
           </a:xfrm>
           <a:prstGeom prst="rect">
             <a:avLst/>
@@ -20582,14 +20700,14 @@
       </p:grpSpPr>
       <p:sp>
         <p:nvSpPr>
-          <p:cNvPr id="119" name="rect 52"/>
+          <p:cNvPr id="118" name="rect 52"/>
           <p:cNvSpPr/>
           <p:nvPr/>
         </p:nvSpPr>
         <p:spPr>
           <a:xfrm>
             <a:off x="2520" y="-360000"/>
-            <a:ext cx="12188880" cy="7217280"/>
+            <a:ext cx="12188520" cy="7216920"/>
           </a:xfrm>
           <a:prstGeom prst="rect">
             <a:avLst/>
@@ -20628,7 +20746,7 @@
       </p:sp>
       <p:pic>
         <p:nvPicPr>
-          <p:cNvPr id="120" name="StarryXStyle-cscc-logo" descr=""/>
+          <p:cNvPr id="119" name="StarryXStyle-cscc-logo" descr=""/>
           <p:cNvPicPr/>
           <p:nvPr/>
         </p:nvPicPr>
@@ -20639,7 +20757,7 @@
         <p:spPr>
           <a:xfrm>
             <a:off x="219960" y="-180000"/>
-            <a:ext cx="1848600" cy="388440"/>
+            <a:ext cx="1848240" cy="388080"/>
           </a:xfrm>
           <a:prstGeom prst="rect">
             <a:avLst/>
@@ -20651,7 +20769,7 @@
       </p:pic>
       <p:pic>
         <p:nvPicPr>
-          <p:cNvPr id="121" name="StarryXStyle-hzdu-logo" descr=""/>
+          <p:cNvPr id="120" name="StarryXStyle-hzdu-logo" descr=""/>
           <p:cNvPicPr/>
           <p:nvPr/>
         </p:nvPicPr>
@@ -20662,7 +20780,7 @@
         <p:spPr>
           <a:xfrm>
             <a:off x="9141840" y="-245880"/>
-            <a:ext cx="2557440" cy="605160"/>
+            <a:ext cx="2557080" cy="604800"/>
           </a:xfrm>
           <a:prstGeom prst="rect">
             <a:avLst/>
@@ -20674,7 +20792,7 @@
       </p:pic>
       <p:pic>
         <p:nvPicPr>
-          <p:cNvPr id="122" name="StarryXStyle-contents-band" descr=""/>
+          <p:cNvPr id="121" name="StarryXStyle-contents-band" descr=""/>
           <p:cNvPicPr/>
           <p:nvPr/>
         </p:nvPicPr>
@@ -20685,7 +20803,7 @@
         <p:spPr>
           <a:xfrm>
             <a:off x="0" y="1620000"/>
-            <a:ext cx="4048560" cy="3228480"/>
+            <a:ext cx="4048200" cy="3228120"/>
           </a:xfrm>
           <a:prstGeom prst="rect">
             <a:avLst/>
@@ -20697,14 +20815,14 @@
       </p:pic>
       <p:sp>
         <p:nvSpPr>
-          <p:cNvPr id="123" name="StarryXStyle-title-cn"/>
+          <p:cNvPr id="122" name="StarryXStyle-title-cn"/>
           <p:cNvSpPr/>
           <p:nvPr/>
         </p:nvSpPr>
         <p:spPr>
           <a:xfrm>
             <a:off x="690120" y="2779920"/>
-            <a:ext cx="1598400" cy="698400"/>
+            <a:ext cx="1598040" cy="698040"/>
           </a:xfrm>
           <a:prstGeom prst="rect">
             <a:avLst/>
@@ -20751,14 +20869,14 @@
       </p:sp>
       <p:sp>
         <p:nvSpPr>
-          <p:cNvPr id="124" name="StarryXStyle-title-en"/>
+          <p:cNvPr id="123" name="StarryXStyle-title-en"/>
           <p:cNvSpPr/>
           <p:nvPr/>
         </p:nvSpPr>
         <p:spPr>
           <a:xfrm>
             <a:off x="900000" y="3499920"/>
-            <a:ext cx="1248480" cy="328680"/>
+            <a:ext cx="1248120" cy="328320"/>
           </a:xfrm>
           <a:prstGeom prst="rect">
             <a:avLst/>
@@ -20805,14 +20923,14 @@
       </p:sp>
       <p:sp>
         <p:nvSpPr>
-          <p:cNvPr id="125" name="StarryXStyle-toc-num-1"/>
+          <p:cNvPr id="124" name="StarryXStyle-toc-num-1"/>
           <p:cNvSpPr/>
           <p:nvPr/>
         </p:nvSpPr>
         <p:spPr>
           <a:xfrm>
             <a:off x="6599880" y="815040"/>
-            <a:ext cx="588600" cy="388440"/>
+            <a:ext cx="588240" cy="388080"/>
           </a:xfrm>
           <a:prstGeom prst="roundRect">
             <a:avLst>
@@ -20863,14 +20981,14 @@
       </p:sp>
       <p:sp>
         <p:nvSpPr>
-          <p:cNvPr id="126" name="StarryXStyle-toc-pill-1"/>
+          <p:cNvPr id="125" name="StarryXStyle-toc-pill-1"/>
           <p:cNvSpPr/>
           <p:nvPr/>
         </p:nvSpPr>
         <p:spPr>
           <a:xfrm>
             <a:off x="7380000" y="730080"/>
-            <a:ext cx="3798720" cy="538560"/>
+            <a:ext cx="3798360" cy="538200"/>
           </a:xfrm>
           <a:prstGeom prst="rect">
             <a:avLst/>
@@ -20919,14 +21037,14 @@
       </p:sp>
       <p:sp>
         <p:nvSpPr>
-          <p:cNvPr id="127" name="StarryXStyle-toc-num-2"/>
+          <p:cNvPr id="126" name="StarryXStyle-toc-num-2"/>
           <p:cNvSpPr/>
           <p:nvPr/>
         </p:nvSpPr>
         <p:spPr>
           <a:xfrm>
             <a:off x="6599880" y="1604880"/>
-            <a:ext cx="588600" cy="388440"/>
+            <a:ext cx="588240" cy="388080"/>
           </a:xfrm>
           <a:prstGeom prst="roundRect">
             <a:avLst>
@@ -20977,14 +21095,14 @@
       </p:sp>
       <p:sp>
         <p:nvSpPr>
-          <p:cNvPr id="128" name="StarryXStyle-toc-pill-2"/>
+          <p:cNvPr id="127" name="StarryXStyle-toc-pill-2"/>
           <p:cNvSpPr/>
           <p:nvPr/>
         </p:nvSpPr>
         <p:spPr>
           <a:xfrm>
             <a:off x="7380000" y="1519920"/>
-            <a:ext cx="3798720" cy="538560"/>
+            <a:ext cx="3798360" cy="538200"/>
           </a:xfrm>
           <a:prstGeom prst="rect">
             <a:avLst/>
@@ -21033,14 +21151,14 @@
       </p:sp>
       <p:sp>
         <p:nvSpPr>
-          <p:cNvPr id="129" name="StarryXStyle-toc-num-3"/>
+          <p:cNvPr id="128" name="StarryXStyle-toc-num-3"/>
           <p:cNvSpPr/>
           <p:nvPr/>
         </p:nvSpPr>
         <p:spPr>
           <a:xfrm>
             <a:off x="6599880" y="2395080"/>
-            <a:ext cx="588600" cy="388440"/>
+            <a:ext cx="588240" cy="388080"/>
           </a:xfrm>
           <a:prstGeom prst="roundRect">
             <a:avLst>
@@ -21091,14 +21209,14 @@
       </p:sp>
       <p:sp>
         <p:nvSpPr>
-          <p:cNvPr id="130" name="StarryXStyle-toc-pill-3"/>
+          <p:cNvPr id="129" name="StarryXStyle-toc-pill-3"/>
           <p:cNvSpPr/>
           <p:nvPr/>
         </p:nvSpPr>
         <p:spPr>
           <a:xfrm>
             <a:off x="7380000" y="2310120"/>
-            <a:ext cx="3798720" cy="538560"/>
+            <a:ext cx="3798360" cy="538200"/>
           </a:xfrm>
           <a:prstGeom prst="rect">
             <a:avLst/>
@@ -21147,14 +21265,14 @@
       </p:sp>
       <p:sp>
         <p:nvSpPr>
-          <p:cNvPr id="131" name="StarryXStyle-toc-num-4"/>
+          <p:cNvPr id="130" name="StarryXStyle-toc-num-4"/>
           <p:cNvSpPr/>
           <p:nvPr/>
         </p:nvSpPr>
         <p:spPr>
           <a:xfrm>
             <a:off x="6599880" y="3184920"/>
-            <a:ext cx="588600" cy="388440"/>
+            <a:ext cx="588240" cy="388080"/>
           </a:xfrm>
           <a:prstGeom prst="roundRect">
             <a:avLst>
@@ -21205,14 +21323,14 @@
       </p:sp>
       <p:sp>
         <p:nvSpPr>
-          <p:cNvPr id="132" name="StarryXStyle-toc-pill-4"/>
+          <p:cNvPr id="131" name="StarryXStyle-toc-pill-4"/>
           <p:cNvSpPr/>
           <p:nvPr/>
         </p:nvSpPr>
         <p:spPr>
           <a:xfrm>
             <a:off x="7380000" y="3099960"/>
-            <a:ext cx="3798720" cy="538560"/>
+            <a:ext cx="3798360" cy="538200"/>
           </a:xfrm>
           <a:prstGeom prst="rect">
             <a:avLst/>
@@ -21261,14 +21379,14 @@
       </p:sp>
       <p:sp>
         <p:nvSpPr>
-          <p:cNvPr id="133" name="StarryXStyle-toc-num-5"/>
+          <p:cNvPr id="132" name="StarryXStyle-toc-num-5"/>
           <p:cNvSpPr/>
           <p:nvPr/>
         </p:nvSpPr>
         <p:spPr>
           <a:xfrm>
             <a:off x="6599880" y="3975120"/>
-            <a:ext cx="588600" cy="388440"/>
+            <a:ext cx="588240" cy="388080"/>
           </a:xfrm>
           <a:prstGeom prst="roundRect">
             <a:avLst>
@@ -21319,14 +21437,14 @@
       </p:sp>
       <p:sp>
         <p:nvSpPr>
-          <p:cNvPr id="134" name="StarryXStyle-toc-pill-5"/>
+          <p:cNvPr id="133" name="StarryXStyle-toc-pill-5"/>
           <p:cNvSpPr/>
           <p:nvPr/>
         </p:nvSpPr>
         <p:spPr>
           <a:xfrm>
             <a:off x="7380000" y="3890160"/>
-            <a:ext cx="3798720" cy="538560"/>
+            <a:ext cx="3798360" cy="538200"/>
           </a:xfrm>
           <a:prstGeom prst="rect">
             <a:avLst/>
@@ -21385,14 +21503,14 @@
       </p:sp>
       <p:sp>
         <p:nvSpPr>
-          <p:cNvPr id="135" name="StarryXStyle-toc-num-6"/>
+          <p:cNvPr id="134" name="StarryXStyle-toc-num-6"/>
           <p:cNvSpPr/>
           <p:nvPr/>
         </p:nvSpPr>
         <p:spPr>
           <a:xfrm>
             <a:off x="6599880" y="4764960"/>
-            <a:ext cx="588600" cy="388440"/>
+            <a:ext cx="588240" cy="388080"/>
           </a:xfrm>
           <a:prstGeom prst="roundRect">
             <a:avLst>
@@ -21443,14 +21561,14 @@
       </p:sp>
       <p:sp>
         <p:nvSpPr>
-          <p:cNvPr id="136" name="StarryXStyle-toc-pill-6"/>
+          <p:cNvPr id="135" name="StarryXStyle-toc-pill-6"/>
           <p:cNvSpPr/>
           <p:nvPr/>
         </p:nvSpPr>
         <p:spPr>
           <a:xfrm>
             <a:off x="7380000" y="4680000"/>
-            <a:ext cx="3798720" cy="538560"/>
+            <a:ext cx="3798360" cy="538200"/>
           </a:xfrm>
           <a:prstGeom prst="rect">
             <a:avLst/>
@@ -21529,14 +21647,14 @@
       </p:grpSpPr>
       <p:sp>
         <p:nvSpPr>
-          <p:cNvPr id="341" name="rect 52"/>
+          <p:cNvPr id="340" name="rect 52"/>
           <p:cNvSpPr/>
           <p:nvPr/>
         </p:nvSpPr>
         <p:spPr>
           <a:xfrm>
             <a:off x="1800" y="0"/>
-            <a:ext cx="12188880" cy="6856560"/>
+            <a:ext cx="12188520" cy="6856200"/>
           </a:xfrm>
           <a:prstGeom prst="rect">
             <a:avLst/>
@@ -21575,14 +21693,14 @@
       </p:sp>
       <p:sp>
         <p:nvSpPr>
-          <p:cNvPr id="342" name="Title"/>
+          <p:cNvPr id="341" name="Title"/>
           <p:cNvSpPr/>
           <p:nvPr/>
         </p:nvSpPr>
         <p:spPr>
           <a:xfrm>
             <a:off x="650160" y="1187280"/>
-            <a:ext cx="10017360" cy="432720"/>
+            <a:ext cx="10017000" cy="432720"/>
           </a:xfrm>
           <a:prstGeom prst="rect">
             <a:avLst/>
@@ -21639,14 +21757,14 @@
       </p:sp>
       <p:sp>
         <p:nvSpPr>
-          <p:cNvPr id="343" name="Body"/>
+          <p:cNvPr id="342" name="Body"/>
           <p:cNvSpPr/>
           <p:nvPr/>
         </p:nvSpPr>
         <p:spPr>
           <a:xfrm>
             <a:off x="1136520" y="1938600"/>
-            <a:ext cx="4615560" cy="3540600"/>
+            <a:ext cx="4615200" cy="3540600"/>
           </a:xfrm>
           <a:prstGeom prst="roundRect">
             <a:avLst>
@@ -22066,7 +22184,7 @@
       </p:sp>
       <p:pic>
         <p:nvPicPr>
-          <p:cNvPr id="344" name="orays-07-network.png" descr=""/>
+          <p:cNvPr id="343" name="orays-07-network.png" descr=""/>
           <p:cNvPicPr/>
           <p:nvPr/>
         </p:nvPicPr>
@@ -22077,7 +22195,7 @@
         <p:spPr>
           <a:xfrm>
             <a:off x="6193080" y="1607400"/>
-            <a:ext cx="4812480" cy="4361760"/>
+            <a:ext cx="4812120" cy="4361400"/>
           </a:xfrm>
           <a:prstGeom prst="rect">
             <a:avLst/>
@@ -22089,14 +22207,14 @@
       </p:pic>
       <p:sp>
         <p:nvSpPr>
-          <p:cNvPr id="345" name="Caption"/>
+          <p:cNvPr id="344" name="Caption"/>
           <p:cNvSpPr/>
           <p:nvPr/>
         </p:nvSpPr>
         <p:spPr>
           <a:xfrm>
             <a:off x="6447600" y="6120000"/>
-            <a:ext cx="4892400" cy="223560"/>
+            <a:ext cx="4892040" cy="223560"/>
           </a:xfrm>
           <a:prstGeom prst="rect">
             <a:avLst/>
@@ -22233,7 +22351,7 @@
       </p:sp>
       <p:pic>
         <p:nvPicPr>
-          <p:cNvPr id="346" name="StarryXStyle-header-logo" descr=""/>
+          <p:cNvPr id="345" name="StarryXStyle-header-logo" descr=""/>
           <p:cNvPicPr/>
           <p:nvPr/>
         </p:nvPicPr>
@@ -22244,7 +22362,7 @@
         <p:spPr>
           <a:xfrm>
             <a:off x="150120" y="119880"/>
-            <a:ext cx="2548440" cy="608400"/>
+            <a:ext cx="2548080" cy="608040"/>
           </a:xfrm>
           <a:prstGeom prst="rect">
             <a:avLst/>
@@ -22256,14 +22374,14 @@
       </p:pic>
       <p:sp>
         <p:nvSpPr>
-          <p:cNvPr id="347" name="StarryXStyle-nav-active"/>
+          <p:cNvPr id="346" name="StarryXStyle-nav-active"/>
           <p:cNvSpPr/>
           <p:nvPr/>
         </p:nvSpPr>
         <p:spPr>
           <a:xfrm>
             <a:off x="9722880" y="0"/>
-            <a:ext cx="1083240" cy="708480"/>
+            <a:ext cx="1082880" cy="708120"/>
           </a:xfrm>
           <a:prstGeom prst="rect">
             <a:avLst/>
@@ -22302,14 +22420,14 @@
       </p:sp>
       <p:sp>
         <p:nvSpPr>
-          <p:cNvPr id="348" name="StarryXStyle-nav-1"/>
+          <p:cNvPr id="347" name="StarryXStyle-nav-1"/>
           <p:cNvSpPr/>
           <p:nvPr/>
         </p:nvSpPr>
         <p:spPr>
           <a:xfrm>
             <a:off x="4299840" y="245160"/>
-            <a:ext cx="1083240" cy="258480"/>
+            <a:ext cx="1082880" cy="258120"/>
           </a:xfrm>
           <a:prstGeom prst="rect">
             <a:avLst/>
@@ -22356,14 +22474,14 @@
       </p:sp>
       <p:sp>
         <p:nvSpPr>
-          <p:cNvPr id="349" name="StarryXStyle-nav-2"/>
+          <p:cNvPr id="348" name="StarryXStyle-nav-2"/>
           <p:cNvSpPr/>
           <p:nvPr/>
         </p:nvSpPr>
         <p:spPr>
           <a:xfrm>
             <a:off x="5384520" y="245160"/>
-            <a:ext cx="1083240" cy="258480"/>
+            <a:ext cx="1082880" cy="258120"/>
           </a:xfrm>
           <a:prstGeom prst="rect">
             <a:avLst/>
@@ -22410,14 +22528,14 @@
       </p:sp>
       <p:sp>
         <p:nvSpPr>
-          <p:cNvPr id="350" name="StarryXStyle-nav-3"/>
+          <p:cNvPr id="349" name="StarryXStyle-nav-3"/>
           <p:cNvSpPr/>
           <p:nvPr/>
         </p:nvSpPr>
         <p:spPr>
           <a:xfrm>
             <a:off x="6469200" y="245160"/>
-            <a:ext cx="1083240" cy="258480"/>
+            <a:ext cx="1082880" cy="258120"/>
           </a:xfrm>
           <a:prstGeom prst="rect">
             <a:avLst/>
@@ -22464,14 +22582,14 @@
       </p:sp>
       <p:sp>
         <p:nvSpPr>
-          <p:cNvPr id="351" name="StarryXStyle-nav-4"/>
+          <p:cNvPr id="350" name="StarryXStyle-nav-4"/>
           <p:cNvSpPr/>
           <p:nvPr/>
         </p:nvSpPr>
         <p:spPr>
           <a:xfrm>
             <a:off x="7553880" y="245160"/>
-            <a:ext cx="1083240" cy="258480"/>
+            <a:ext cx="1082880" cy="258120"/>
           </a:xfrm>
           <a:prstGeom prst="rect">
             <a:avLst/>
@@ -22518,14 +22636,14 @@
       </p:sp>
       <p:sp>
         <p:nvSpPr>
-          <p:cNvPr id="352" name="StarryXStyle-nav-5"/>
+          <p:cNvPr id="351" name="StarryXStyle-nav-5"/>
           <p:cNvSpPr/>
           <p:nvPr/>
         </p:nvSpPr>
         <p:spPr>
           <a:xfrm>
             <a:off x="8638200" y="245160"/>
-            <a:ext cx="1083240" cy="258480"/>
+            <a:ext cx="1082880" cy="258120"/>
           </a:xfrm>
           <a:prstGeom prst="rect">
             <a:avLst/>
@@ -22582,14 +22700,14 @@
       </p:sp>
       <p:sp>
         <p:nvSpPr>
-          <p:cNvPr id="353" name="StarryXStyle-nav-6"/>
+          <p:cNvPr id="352" name="StarryXStyle-nav-6"/>
           <p:cNvSpPr/>
           <p:nvPr/>
         </p:nvSpPr>
         <p:spPr>
           <a:xfrm>
             <a:off x="9722880" y="190080"/>
-            <a:ext cx="1083240" cy="258480"/>
+            <a:ext cx="1082880" cy="258120"/>
           </a:xfrm>
           <a:prstGeom prst="rect">
             <a:avLst/>
@@ -22636,14 +22754,14 @@
       </p:sp>
       <p:sp>
         <p:nvSpPr>
-          <p:cNvPr id="354" name="StarryXStyle-nav-7"/>
+          <p:cNvPr id="353" name="StarryXStyle-nav-7"/>
           <p:cNvSpPr/>
           <p:nvPr/>
         </p:nvSpPr>
         <p:spPr>
           <a:xfrm>
             <a:off x="10807560" y="245160"/>
-            <a:ext cx="1083240" cy="258480"/>
+            <a:ext cx="1082880" cy="258120"/>
           </a:xfrm>
           <a:prstGeom prst="rect">
             <a:avLst/>
@@ -22690,14 +22808,14 @@
       </p:sp>
       <p:sp>
         <p:nvSpPr>
-          <p:cNvPr id="355" name="StarryXStyle-title-marker"/>
+          <p:cNvPr id="354" name="StarryXStyle-title-marker"/>
           <p:cNvSpPr/>
           <p:nvPr/>
         </p:nvSpPr>
         <p:spPr>
           <a:xfrm>
             <a:off x="529920" y="1239840"/>
-            <a:ext cx="168480" cy="228600"/>
+            <a:ext cx="168120" cy="228240"/>
           </a:xfrm>
           <a:prstGeom prst="rect">
             <a:avLst/>
@@ -22774,14 +22892,14 @@
       </p:grpSpPr>
       <p:sp>
         <p:nvSpPr>
-          <p:cNvPr id="356" name="rect 52"/>
+          <p:cNvPr id="355" name="rect 52"/>
           <p:cNvSpPr/>
           <p:nvPr/>
         </p:nvSpPr>
         <p:spPr>
           <a:xfrm>
             <a:off x="1800" y="0"/>
-            <a:ext cx="12188880" cy="6856560"/>
+            <a:ext cx="12188520" cy="6856200"/>
           </a:xfrm>
           <a:prstGeom prst="rect">
             <a:avLst/>
@@ -22820,14 +22938,14 @@
       </p:sp>
       <p:sp>
         <p:nvSpPr>
-          <p:cNvPr id="357" name="Title"/>
+          <p:cNvPr id="356" name="Title"/>
           <p:cNvSpPr/>
           <p:nvPr/>
         </p:nvSpPr>
         <p:spPr>
           <a:xfrm>
             <a:off x="650160" y="1187280"/>
-            <a:ext cx="10017360" cy="432720"/>
+            <a:ext cx="10017000" cy="432720"/>
           </a:xfrm>
           <a:prstGeom prst="rect">
             <a:avLst/>
@@ -22904,14 +23022,14 @@
       </p:sp>
       <p:sp>
         <p:nvSpPr>
-          <p:cNvPr id="358" name="Body"/>
+          <p:cNvPr id="357" name="Body"/>
           <p:cNvSpPr/>
           <p:nvPr/>
         </p:nvSpPr>
         <p:spPr>
           <a:xfrm>
             <a:off x="1136520" y="1938600"/>
-            <a:ext cx="4615560" cy="3853080"/>
+            <a:ext cx="4615200" cy="3853080"/>
           </a:xfrm>
           <a:prstGeom prst="roundRect">
             <a:avLst>
@@ -23300,7 +23418,7 @@
       </p:sp>
       <p:pic>
         <p:nvPicPr>
-          <p:cNvPr id="359" name="orays-08-hal-driver.png" descr=""/>
+          <p:cNvPr id="358" name="orays-08-hal-driver.png" descr=""/>
           <p:cNvPicPr/>
           <p:nvPr/>
         </p:nvPicPr>
@@ -23311,7 +23429,7 @@
         <p:spPr>
           <a:xfrm>
             <a:off x="6139440" y="1721160"/>
-            <a:ext cx="4865760" cy="4352760"/>
+            <a:ext cx="4865400" cy="4352400"/>
           </a:xfrm>
           <a:prstGeom prst="rect">
             <a:avLst/>
@@ -23323,14 +23441,14 @@
       </p:pic>
       <p:sp>
         <p:nvSpPr>
-          <p:cNvPr id="360" name="Caption"/>
+          <p:cNvPr id="359" name="Caption"/>
           <p:cNvSpPr/>
           <p:nvPr/>
         </p:nvSpPr>
         <p:spPr>
           <a:xfrm>
             <a:off x="6840000" y="6255720"/>
-            <a:ext cx="6840000" cy="224280"/>
+            <a:ext cx="6839640" cy="223560"/>
           </a:xfrm>
           <a:prstGeom prst="rect">
             <a:avLst/>
@@ -23437,7 +23555,7 @@
       </p:sp>
       <p:pic>
         <p:nvPicPr>
-          <p:cNvPr id="361" name="StarryXStyle-header-logo" descr=""/>
+          <p:cNvPr id="360" name="StarryXStyle-header-logo" descr=""/>
           <p:cNvPicPr/>
           <p:nvPr/>
         </p:nvPicPr>
@@ -23448,7 +23566,7 @@
         <p:spPr>
           <a:xfrm>
             <a:off x="150120" y="119880"/>
-            <a:ext cx="2548440" cy="608400"/>
+            <a:ext cx="2548080" cy="608040"/>
           </a:xfrm>
           <a:prstGeom prst="rect">
             <a:avLst/>
@@ -23460,14 +23578,14 @@
       </p:pic>
       <p:sp>
         <p:nvSpPr>
-          <p:cNvPr id="362" name="StarryXStyle-nav-active"/>
+          <p:cNvPr id="361" name="StarryXStyle-nav-active"/>
           <p:cNvSpPr/>
           <p:nvPr/>
         </p:nvSpPr>
         <p:spPr>
           <a:xfrm>
             <a:off x="9722880" y="0"/>
-            <a:ext cx="1083240" cy="708480"/>
+            <a:ext cx="1082880" cy="708120"/>
           </a:xfrm>
           <a:prstGeom prst="rect">
             <a:avLst/>
@@ -23506,14 +23624,14 @@
       </p:sp>
       <p:sp>
         <p:nvSpPr>
-          <p:cNvPr id="363" name="StarryXStyle-nav-1"/>
+          <p:cNvPr id="362" name="StarryXStyle-nav-1"/>
           <p:cNvSpPr/>
           <p:nvPr/>
         </p:nvSpPr>
         <p:spPr>
           <a:xfrm>
             <a:off x="4299840" y="245160"/>
-            <a:ext cx="1083240" cy="258480"/>
+            <a:ext cx="1082880" cy="258120"/>
           </a:xfrm>
           <a:prstGeom prst="rect">
             <a:avLst/>
@@ -23560,14 +23678,14 @@
       </p:sp>
       <p:sp>
         <p:nvSpPr>
-          <p:cNvPr id="364" name="StarryXStyle-nav-2"/>
+          <p:cNvPr id="363" name="StarryXStyle-nav-2"/>
           <p:cNvSpPr/>
           <p:nvPr/>
         </p:nvSpPr>
         <p:spPr>
           <a:xfrm>
             <a:off x="5384520" y="245160"/>
-            <a:ext cx="1083240" cy="258480"/>
+            <a:ext cx="1082880" cy="258120"/>
           </a:xfrm>
           <a:prstGeom prst="rect">
             <a:avLst/>
@@ -23614,14 +23732,14 @@
       </p:sp>
       <p:sp>
         <p:nvSpPr>
-          <p:cNvPr id="365" name="StarryXStyle-nav-3"/>
+          <p:cNvPr id="364" name="StarryXStyle-nav-3"/>
           <p:cNvSpPr/>
           <p:nvPr/>
         </p:nvSpPr>
         <p:spPr>
           <a:xfrm>
             <a:off x="6469200" y="245160"/>
-            <a:ext cx="1083240" cy="258480"/>
+            <a:ext cx="1082880" cy="258120"/>
           </a:xfrm>
           <a:prstGeom prst="rect">
             <a:avLst/>
@@ -23668,14 +23786,14 @@
       </p:sp>
       <p:sp>
         <p:nvSpPr>
-          <p:cNvPr id="366" name="StarryXStyle-nav-4"/>
+          <p:cNvPr id="365" name="StarryXStyle-nav-4"/>
           <p:cNvSpPr/>
           <p:nvPr/>
         </p:nvSpPr>
         <p:spPr>
           <a:xfrm>
             <a:off x="7553880" y="245160"/>
-            <a:ext cx="1083240" cy="258480"/>
+            <a:ext cx="1082880" cy="258120"/>
           </a:xfrm>
           <a:prstGeom prst="rect">
             <a:avLst/>
@@ -23722,14 +23840,14 @@
       </p:sp>
       <p:sp>
         <p:nvSpPr>
-          <p:cNvPr id="367" name="StarryXStyle-nav-5"/>
+          <p:cNvPr id="366" name="StarryXStyle-nav-5"/>
           <p:cNvSpPr/>
           <p:nvPr/>
         </p:nvSpPr>
         <p:spPr>
           <a:xfrm>
             <a:off x="8638200" y="245160"/>
-            <a:ext cx="1083240" cy="258480"/>
+            <a:ext cx="1082880" cy="258120"/>
           </a:xfrm>
           <a:prstGeom prst="rect">
             <a:avLst/>
@@ -23786,14 +23904,14 @@
       </p:sp>
       <p:sp>
         <p:nvSpPr>
-          <p:cNvPr id="368" name="StarryXStyle-nav-6"/>
+          <p:cNvPr id="367" name="StarryXStyle-nav-6"/>
           <p:cNvSpPr/>
           <p:nvPr/>
         </p:nvSpPr>
         <p:spPr>
           <a:xfrm>
             <a:off x="9722880" y="190080"/>
-            <a:ext cx="1083240" cy="258480"/>
+            <a:ext cx="1082880" cy="258120"/>
           </a:xfrm>
           <a:prstGeom prst="rect">
             <a:avLst/>
@@ -23840,14 +23958,14 @@
       </p:sp>
       <p:sp>
         <p:nvSpPr>
-          <p:cNvPr id="369" name="StarryXStyle-nav-7"/>
+          <p:cNvPr id="368" name="StarryXStyle-nav-7"/>
           <p:cNvSpPr/>
           <p:nvPr/>
         </p:nvSpPr>
         <p:spPr>
           <a:xfrm>
             <a:off x="10807560" y="245160"/>
-            <a:ext cx="1083240" cy="258480"/>
+            <a:ext cx="1082880" cy="258120"/>
           </a:xfrm>
           <a:prstGeom prst="rect">
             <a:avLst/>
@@ -23894,14 +24012,14 @@
       </p:sp>
       <p:sp>
         <p:nvSpPr>
-          <p:cNvPr id="370" name="StarryXStyle-title-marker"/>
+          <p:cNvPr id="369" name="StarryXStyle-title-marker"/>
           <p:cNvSpPr/>
           <p:nvPr/>
         </p:nvSpPr>
         <p:spPr>
           <a:xfrm>
             <a:off x="529920" y="1239840"/>
-            <a:ext cx="168480" cy="228600"/>
+            <a:ext cx="168120" cy="228240"/>
           </a:xfrm>
           <a:prstGeom prst="rect">
             <a:avLst/>
@@ -23978,14 +24096,14 @@
       </p:grpSpPr>
       <p:sp>
         <p:nvSpPr>
-          <p:cNvPr id="371" name="StarryXTransition-bg"/>
+          <p:cNvPr id="370" name="StarryXTransition-bg"/>
           <p:cNvSpPr/>
           <p:nvPr/>
         </p:nvSpPr>
         <p:spPr>
           <a:xfrm>
             <a:off x="0" y="0"/>
-            <a:ext cx="12190680" cy="6856560"/>
+            <a:ext cx="12190320" cy="6856200"/>
           </a:xfrm>
           <a:prstGeom prst="rect">
             <a:avLst/>
@@ -24024,14 +24142,14 @@
       </p:sp>
       <p:sp>
         <p:nvSpPr>
-          <p:cNvPr id="372" name="StarryXTransition-blue-band"/>
+          <p:cNvPr id="371" name="StarryXTransition-blue-band"/>
           <p:cNvSpPr/>
           <p:nvPr/>
         </p:nvSpPr>
         <p:spPr>
           <a:xfrm>
             <a:off x="0" y="0"/>
-            <a:ext cx="12190680" cy="3736080"/>
+            <a:ext cx="12190320" cy="3735720"/>
           </a:xfrm>
           <a:prstGeom prst="rect">
             <a:avLst/>
@@ -24070,14 +24188,14 @@
       </p:sp>
       <p:sp>
         <p:nvSpPr>
-          <p:cNvPr id="373" name="StarryXTransition-blue-shadow"/>
+          <p:cNvPr id="372" name="StarryXTransition-blue-shadow"/>
           <p:cNvSpPr/>
           <p:nvPr/>
         </p:nvSpPr>
         <p:spPr>
           <a:xfrm>
             <a:off x="0" y="3669120"/>
-            <a:ext cx="12190680" cy="26640"/>
+            <a:ext cx="12190320" cy="26280"/>
           </a:xfrm>
           <a:prstGeom prst="rect">
             <a:avLst/>
@@ -24116,7 +24234,7 @@
       </p:sp>
       <p:pic>
         <p:nvPicPr>
-          <p:cNvPr id="374" name="StarryXTransition-cscc-logo" descr=""/>
+          <p:cNvPr id="373" name="StarryXTransition-cscc-logo" descr=""/>
           <p:cNvPicPr/>
           <p:nvPr/>
         </p:nvPicPr>
@@ -24127,7 +24245,7 @@
         <p:spPr>
           <a:xfrm>
             <a:off x="97560" y="219600"/>
-            <a:ext cx="2949120" cy="608760"/>
+            <a:ext cx="2948760" cy="608400"/>
           </a:xfrm>
           <a:prstGeom prst="rect">
             <a:avLst/>
@@ -24139,7 +24257,7 @@
       </p:pic>
       <p:pic>
         <p:nvPicPr>
-          <p:cNvPr id="375" name="StarryXTransition-hzdu-logo" descr=""/>
+          <p:cNvPr id="374" name="StarryXTransition-hzdu-logo" descr=""/>
           <p:cNvPicPr/>
           <p:nvPr/>
         </p:nvPicPr>
@@ -24150,7 +24268,7 @@
         <p:spPr>
           <a:xfrm>
             <a:off x="8558640" y="102960"/>
-            <a:ext cx="3546360" cy="828360"/>
+            <a:ext cx="3546000" cy="828000"/>
           </a:xfrm>
           <a:prstGeom prst="rect">
             <a:avLst/>
@@ -24162,14 +24280,14 @@
       </p:pic>
       <p:sp>
         <p:nvSpPr>
-          <p:cNvPr id="376" name="StarryXTransition-part-hex"/>
+          <p:cNvPr id="375" name="StarryXTransition-part-hex"/>
           <p:cNvSpPr/>
           <p:nvPr/>
         </p:nvSpPr>
         <p:spPr>
           <a:xfrm>
             <a:off x="5157360" y="2983320"/>
-            <a:ext cx="1875960" cy="1542240"/>
+            <a:ext cx="1875600" cy="1541880"/>
           </a:xfrm>
           <a:prstGeom prst="hexagon">
             <a:avLst>
@@ -24214,14 +24332,14 @@
       </p:sp>
       <p:sp>
         <p:nvSpPr>
-          <p:cNvPr id="377" name="StarryXTransition-part-text"/>
+          <p:cNvPr id="376" name="StarryXTransition-part-text"/>
           <p:cNvSpPr/>
           <p:nvPr/>
         </p:nvSpPr>
         <p:spPr>
           <a:xfrm>
             <a:off x="5157360" y="3633120"/>
-            <a:ext cx="1875960" cy="379080"/>
+            <a:ext cx="1875600" cy="378720"/>
           </a:xfrm>
           <a:prstGeom prst="rect">
             <a:avLst/>
@@ -24268,14 +24386,14 @@
       </p:sp>
       <p:sp>
         <p:nvSpPr>
-          <p:cNvPr id="378" name="StarryXTransition-title"/>
+          <p:cNvPr id="377" name="StarryXTransition-title"/>
           <p:cNvSpPr/>
           <p:nvPr/>
         </p:nvSpPr>
         <p:spPr>
           <a:xfrm>
             <a:off x="1219320" y="4526280"/>
-            <a:ext cx="9752040" cy="1027440"/>
+            <a:ext cx="9751680" cy="1027080"/>
           </a:xfrm>
           <a:prstGeom prst="rect">
             <a:avLst/>
@@ -24352,14 +24470,14 @@
       </p:grpSpPr>
       <p:sp>
         <p:nvSpPr>
-          <p:cNvPr id="379" name="rect 52"/>
+          <p:cNvPr id="378" name="rect 52"/>
           <p:cNvSpPr/>
           <p:nvPr/>
         </p:nvSpPr>
         <p:spPr>
           <a:xfrm>
             <a:off x="1800" y="0"/>
-            <a:ext cx="12188880" cy="6856560"/>
+            <a:ext cx="12188520" cy="6856200"/>
           </a:xfrm>
           <a:prstGeom prst="rect">
             <a:avLst/>
@@ -24398,14 +24516,14 @@
       </p:sp>
       <p:sp>
         <p:nvSpPr>
-          <p:cNvPr id="380" name="Title"/>
+          <p:cNvPr id="379" name="Title"/>
           <p:cNvSpPr/>
           <p:nvPr/>
         </p:nvSpPr>
         <p:spPr>
           <a:xfrm>
             <a:off x="650160" y="1187280"/>
-            <a:ext cx="10197720" cy="432720"/>
+            <a:ext cx="10197360" cy="432720"/>
           </a:xfrm>
           <a:prstGeom prst="rect">
             <a:avLst/>
@@ -24452,14 +24570,14 @@
       </p:sp>
       <p:sp>
         <p:nvSpPr>
-          <p:cNvPr id="381" name="Body"/>
+          <p:cNvPr id="380" name="Body"/>
           <p:cNvSpPr/>
           <p:nvPr/>
         </p:nvSpPr>
         <p:spPr>
           <a:xfrm>
             <a:off x="1234440" y="2124360"/>
-            <a:ext cx="9774720" cy="3275640"/>
+            <a:ext cx="9774360" cy="3275640"/>
           </a:xfrm>
           <a:prstGeom prst="roundRect">
             <a:avLst>
@@ -25047,7 +25165,7 @@
       </p:sp>
       <p:pic>
         <p:nvPicPr>
-          <p:cNvPr id="382" name="StarryXStyle-header-logo" descr=""/>
+          <p:cNvPr id="381" name="StarryXStyle-header-logo" descr=""/>
           <p:cNvPicPr/>
           <p:nvPr/>
         </p:nvPicPr>
@@ -25058,7 +25176,7 @@
         <p:spPr>
           <a:xfrm>
             <a:off x="150120" y="119880"/>
-            <a:ext cx="2548440" cy="608400"/>
+            <a:ext cx="2548080" cy="608040"/>
           </a:xfrm>
           <a:prstGeom prst="rect">
             <a:avLst/>
@@ -25070,14 +25188,14 @@
       </p:pic>
       <p:sp>
         <p:nvSpPr>
-          <p:cNvPr id="383" name="StarryXStyle-nav-active"/>
+          <p:cNvPr id="382" name="StarryXStyle-nav-active"/>
           <p:cNvSpPr/>
           <p:nvPr/>
         </p:nvSpPr>
         <p:spPr>
           <a:xfrm>
             <a:off x="10807560" y="0"/>
-            <a:ext cx="1083240" cy="708480"/>
+            <a:ext cx="1082880" cy="708120"/>
           </a:xfrm>
           <a:prstGeom prst="rect">
             <a:avLst/>
@@ -25116,14 +25234,14 @@
       </p:sp>
       <p:sp>
         <p:nvSpPr>
-          <p:cNvPr id="384" name="StarryXStyle-nav-1"/>
+          <p:cNvPr id="383" name="StarryXStyle-nav-1"/>
           <p:cNvSpPr/>
           <p:nvPr/>
         </p:nvSpPr>
         <p:spPr>
           <a:xfrm>
             <a:off x="4299840" y="245160"/>
-            <a:ext cx="1083240" cy="258480"/>
+            <a:ext cx="1082880" cy="258120"/>
           </a:xfrm>
           <a:prstGeom prst="rect">
             <a:avLst/>
@@ -25170,14 +25288,14 @@
       </p:sp>
       <p:sp>
         <p:nvSpPr>
-          <p:cNvPr id="385" name="StarryXStyle-nav-2"/>
+          <p:cNvPr id="384" name="StarryXStyle-nav-2"/>
           <p:cNvSpPr/>
           <p:nvPr/>
         </p:nvSpPr>
         <p:spPr>
           <a:xfrm>
             <a:off x="5384520" y="245160"/>
-            <a:ext cx="1083240" cy="258480"/>
+            <a:ext cx="1082880" cy="258120"/>
           </a:xfrm>
           <a:prstGeom prst="rect">
             <a:avLst/>
@@ -25224,14 +25342,14 @@
       </p:sp>
       <p:sp>
         <p:nvSpPr>
-          <p:cNvPr id="386" name="StarryXStyle-nav-3"/>
+          <p:cNvPr id="385" name="StarryXStyle-nav-3"/>
           <p:cNvSpPr/>
           <p:nvPr/>
         </p:nvSpPr>
         <p:spPr>
           <a:xfrm>
             <a:off x="6469200" y="245160"/>
-            <a:ext cx="1083240" cy="258480"/>
+            <a:ext cx="1082880" cy="258120"/>
           </a:xfrm>
           <a:prstGeom prst="rect">
             <a:avLst/>
@@ -25278,14 +25396,14 @@
       </p:sp>
       <p:sp>
         <p:nvSpPr>
-          <p:cNvPr id="387" name="StarryXStyle-nav-4"/>
+          <p:cNvPr id="386" name="StarryXStyle-nav-4"/>
           <p:cNvSpPr/>
           <p:nvPr/>
         </p:nvSpPr>
         <p:spPr>
           <a:xfrm>
             <a:off x="7553880" y="245160"/>
-            <a:ext cx="1083240" cy="258480"/>
+            <a:ext cx="1082880" cy="258120"/>
           </a:xfrm>
           <a:prstGeom prst="rect">
             <a:avLst/>
@@ -25332,14 +25450,14 @@
       </p:sp>
       <p:sp>
         <p:nvSpPr>
-          <p:cNvPr id="388" name="StarryXStyle-nav-5"/>
+          <p:cNvPr id="387" name="StarryXStyle-nav-5"/>
           <p:cNvSpPr/>
           <p:nvPr/>
         </p:nvSpPr>
         <p:spPr>
           <a:xfrm>
             <a:off x="8638200" y="245160"/>
-            <a:ext cx="1083240" cy="258480"/>
+            <a:ext cx="1082880" cy="258120"/>
           </a:xfrm>
           <a:prstGeom prst="rect">
             <a:avLst/>
@@ -25396,14 +25514,14 @@
       </p:sp>
       <p:sp>
         <p:nvSpPr>
-          <p:cNvPr id="389" name="StarryXStyle-nav-6"/>
+          <p:cNvPr id="388" name="StarryXStyle-nav-6"/>
           <p:cNvSpPr/>
           <p:nvPr/>
         </p:nvSpPr>
         <p:spPr>
           <a:xfrm>
             <a:off x="9722880" y="245160"/>
-            <a:ext cx="1083240" cy="258480"/>
+            <a:ext cx="1082880" cy="258120"/>
           </a:xfrm>
           <a:prstGeom prst="rect">
             <a:avLst/>
@@ -25450,14 +25568,14 @@
       </p:sp>
       <p:sp>
         <p:nvSpPr>
-          <p:cNvPr id="390" name="StarryXStyle-nav-7"/>
+          <p:cNvPr id="389" name="StarryXStyle-nav-7"/>
           <p:cNvSpPr/>
           <p:nvPr/>
         </p:nvSpPr>
         <p:spPr>
           <a:xfrm>
             <a:off x="10807560" y="190080"/>
-            <a:ext cx="1083240" cy="258480"/>
+            <a:ext cx="1082880" cy="258120"/>
           </a:xfrm>
           <a:prstGeom prst="rect">
             <a:avLst/>
@@ -25504,14 +25622,14 @@
       </p:sp>
       <p:sp>
         <p:nvSpPr>
-          <p:cNvPr id="391" name="StarryXStyle-title-marker"/>
+          <p:cNvPr id="390" name="StarryXStyle-title-marker"/>
           <p:cNvSpPr/>
           <p:nvPr/>
         </p:nvSpPr>
         <p:spPr>
           <a:xfrm>
             <a:off x="529920" y="1239840"/>
-            <a:ext cx="168480" cy="228600"/>
+            <a:ext cx="168120" cy="228240"/>
           </a:xfrm>
           <a:prstGeom prst="rect">
             <a:avLst/>
@@ -25588,14 +25706,14 @@
       </p:grpSpPr>
       <p:sp>
         <p:nvSpPr>
-          <p:cNvPr id="137" name="StarryXTransition-bg"/>
+          <p:cNvPr id="136" name="StarryXTransition-bg"/>
           <p:cNvSpPr/>
           <p:nvPr/>
         </p:nvSpPr>
         <p:spPr>
           <a:xfrm>
             <a:off x="0" y="0"/>
-            <a:ext cx="12190680" cy="6856560"/>
+            <a:ext cx="12190320" cy="6856200"/>
           </a:xfrm>
           <a:prstGeom prst="rect">
             <a:avLst/>
@@ -25634,14 +25752,14 @@
       </p:sp>
       <p:sp>
         <p:nvSpPr>
-          <p:cNvPr id="138" name="StarryXTransition-blue-band"/>
+          <p:cNvPr id="137" name="StarryXTransition-blue-band"/>
           <p:cNvSpPr/>
           <p:nvPr/>
         </p:nvSpPr>
         <p:spPr>
           <a:xfrm>
             <a:off x="0" y="0"/>
-            <a:ext cx="12190680" cy="3736080"/>
+            <a:ext cx="12190320" cy="3735720"/>
           </a:xfrm>
           <a:prstGeom prst="rect">
             <a:avLst/>
@@ -25680,14 +25798,14 @@
       </p:sp>
       <p:sp>
         <p:nvSpPr>
-          <p:cNvPr id="139" name="StarryXTransition-blue-shadow"/>
+          <p:cNvPr id="138" name="StarryXTransition-blue-shadow"/>
           <p:cNvSpPr/>
           <p:nvPr/>
         </p:nvSpPr>
         <p:spPr>
           <a:xfrm>
             <a:off x="0" y="3669120"/>
-            <a:ext cx="12190680" cy="26640"/>
+            <a:ext cx="12190320" cy="26280"/>
           </a:xfrm>
           <a:prstGeom prst="rect">
             <a:avLst/>
@@ -25726,7 +25844,7 @@
       </p:sp>
       <p:pic>
         <p:nvPicPr>
-          <p:cNvPr id="140" name="StarryXTransition-cscc-logo" descr=""/>
+          <p:cNvPr id="139" name="StarryXTransition-cscc-logo" descr=""/>
           <p:cNvPicPr/>
           <p:nvPr/>
         </p:nvPicPr>
@@ -25737,7 +25855,7 @@
         <p:spPr>
           <a:xfrm>
             <a:off x="97560" y="219600"/>
-            <a:ext cx="2949120" cy="608760"/>
+            <a:ext cx="2948760" cy="608400"/>
           </a:xfrm>
           <a:prstGeom prst="rect">
             <a:avLst/>
@@ -25749,7 +25867,7 @@
       </p:pic>
       <p:pic>
         <p:nvPicPr>
-          <p:cNvPr id="141" name="StarryXTransition-hzdu-logo" descr=""/>
+          <p:cNvPr id="140" name="StarryXTransition-hzdu-logo" descr=""/>
           <p:cNvPicPr/>
           <p:nvPr/>
         </p:nvPicPr>
@@ -25760,7 +25878,7 @@
         <p:spPr>
           <a:xfrm>
             <a:off x="8558640" y="102960"/>
-            <a:ext cx="3546360" cy="828360"/>
+            <a:ext cx="3546000" cy="828000"/>
           </a:xfrm>
           <a:prstGeom prst="rect">
             <a:avLst/>
@@ -25772,14 +25890,14 @@
       </p:pic>
       <p:sp>
         <p:nvSpPr>
-          <p:cNvPr id="142" name="StarryXTransition-part-hex"/>
+          <p:cNvPr id="141" name="StarryXTransition-part-hex"/>
           <p:cNvSpPr/>
           <p:nvPr/>
         </p:nvSpPr>
         <p:spPr>
           <a:xfrm>
             <a:off x="5157360" y="2983320"/>
-            <a:ext cx="1875960" cy="1542240"/>
+            <a:ext cx="1875600" cy="1541880"/>
           </a:xfrm>
           <a:prstGeom prst="hexagon">
             <a:avLst>
@@ -25824,14 +25942,14 @@
       </p:sp>
       <p:sp>
         <p:nvSpPr>
-          <p:cNvPr id="143" name="StarryXTransition-part-text"/>
+          <p:cNvPr id="142" name="StarryXTransition-part-text"/>
           <p:cNvSpPr/>
           <p:nvPr/>
         </p:nvSpPr>
         <p:spPr>
           <a:xfrm>
             <a:off x="5157360" y="3633120"/>
-            <a:ext cx="1875960" cy="379080"/>
+            <a:ext cx="1875600" cy="378720"/>
           </a:xfrm>
           <a:prstGeom prst="rect">
             <a:avLst/>
@@ -25878,14 +25996,14 @@
       </p:sp>
       <p:sp>
         <p:nvSpPr>
-          <p:cNvPr id="144" name="StarryXTransition-title"/>
+          <p:cNvPr id="143" name="StarryXTransition-title"/>
           <p:cNvSpPr/>
           <p:nvPr/>
         </p:nvSpPr>
         <p:spPr>
           <a:xfrm>
             <a:off x="1219320" y="4526280"/>
-            <a:ext cx="9752040" cy="1027440"/>
+            <a:ext cx="9751680" cy="1027080"/>
           </a:xfrm>
           <a:prstGeom prst="rect">
             <a:avLst/>
@@ -25962,14 +26080,14 @@
       </p:grpSpPr>
       <p:sp>
         <p:nvSpPr>
-          <p:cNvPr id="145" name="rect 52"/>
+          <p:cNvPr id="144" name="rect 52"/>
           <p:cNvSpPr/>
           <p:nvPr/>
         </p:nvSpPr>
         <p:spPr>
           <a:xfrm>
             <a:off x="1800" y="0"/>
-            <a:ext cx="12188880" cy="6856560"/>
+            <a:ext cx="12188520" cy="6856200"/>
           </a:xfrm>
           <a:prstGeom prst="rect">
             <a:avLst/>
@@ -26008,14 +26126,14 @@
       </p:sp>
       <p:sp>
         <p:nvSpPr>
-          <p:cNvPr id="146" name="Title"/>
+          <p:cNvPr id="145" name="Title"/>
           <p:cNvSpPr/>
           <p:nvPr/>
         </p:nvSpPr>
         <p:spPr>
           <a:xfrm>
             <a:off x="650160" y="1187280"/>
-            <a:ext cx="4198680" cy="432720"/>
+            <a:ext cx="4198320" cy="432720"/>
           </a:xfrm>
           <a:prstGeom prst="rect">
             <a:avLst/>
@@ -26062,14 +26180,14 @@
       </p:sp>
       <p:sp>
         <p:nvSpPr>
-          <p:cNvPr id="147" name="Body"/>
+          <p:cNvPr id="146" name="Body"/>
           <p:cNvSpPr/>
           <p:nvPr/>
         </p:nvSpPr>
         <p:spPr>
           <a:xfrm>
             <a:off x="1260000" y="1980000"/>
-            <a:ext cx="4259160" cy="4120920"/>
+            <a:ext cx="4258800" cy="4120920"/>
           </a:xfrm>
           <a:prstGeom prst="roundRect">
             <a:avLst>
@@ -26511,7 +26629,7 @@
       </p:sp>
       <p:pic>
         <p:nvPicPr>
-          <p:cNvPr id="148" name="orays-01-overall-architecture.png" descr=""/>
+          <p:cNvPr id="147" name="orays-01-overall-architecture.png" descr=""/>
           <p:cNvPicPr/>
           <p:nvPr/>
         </p:nvPicPr>
@@ -26522,7 +26640,7 @@
         <p:spPr>
           <a:xfrm>
             <a:off x="6256080" y="1875960"/>
-            <a:ext cx="4479840" cy="4418280"/>
+            <a:ext cx="4479480" cy="4417920"/>
           </a:xfrm>
           <a:prstGeom prst="rect">
             <a:avLst/>
@@ -26534,14 +26652,14 @@
       </p:pic>
       <p:sp>
         <p:nvSpPr>
-          <p:cNvPr id="149" name="Caption"/>
+          <p:cNvPr id="148" name="Caption"/>
           <p:cNvSpPr/>
           <p:nvPr/>
         </p:nvSpPr>
         <p:spPr>
           <a:xfrm>
             <a:off x="6572160" y="6295680"/>
-            <a:ext cx="3817080" cy="219960"/>
+            <a:ext cx="3816720" cy="219240"/>
           </a:xfrm>
           <a:prstGeom prst="rect">
             <a:avLst/>
@@ -26638,7 +26756,7 @@
       </p:sp>
       <p:pic>
         <p:nvPicPr>
-          <p:cNvPr id="150" name="StarryXStyle-header-logo" descr=""/>
+          <p:cNvPr id="149" name="StarryXStyle-header-logo" descr=""/>
           <p:cNvPicPr/>
           <p:nvPr/>
         </p:nvPicPr>
@@ -26649,7 +26767,7 @@
         <p:spPr>
           <a:xfrm>
             <a:off x="150120" y="119880"/>
-            <a:ext cx="2548440" cy="608400"/>
+            <a:ext cx="2548080" cy="608040"/>
           </a:xfrm>
           <a:prstGeom prst="rect">
             <a:avLst/>
@@ -26661,14 +26779,14 @@
       </p:pic>
       <p:sp>
         <p:nvSpPr>
-          <p:cNvPr id="151" name="StarryXStyle-nav-active"/>
+          <p:cNvPr id="150" name="StarryXStyle-nav-active"/>
           <p:cNvSpPr/>
           <p:nvPr/>
         </p:nvSpPr>
         <p:spPr>
           <a:xfrm>
             <a:off x="4299840" y="0"/>
-            <a:ext cx="1083240" cy="708480"/>
+            <a:ext cx="1082880" cy="708120"/>
           </a:xfrm>
           <a:prstGeom prst="rect">
             <a:avLst/>
@@ -26707,14 +26825,14 @@
       </p:sp>
       <p:sp>
         <p:nvSpPr>
-          <p:cNvPr id="152" name="StarryXStyle-nav-1"/>
+          <p:cNvPr id="151" name="StarryXStyle-nav-1"/>
           <p:cNvSpPr/>
           <p:nvPr/>
         </p:nvSpPr>
         <p:spPr>
           <a:xfrm>
             <a:off x="4299840" y="190080"/>
-            <a:ext cx="1083240" cy="258480"/>
+            <a:ext cx="1082880" cy="258120"/>
           </a:xfrm>
           <a:prstGeom prst="rect">
             <a:avLst/>
@@ -26761,14 +26879,14 @@
       </p:sp>
       <p:sp>
         <p:nvSpPr>
-          <p:cNvPr id="153" name="StarryXStyle-nav-2"/>
+          <p:cNvPr id="152" name="StarryXStyle-nav-2"/>
           <p:cNvSpPr/>
           <p:nvPr/>
         </p:nvSpPr>
         <p:spPr>
           <a:xfrm>
             <a:off x="5384520" y="245160"/>
-            <a:ext cx="1083240" cy="258480"/>
+            <a:ext cx="1082880" cy="258120"/>
           </a:xfrm>
           <a:prstGeom prst="rect">
             <a:avLst/>
@@ -26815,14 +26933,14 @@
       </p:sp>
       <p:sp>
         <p:nvSpPr>
-          <p:cNvPr id="154" name="StarryXStyle-nav-3"/>
+          <p:cNvPr id="153" name="StarryXStyle-nav-3"/>
           <p:cNvSpPr/>
           <p:nvPr/>
         </p:nvSpPr>
         <p:spPr>
           <a:xfrm>
             <a:off x="6469200" y="245160"/>
-            <a:ext cx="1083240" cy="258480"/>
+            <a:ext cx="1082880" cy="258120"/>
           </a:xfrm>
           <a:prstGeom prst="rect">
             <a:avLst/>
@@ -26869,14 +26987,14 @@
       </p:sp>
       <p:sp>
         <p:nvSpPr>
-          <p:cNvPr id="155" name="StarryXStyle-nav-4"/>
+          <p:cNvPr id="154" name="StarryXStyle-nav-4"/>
           <p:cNvSpPr/>
           <p:nvPr/>
         </p:nvSpPr>
         <p:spPr>
           <a:xfrm>
             <a:off x="7553880" y="245160"/>
-            <a:ext cx="1083240" cy="258480"/>
+            <a:ext cx="1082880" cy="258120"/>
           </a:xfrm>
           <a:prstGeom prst="rect">
             <a:avLst/>
@@ -26923,14 +27041,14 @@
       </p:sp>
       <p:sp>
         <p:nvSpPr>
-          <p:cNvPr id="156" name="StarryXStyle-nav-5"/>
+          <p:cNvPr id="155" name="StarryXStyle-nav-5"/>
           <p:cNvSpPr/>
           <p:nvPr/>
         </p:nvSpPr>
         <p:spPr>
           <a:xfrm>
             <a:off x="8638200" y="245160"/>
-            <a:ext cx="1083240" cy="258480"/>
+            <a:ext cx="1082880" cy="258120"/>
           </a:xfrm>
           <a:prstGeom prst="rect">
             <a:avLst/>
@@ -26987,14 +27105,14 @@
       </p:sp>
       <p:sp>
         <p:nvSpPr>
-          <p:cNvPr id="157" name="StarryXStyle-nav-6"/>
+          <p:cNvPr id="156" name="StarryXStyle-nav-6"/>
           <p:cNvSpPr/>
           <p:nvPr/>
         </p:nvSpPr>
         <p:spPr>
           <a:xfrm>
             <a:off x="9722880" y="245160"/>
-            <a:ext cx="1083240" cy="258480"/>
+            <a:ext cx="1082880" cy="258120"/>
           </a:xfrm>
           <a:prstGeom prst="rect">
             <a:avLst/>
@@ -27041,14 +27159,14 @@
       </p:sp>
       <p:sp>
         <p:nvSpPr>
-          <p:cNvPr id="158" name="StarryXStyle-nav-7"/>
+          <p:cNvPr id="157" name="StarryXStyle-nav-7"/>
           <p:cNvSpPr/>
           <p:nvPr/>
         </p:nvSpPr>
         <p:spPr>
           <a:xfrm>
             <a:off x="10807560" y="245160"/>
-            <a:ext cx="1083240" cy="258480"/>
+            <a:ext cx="1082880" cy="258120"/>
           </a:xfrm>
           <a:prstGeom prst="rect">
             <a:avLst/>
@@ -27095,14 +27213,14 @@
       </p:sp>
       <p:sp>
         <p:nvSpPr>
-          <p:cNvPr id="159" name="StarryXStyle-title-marker"/>
+          <p:cNvPr id="158" name="StarryXStyle-title-marker"/>
           <p:cNvSpPr/>
           <p:nvPr/>
         </p:nvSpPr>
         <p:spPr>
           <a:xfrm>
             <a:off x="529920" y="1239840"/>
-            <a:ext cx="168480" cy="228600"/>
+            <a:ext cx="168120" cy="228240"/>
           </a:xfrm>
           <a:prstGeom prst="rect">
             <a:avLst/>
@@ -27179,14 +27297,14 @@
       </p:grpSpPr>
       <p:sp>
         <p:nvSpPr>
-          <p:cNvPr id="160" name="StarryXTransition-bg"/>
+          <p:cNvPr id="159" name="StarryXTransition-bg"/>
           <p:cNvSpPr/>
           <p:nvPr/>
         </p:nvSpPr>
         <p:spPr>
           <a:xfrm>
             <a:off x="0" y="0"/>
-            <a:ext cx="12190680" cy="6856560"/>
+            <a:ext cx="12190320" cy="6856200"/>
           </a:xfrm>
           <a:prstGeom prst="rect">
             <a:avLst/>
@@ -27225,14 +27343,14 @@
       </p:sp>
       <p:sp>
         <p:nvSpPr>
-          <p:cNvPr id="161" name="StarryXTransition-blue-band"/>
+          <p:cNvPr id="160" name="StarryXTransition-blue-band"/>
           <p:cNvSpPr/>
           <p:nvPr/>
         </p:nvSpPr>
         <p:spPr>
           <a:xfrm>
             <a:off x="0" y="0"/>
-            <a:ext cx="12190680" cy="3736080"/>
+            <a:ext cx="12190320" cy="3735720"/>
           </a:xfrm>
           <a:prstGeom prst="rect">
             <a:avLst/>
@@ -27271,14 +27389,14 @@
       </p:sp>
       <p:sp>
         <p:nvSpPr>
-          <p:cNvPr id="162" name="StarryXTransition-blue-shadow"/>
+          <p:cNvPr id="161" name="StarryXTransition-blue-shadow"/>
           <p:cNvSpPr/>
           <p:nvPr/>
         </p:nvSpPr>
         <p:spPr>
           <a:xfrm>
             <a:off x="0" y="3669120"/>
-            <a:ext cx="12190680" cy="26640"/>
+            <a:ext cx="12190320" cy="26280"/>
           </a:xfrm>
           <a:prstGeom prst="rect">
             <a:avLst/>
@@ -27317,7 +27435,7 @@
       </p:sp>
       <p:pic>
         <p:nvPicPr>
-          <p:cNvPr id="163" name="StarryXTransition-cscc-logo" descr=""/>
+          <p:cNvPr id="162" name="StarryXTransition-cscc-logo" descr=""/>
           <p:cNvPicPr/>
           <p:nvPr/>
         </p:nvPicPr>
@@ -27328,7 +27446,7 @@
         <p:spPr>
           <a:xfrm>
             <a:off x="97560" y="219600"/>
-            <a:ext cx="2949120" cy="608760"/>
+            <a:ext cx="2948760" cy="608400"/>
           </a:xfrm>
           <a:prstGeom prst="rect">
             <a:avLst/>
@@ -27340,7 +27458,7 @@
       </p:pic>
       <p:pic>
         <p:nvPicPr>
-          <p:cNvPr id="164" name="StarryXTransition-hzdu-logo" descr=""/>
+          <p:cNvPr id="163" name="StarryXTransition-hzdu-logo" descr=""/>
           <p:cNvPicPr/>
           <p:nvPr/>
         </p:nvPicPr>
@@ -27351,7 +27469,7 @@
         <p:spPr>
           <a:xfrm>
             <a:off x="8558640" y="102960"/>
-            <a:ext cx="3546360" cy="828360"/>
+            <a:ext cx="3546000" cy="828000"/>
           </a:xfrm>
           <a:prstGeom prst="rect">
             <a:avLst/>
@@ -27363,14 +27481,14 @@
       </p:pic>
       <p:sp>
         <p:nvSpPr>
-          <p:cNvPr id="165" name="StarryXTransition-part-hex"/>
+          <p:cNvPr id="164" name="StarryXTransition-part-hex"/>
           <p:cNvSpPr/>
           <p:nvPr/>
         </p:nvSpPr>
         <p:spPr>
           <a:xfrm>
             <a:off x="5157360" y="2983320"/>
-            <a:ext cx="1875960" cy="1542240"/>
+            <a:ext cx="1875600" cy="1541880"/>
           </a:xfrm>
           <a:prstGeom prst="hexagon">
             <a:avLst>
@@ -27415,14 +27533,14 @@
       </p:sp>
       <p:sp>
         <p:nvSpPr>
-          <p:cNvPr id="166" name="StarryXTransition-part-text"/>
+          <p:cNvPr id="165" name="StarryXTransition-part-text"/>
           <p:cNvSpPr/>
           <p:nvPr/>
         </p:nvSpPr>
         <p:spPr>
           <a:xfrm>
             <a:off x="5157360" y="3633120"/>
-            <a:ext cx="1875960" cy="379080"/>
+            <a:ext cx="1875600" cy="378720"/>
           </a:xfrm>
           <a:prstGeom prst="rect">
             <a:avLst/>
@@ -27469,14 +27587,14 @@
       </p:sp>
       <p:sp>
         <p:nvSpPr>
-          <p:cNvPr id="167" name="StarryXTransition-title"/>
+          <p:cNvPr id="166" name="StarryXTransition-title"/>
           <p:cNvSpPr/>
           <p:nvPr/>
         </p:nvSpPr>
         <p:spPr>
           <a:xfrm>
             <a:off x="1219320" y="4526280"/>
-            <a:ext cx="9752040" cy="1027440"/>
+            <a:ext cx="9751680" cy="1027080"/>
           </a:xfrm>
           <a:prstGeom prst="rect">
             <a:avLst/>
@@ -27553,14 +27671,14 @@
       </p:grpSpPr>
       <p:sp>
         <p:nvSpPr>
-          <p:cNvPr id="168" name="rect 52"/>
+          <p:cNvPr id="167" name="rect 52"/>
           <p:cNvSpPr/>
           <p:nvPr/>
         </p:nvSpPr>
         <p:spPr>
           <a:xfrm>
             <a:off x="1800" y="0"/>
-            <a:ext cx="12188880" cy="6856560"/>
+            <a:ext cx="12188520" cy="6856200"/>
           </a:xfrm>
           <a:prstGeom prst="rect">
             <a:avLst/>
@@ -27599,14 +27717,14 @@
       </p:sp>
       <p:sp>
         <p:nvSpPr>
-          <p:cNvPr id="169" name="Title"/>
+          <p:cNvPr id="168" name="Title"/>
           <p:cNvSpPr/>
           <p:nvPr/>
         </p:nvSpPr>
         <p:spPr>
           <a:xfrm>
             <a:off x="650160" y="1187280"/>
-            <a:ext cx="10197720" cy="432720"/>
+            <a:ext cx="10197360" cy="432720"/>
           </a:xfrm>
           <a:prstGeom prst="rect">
             <a:avLst/>
@@ -27653,14 +27771,14 @@
       </p:sp>
       <p:sp>
         <p:nvSpPr>
-          <p:cNvPr id="170" name="Body"/>
+          <p:cNvPr id="169" name="Body"/>
           <p:cNvSpPr/>
           <p:nvPr/>
         </p:nvSpPr>
         <p:spPr>
           <a:xfrm>
             <a:off x="1234440" y="2340000"/>
-            <a:ext cx="9774720" cy="2640600"/>
+            <a:ext cx="9774360" cy="2640600"/>
           </a:xfrm>
           <a:prstGeom prst="roundRect">
             <a:avLst>
@@ -28176,14 +28294,14 @@
       </p:sp>
       <p:sp>
         <p:nvSpPr>
-          <p:cNvPr id="171" name="文本框 1"/>
+          <p:cNvPr id="170" name="文本框 1"/>
           <p:cNvSpPr/>
           <p:nvPr/>
         </p:nvSpPr>
         <p:spPr>
           <a:xfrm>
             <a:off x="5967720" y="2856240"/>
-            <a:ext cx="3818880" cy="344880"/>
+            <a:ext cx="3818520" cy="344520"/>
           </a:xfrm>
           <a:prstGeom prst="rect">
             <a:avLst/>
@@ -28221,7 +28339,7 @@
       </p:sp>
       <p:pic>
         <p:nvPicPr>
-          <p:cNvPr id="172" name="StarryXStyle-header-logo" descr=""/>
+          <p:cNvPr id="171" name="StarryXStyle-header-logo" descr=""/>
           <p:cNvPicPr/>
           <p:nvPr/>
         </p:nvPicPr>
@@ -28232,7 +28350,7 @@
         <p:spPr>
           <a:xfrm>
             <a:off x="150120" y="119880"/>
-            <a:ext cx="2548440" cy="608400"/>
+            <a:ext cx="2548080" cy="608040"/>
           </a:xfrm>
           <a:prstGeom prst="rect">
             <a:avLst/>
@@ -28244,14 +28362,14 @@
       </p:pic>
       <p:sp>
         <p:nvSpPr>
-          <p:cNvPr id="173" name="StarryXStyle-nav-active"/>
+          <p:cNvPr id="172" name="StarryXStyle-nav-active"/>
           <p:cNvSpPr/>
           <p:nvPr/>
         </p:nvSpPr>
         <p:spPr>
           <a:xfrm>
             <a:off x="5384520" y="0"/>
-            <a:ext cx="1083240" cy="708480"/>
+            <a:ext cx="1082880" cy="708120"/>
           </a:xfrm>
           <a:prstGeom prst="rect">
             <a:avLst/>
@@ -28290,14 +28408,14 @@
       </p:sp>
       <p:sp>
         <p:nvSpPr>
-          <p:cNvPr id="174" name="StarryXStyle-nav-1"/>
+          <p:cNvPr id="173" name="StarryXStyle-nav-1"/>
           <p:cNvSpPr/>
           <p:nvPr/>
         </p:nvSpPr>
         <p:spPr>
           <a:xfrm>
             <a:off x="4299840" y="245160"/>
-            <a:ext cx="1083240" cy="258480"/>
+            <a:ext cx="1082880" cy="258120"/>
           </a:xfrm>
           <a:prstGeom prst="rect">
             <a:avLst/>
@@ -28344,14 +28462,14 @@
       </p:sp>
       <p:sp>
         <p:nvSpPr>
-          <p:cNvPr id="175" name="StarryXStyle-nav-2"/>
+          <p:cNvPr id="174" name="StarryXStyle-nav-2"/>
           <p:cNvSpPr/>
           <p:nvPr/>
         </p:nvSpPr>
         <p:spPr>
           <a:xfrm>
             <a:off x="5384520" y="190080"/>
-            <a:ext cx="1083240" cy="258480"/>
+            <a:ext cx="1082880" cy="258120"/>
           </a:xfrm>
           <a:prstGeom prst="rect">
             <a:avLst/>
@@ -28398,14 +28516,14 @@
       </p:sp>
       <p:sp>
         <p:nvSpPr>
-          <p:cNvPr id="176" name="StarryXStyle-nav-3"/>
+          <p:cNvPr id="175" name="StarryXStyle-nav-3"/>
           <p:cNvSpPr/>
           <p:nvPr/>
         </p:nvSpPr>
         <p:spPr>
           <a:xfrm>
             <a:off x="6469200" y="245160"/>
-            <a:ext cx="1083240" cy="258480"/>
+            <a:ext cx="1082880" cy="258120"/>
           </a:xfrm>
           <a:prstGeom prst="rect">
             <a:avLst/>
@@ -28452,14 +28570,14 @@
       </p:sp>
       <p:sp>
         <p:nvSpPr>
-          <p:cNvPr id="177" name="StarryXStyle-nav-4"/>
+          <p:cNvPr id="176" name="StarryXStyle-nav-4"/>
           <p:cNvSpPr/>
           <p:nvPr/>
         </p:nvSpPr>
         <p:spPr>
           <a:xfrm>
             <a:off x="7553880" y="245160"/>
-            <a:ext cx="1083240" cy="258480"/>
+            <a:ext cx="1082880" cy="258120"/>
           </a:xfrm>
           <a:prstGeom prst="rect">
             <a:avLst/>
@@ -28506,14 +28624,14 @@
       </p:sp>
       <p:sp>
         <p:nvSpPr>
-          <p:cNvPr id="178" name="StarryXStyle-nav-5"/>
+          <p:cNvPr id="177" name="StarryXStyle-nav-5"/>
           <p:cNvSpPr/>
           <p:nvPr/>
         </p:nvSpPr>
         <p:spPr>
           <a:xfrm>
             <a:off x="8638200" y="245160"/>
-            <a:ext cx="1083240" cy="258480"/>
+            <a:ext cx="1082880" cy="258120"/>
           </a:xfrm>
           <a:prstGeom prst="rect">
             <a:avLst/>
@@ -28570,14 +28688,14 @@
       </p:sp>
       <p:sp>
         <p:nvSpPr>
-          <p:cNvPr id="179" name="StarryXStyle-nav-6"/>
+          <p:cNvPr id="178" name="StarryXStyle-nav-6"/>
           <p:cNvSpPr/>
           <p:nvPr/>
         </p:nvSpPr>
         <p:spPr>
           <a:xfrm>
             <a:off x="9722880" y="245160"/>
-            <a:ext cx="1083240" cy="258480"/>
+            <a:ext cx="1082880" cy="258120"/>
           </a:xfrm>
           <a:prstGeom prst="rect">
             <a:avLst/>
@@ -28624,14 +28742,14 @@
       </p:sp>
       <p:sp>
         <p:nvSpPr>
-          <p:cNvPr id="180" name="StarryXStyle-nav-7"/>
+          <p:cNvPr id="179" name="StarryXStyle-nav-7"/>
           <p:cNvSpPr/>
           <p:nvPr/>
         </p:nvSpPr>
         <p:spPr>
           <a:xfrm>
             <a:off x="10807560" y="245160"/>
-            <a:ext cx="1083240" cy="258480"/>
+            <a:ext cx="1082880" cy="258120"/>
           </a:xfrm>
           <a:prstGeom prst="rect">
             <a:avLst/>
@@ -28678,14 +28796,14 @@
       </p:sp>
       <p:sp>
         <p:nvSpPr>
-          <p:cNvPr id="181" name="StarryXStyle-title-marker"/>
+          <p:cNvPr id="180" name="StarryXStyle-title-marker"/>
           <p:cNvSpPr/>
           <p:nvPr/>
         </p:nvSpPr>
         <p:spPr>
           <a:xfrm>
             <a:off x="529920" y="1239840"/>
-            <a:ext cx="168480" cy="228600"/>
+            <a:ext cx="168120" cy="228240"/>
           </a:xfrm>
           <a:prstGeom prst="rect">
             <a:avLst/>
@@ -28762,14 +28880,14 @@
       </p:grpSpPr>
       <p:sp>
         <p:nvSpPr>
-          <p:cNvPr id="182" name="StarryXTransition-bg"/>
+          <p:cNvPr id="181" name="StarryXTransition-bg"/>
           <p:cNvSpPr/>
           <p:nvPr/>
         </p:nvSpPr>
         <p:spPr>
           <a:xfrm>
             <a:off x="0" y="0"/>
-            <a:ext cx="12190680" cy="6856560"/>
+            <a:ext cx="12190320" cy="6856200"/>
           </a:xfrm>
           <a:prstGeom prst="rect">
             <a:avLst/>
@@ -28808,14 +28926,14 @@
       </p:sp>
       <p:sp>
         <p:nvSpPr>
-          <p:cNvPr id="183" name="StarryXTransition-blue-band"/>
+          <p:cNvPr id="182" name="StarryXTransition-blue-band"/>
           <p:cNvSpPr/>
           <p:nvPr/>
         </p:nvSpPr>
         <p:spPr>
           <a:xfrm>
             <a:off x="0" y="0"/>
-            <a:ext cx="12190680" cy="3736080"/>
+            <a:ext cx="12190320" cy="3735720"/>
           </a:xfrm>
           <a:prstGeom prst="rect">
             <a:avLst/>
@@ -28854,14 +28972,14 @@
       </p:sp>
       <p:sp>
         <p:nvSpPr>
-          <p:cNvPr id="184" name="StarryXTransition-blue-shadow"/>
+          <p:cNvPr id="183" name="StarryXTransition-blue-shadow"/>
           <p:cNvSpPr/>
           <p:nvPr/>
         </p:nvSpPr>
         <p:spPr>
           <a:xfrm>
             <a:off x="0" y="3669120"/>
-            <a:ext cx="12190680" cy="26640"/>
+            <a:ext cx="12190320" cy="26280"/>
           </a:xfrm>
           <a:prstGeom prst="rect">
             <a:avLst/>
@@ -28900,7 +29018,7 @@
       </p:sp>
       <p:pic>
         <p:nvPicPr>
-          <p:cNvPr id="185" name="StarryXTransition-cscc-logo" descr=""/>
+          <p:cNvPr id="184" name="StarryXTransition-cscc-logo" descr=""/>
           <p:cNvPicPr/>
           <p:nvPr/>
         </p:nvPicPr>
@@ -28911,7 +29029,7 @@
         <p:spPr>
           <a:xfrm>
             <a:off x="97560" y="219600"/>
-            <a:ext cx="2949120" cy="608760"/>
+            <a:ext cx="2948760" cy="608400"/>
           </a:xfrm>
           <a:prstGeom prst="rect">
             <a:avLst/>
@@ -28923,7 +29041,7 @@
       </p:pic>
       <p:pic>
         <p:nvPicPr>
-          <p:cNvPr id="186" name="StarryXTransition-hzdu-logo" descr=""/>
+          <p:cNvPr id="185" name="StarryXTransition-hzdu-logo" descr=""/>
           <p:cNvPicPr/>
           <p:nvPr/>
         </p:nvPicPr>
@@ -28934,7 +29052,7 @@
         <p:spPr>
           <a:xfrm>
             <a:off x="8558640" y="102960"/>
-            <a:ext cx="3546360" cy="828360"/>
+            <a:ext cx="3546000" cy="828000"/>
           </a:xfrm>
           <a:prstGeom prst="rect">
             <a:avLst/>
@@ -28946,14 +29064,14 @@
       </p:pic>
       <p:sp>
         <p:nvSpPr>
-          <p:cNvPr id="187" name="StarryXTransition-part-hex"/>
+          <p:cNvPr id="186" name="StarryXTransition-part-hex"/>
           <p:cNvSpPr/>
           <p:nvPr/>
         </p:nvSpPr>
         <p:spPr>
           <a:xfrm>
             <a:off x="5157360" y="2983320"/>
-            <a:ext cx="1875960" cy="1542240"/>
+            <a:ext cx="1875600" cy="1541880"/>
           </a:xfrm>
           <a:prstGeom prst="hexagon">
             <a:avLst>
@@ -28998,14 +29116,14 @@
       </p:sp>
       <p:sp>
         <p:nvSpPr>
-          <p:cNvPr id="188" name="StarryXTransition-part-text"/>
+          <p:cNvPr id="187" name="StarryXTransition-part-text"/>
           <p:cNvSpPr/>
           <p:nvPr/>
         </p:nvSpPr>
         <p:spPr>
           <a:xfrm>
             <a:off x="5157360" y="3633120"/>
-            <a:ext cx="1875960" cy="379080"/>
+            <a:ext cx="1875600" cy="378720"/>
           </a:xfrm>
           <a:prstGeom prst="rect">
             <a:avLst/>
@@ -29052,14 +29170,14 @@
       </p:sp>
       <p:sp>
         <p:nvSpPr>
-          <p:cNvPr id="189" name="StarryXTransition-title"/>
+          <p:cNvPr id="188" name="StarryXTransition-title"/>
           <p:cNvSpPr/>
           <p:nvPr/>
         </p:nvSpPr>
         <p:spPr>
           <a:xfrm>
             <a:off x="1219320" y="4526280"/>
-            <a:ext cx="9752040" cy="1027440"/>
+            <a:ext cx="9751680" cy="1027080"/>
           </a:xfrm>
           <a:prstGeom prst="rect">
             <a:avLst/>
@@ -29136,14 +29254,14 @@
       </p:grpSpPr>
       <p:sp>
         <p:nvSpPr>
-          <p:cNvPr id="190" name="rect 52"/>
+          <p:cNvPr id="189" name="rect 52"/>
           <p:cNvSpPr/>
           <p:nvPr/>
         </p:nvSpPr>
         <p:spPr>
           <a:xfrm>
             <a:off x="1800" y="0"/>
-            <a:ext cx="12188880" cy="6856560"/>
+            <a:ext cx="12188520" cy="6856200"/>
           </a:xfrm>
           <a:prstGeom prst="rect">
             <a:avLst/>
@@ -29182,14 +29300,14 @@
       </p:sp>
       <p:sp>
         <p:nvSpPr>
-          <p:cNvPr id="191" name="Title"/>
+          <p:cNvPr id="190" name="Title"/>
           <p:cNvSpPr/>
           <p:nvPr/>
         </p:nvSpPr>
         <p:spPr>
           <a:xfrm>
             <a:off x="650160" y="1187280"/>
-            <a:ext cx="10197720" cy="432720"/>
+            <a:ext cx="10197360" cy="432720"/>
           </a:xfrm>
           <a:prstGeom prst="rect">
             <a:avLst/>
@@ -29236,14 +29354,14 @@
       </p:sp>
       <p:sp>
         <p:nvSpPr>
-          <p:cNvPr id="192" name="Body"/>
+          <p:cNvPr id="191" name="Body"/>
           <p:cNvSpPr/>
           <p:nvPr/>
         </p:nvSpPr>
         <p:spPr>
           <a:xfrm>
             <a:off x="1234440" y="2219400"/>
-            <a:ext cx="9774720" cy="2640600"/>
+            <a:ext cx="9774360" cy="2640600"/>
           </a:xfrm>
           <a:prstGeom prst="roundRect">
             <a:avLst>
@@ -29693,7 +29811,7 @@
       </p:sp>
       <p:pic>
         <p:nvPicPr>
-          <p:cNvPr id="193" name="StarryXStyle-header-logo" descr=""/>
+          <p:cNvPr id="192" name="StarryXStyle-header-logo" descr=""/>
           <p:cNvPicPr/>
           <p:nvPr/>
         </p:nvPicPr>
@@ -29704,7 +29822,7 @@
         <p:spPr>
           <a:xfrm>
             <a:off x="150120" y="119880"/>
-            <a:ext cx="2548440" cy="608400"/>
+            <a:ext cx="2548080" cy="608040"/>
           </a:xfrm>
           <a:prstGeom prst="rect">
             <a:avLst/>
@@ -29716,14 +29834,14 @@
       </p:pic>
       <p:sp>
         <p:nvSpPr>
-          <p:cNvPr id="194" name="StarryXStyle-nav-active"/>
+          <p:cNvPr id="193" name="StarryXStyle-nav-active"/>
           <p:cNvSpPr/>
           <p:nvPr/>
         </p:nvSpPr>
         <p:spPr>
           <a:xfrm>
             <a:off x="6469200" y="0"/>
-            <a:ext cx="1083240" cy="708480"/>
+            <a:ext cx="1082880" cy="708120"/>
           </a:xfrm>
           <a:prstGeom prst="rect">
             <a:avLst/>
@@ -29762,14 +29880,14 @@
       </p:sp>
       <p:sp>
         <p:nvSpPr>
-          <p:cNvPr id="195" name="StarryXStyle-nav-1"/>
+          <p:cNvPr id="194" name="StarryXStyle-nav-1"/>
           <p:cNvSpPr/>
           <p:nvPr/>
         </p:nvSpPr>
         <p:spPr>
           <a:xfrm>
             <a:off x="4299840" y="245160"/>
-            <a:ext cx="1083240" cy="258480"/>
+            <a:ext cx="1082880" cy="258120"/>
           </a:xfrm>
           <a:prstGeom prst="rect">
             <a:avLst/>
@@ -29816,14 +29934,14 @@
       </p:sp>
       <p:sp>
         <p:nvSpPr>
-          <p:cNvPr id="196" name="StarryXStyle-nav-2"/>
+          <p:cNvPr id="195" name="StarryXStyle-nav-2"/>
           <p:cNvSpPr/>
           <p:nvPr/>
         </p:nvSpPr>
         <p:spPr>
           <a:xfrm>
             <a:off x="5384520" y="245160"/>
-            <a:ext cx="1083240" cy="258480"/>
+            <a:ext cx="1082880" cy="258120"/>
           </a:xfrm>
           <a:prstGeom prst="rect">
             <a:avLst/>
@@ -29870,14 +29988,14 @@
       </p:sp>
       <p:sp>
         <p:nvSpPr>
-          <p:cNvPr id="197" name="StarryXStyle-nav-3"/>
+          <p:cNvPr id="196" name="StarryXStyle-nav-3"/>
           <p:cNvSpPr/>
           <p:nvPr/>
         </p:nvSpPr>
         <p:spPr>
           <a:xfrm>
             <a:off x="6469200" y="190080"/>
-            <a:ext cx="1083240" cy="258480"/>
+            <a:ext cx="1082880" cy="258120"/>
           </a:xfrm>
           <a:prstGeom prst="rect">
             <a:avLst/>
@@ -29924,14 +30042,14 @@
       </p:sp>
       <p:sp>
         <p:nvSpPr>
-          <p:cNvPr id="198" name="StarryXStyle-nav-4"/>
+          <p:cNvPr id="197" name="StarryXStyle-nav-4"/>
           <p:cNvSpPr/>
           <p:nvPr/>
         </p:nvSpPr>
         <p:spPr>
           <a:xfrm>
             <a:off x="7553880" y="245160"/>
-            <a:ext cx="1083240" cy="258480"/>
+            <a:ext cx="1082880" cy="258120"/>
           </a:xfrm>
           <a:prstGeom prst="rect">
             <a:avLst/>
@@ -29978,14 +30096,14 @@
       </p:sp>
       <p:sp>
         <p:nvSpPr>
-          <p:cNvPr id="199" name="StarryXStyle-nav-5"/>
+          <p:cNvPr id="198" name="StarryXStyle-nav-5"/>
           <p:cNvSpPr/>
           <p:nvPr/>
         </p:nvSpPr>
         <p:spPr>
           <a:xfrm>
             <a:off x="8638200" y="245160"/>
-            <a:ext cx="1083240" cy="258480"/>
+            <a:ext cx="1082880" cy="258120"/>
           </a:xfrm>
           <a:prstGeom prst="rect">
             <a:avLst/>
@@ -30042,14 +30160,14 @@
       </p:sp>
       <p:sp>
         <p:nvSpPr>
-          <p:cNvPr id="200" name="StarryXStyle-nav-6"/>
+          <p:cNvPr id="199" name="StarryXStyle-nav-6"/>
           <p:cNvSpPr/>
           <p:nvPr/>
         </p:nvSpPr>
         <p:spPr>
           <a:xfrm>
             <a:off x="9722880" y="245160"/>
-            <a:ext cx="1083240" cy="258480"/>
+            <a:ext cx="1082880" cy="258120"/>
           </a:xfrm>
           <a:prstGeom prst="rect">
             <a:avLst/>
@@ -30096,14 +30214,14 @@
       </p:sp>
       <p:sp>
         <p:nvSpPr>
-          <p:cNvPr id="201" name="StarryXStyle-nav-7"/>
+          <p:cNvPr id="200" name="StarryXStyle-nav-7"/>
           <p:cNvSpPr/>
           <p:nvPr/>
         </p:nvSpPr>
         <p:spPr>
           <a:xfrm>
             <a:off x="10807560" y="245160"/>
-            <a:ext cx="1083240" cy="258480"/>
+            <a:ext cx="1082880" cy="258120"/>
           </a:xfrm>
           <a:prstGeom prst="rect">
             <a:avLst/>
@@ -30150,14 +30268,14 @@
       </p:sp>
       <p:sp>
         <p:nvSpPr>
-          <p:cNvPr id="202" name="StarryXStyle-title-marker"/>
+          <p:cNvPr id="201" name="StarryXStyle-title-marker"/>
           <p:cNvSpPr/>
           <p:nvPr/>
         </p:nvSpPr>
         <p:spPr>
           <a:xfrm>
             <a:off x="529920" y="1239840"/>
-            <a:ext cx="168480" cy="228600"/>
+            <a:ext cx="168120" cy="228240"/>
           </a:xfrm>
           <a:prstGeom prst="rect">
             <a:avLst/>
@@ -30234,14 +30352,14 @@
       </p:grpSpPr>
       <p:sp>
         <p:nvSpPr>
-          <p:cNvPr id="203" name="rect 52"/>
+          <p:cNvPr id="202" name="rect 52"/>
           <p:cNvSpPr/>
           <p:nvPr/>
         </p:nvSpPr>
         <p:spPr>
           <a:xfrm>
             <a:off x="1800" y="0"/>
-            <a:ext cx="12188880" cy="6856560"/>
+            <a:ext cx="12188520" cy="6856200"/>
           </a:xfrm>
           <a:prstGeom prst="rect">
             <a:avLst/>
@@ -30280,14 +30398,14 @@
       </p:sp>
       <p:sp>
         <p:nvSpPr>
-          <p:cNvPr id="204" name="Title"/>
+          <p:cNvPr id="203" name="Title"/>
           <p:cNvSpPr/>
           <p:nvPr/>
         </p:nvSpPr>
         <p:spPr>
           <a:xfrm>
             <a:off x="650160" y="1187280"/>
-            <a:ext cx="9816480" cy="432720"/>
+            <a:ext cx="9816120" cy="432720"/>
           </a:xfrm>
           <a:prstGeom prst="rect">
             <a:avLst/>
@@ -30344,14 +30462,14 @@
       </p:sp>
       <p:sp>
         <p:nvSpPr>
-          <p:cNvPr id="205" name="Body"/>
+          <p:cNvPr id="204" name="Body"/>
           <p:cNvSpPr/>
           <p:nvPr/>
         </p:nvSpPr>
         <p:spPr>
           <a:xfrm>
             <a:off x="876960" y="1921680"/>
-            <a:ext cx="4523040" cy="3771720"/>
+            <a:ext cx="4522680" cy="3771720"/>
           </a:xfrm>
           <a:prstGeom prst="roundRect">
             <a:avLst>
@@ -30750,7 +30868,7 @@
       </p:sp>
       <p:pic>
         <p:nvPicPr>
-          <p:cNvPr id="206" name="orays-02-syscall-abi.png" descr=""/>
+          <p:cNvPr id="205" name="orays-02-syscall-abi.png" descr=""/>
           <p:cNvPicPr/>
           <p:nvPr/>
         </p:nvPicPr>
@@ -30761,7 +30879,7 @@
         <p:spPr>
           <a:xfrm>
             <a:off x="6108840" y="798480"/>
-            <a:ext cx="5770440" cy="5430600"/>
+            <a:ext cx="5770080" cy="5430240"/>
           </a:xfrm>
           <a:prstGeom prst="rect">
             <a:avLst/>
@@ -30773,14 +30891,14 @@
       </p:pic>
       <p:sp>
         <p:nvSpPr>
-          <p:cNvPr id="207" name="Caption"/>
+          <p:cNvPr id="206" name="Caption"/>
           <p:cNvSpPr/>
           <p:nvPr/>
         </p:nvSpPr>
         <p:spPr>
           <a:xfrm>
             <a:off x="7397640" y="6300000"/>
-            <a:ext cx="4794480" cy="220680"/>
+            <a:ext cx="4794120" cy="220680"/>
           </a:xfrm>
           <a:prstGeom prst="rect">
             <a:avLst/>
@@ -30867,7 +30985,7 @@
       </p:sp>
       <p:pic>
         <p:nvPicPr>
-          <p:cNvPr id="208" name="StarryXStyle-header-logo" descr=""/>
+          <p:cNvPr id="207" name="StarryXStyle-header-logo" descr=""/>
           <p:cNvPicPr/>
           <p:nvPr/>
         </p:nvPicPr>
@@ -30878,7 +30996,7 @@
         <p:spPr>
           <a:xfrm>
             <a:off x="150120" y="119880"/>
-            <a:ext cx="2548440" cy="608400"/>
+            <a:ext cx="2548080" cy="608040"/>
           </a:xfrm>
           <a:prstGeom prst="rect">
             <a:avLst/>
@@ -30890,14 +31008,14 @@
       </p:pic>
       <p:sp>
         <p:nvSpPr>
-          <p:cNvPr id="209" name="StarryXStyle-nav-active"/>
+          <p:cNvPr id="208" name="StarryXStyle-nav-active"/>
           <p:cNvSpPr/>
           <p:nvPr/>
         </p:nvSpPr>
         <p:spPr>
           <a:xfrm>
             <a:off x="6469200" y="0"/>
-            <a:ext cx="1083240" cy="708480"/>
+            <a:ext cx="1082880" cy="708120"/>
           </a:xfrm>
           <a:prstGeom prst="rect">
             <a:avLst/>
@@ -30936,14 +31054,14 @@
       </p:sp>
       <p:sp>
         <p:nvSpPr>
-          <p:cNvPr id="210" name="StarryXStyle-nav-1"/>
+          <p:cNvPr id="209" name="StarryXStyle-nav-1"/>
           <p:cNvSpPr/>
           <p:nvPr/>
         </p:nvSpPr>
         <p:spPr>
           <a:xfrm>
             <a:off x="4299840" y="245160"/>
-            <a:ext cx="1083240" cy="258480"/>
+            <a:ext cx="1082880" cy="258120"/>
           </a:xfrm>
           <a:prstGeom prst="rect">
             <a:avLst/>
@@ -30990,14 +31108,14 @@
       </p:sp>
       <p:sp>
         <p:nvSpPr>
-          <p:cNvPr id="211" name="StarryXStyle-nav-2"/>
+          <p:cNvPr id="210" name="StarryXStyle-nav-2"/>
           <p:cNvSpPr/>
           <p:nvPr/>
         </p:nvSpPr>
         <p:spPr>
           <a:xfrm>
             <a:off x="5384520" y="245160"/>
-            <a:ext cx="1083240" cy="258480"/>
+            <a:ext cx="1082880" cy="258120"/>
           </a:xfrm>
           <a:prstGeom prst="rect">
             <a:avLst/>
@@ -31044,14 +31162,14 @@
       </p:sp>
       <p:sp>
         <p:nvSpPr>
-          <p:cNvPr id="212" name="StarryXStyle-nav-3"/>
+          <p:cNvPr id="211" name="StarryXStyle-nav-3"/>
           <p:cNvSpPr/>
           <p:nvPr/>
         </p:nvSpPr>
         <p:spPr>
           <a:xfrm>
             <a:off x="6469200" y="190080"/>
-            <a:ext cx="1083240" cy="258480"/>
+            <a:ext cx="1082880" cy="258120"/>
           </a:xfrm>
           <a:prstGeom prst="rect">
             <a:avLst/>
@@ -31098,14 +31216,14 @@
       </p:sp>
       <p:sp>
         <p:nvSpPr>
-          <p:cNvPr id="213" name="StarryXStyle-nav-4"/>
+          <p:cNvPr id="212" name="StarryXStyle-nav-4"/>
           <p:cNvSpPr/>
           <p:nvPr/>
         </p:nvSpPr>
         <p:spPr>
           <a:xfrm>
             <a:off x="7553880" y="245160"/>
-            <a:ext cx="1083240" cy="258480"/>
+            <a:ext cx="1082880" cy="258120"/>
           </a:xfrm>
           <a:prstGeom prst="rect">
             <a:avLst/>
@@ -31152,14 +31270,14 @@
       </p:sp>
       <p:sp>
         <p:nvSpPr>
-          <p:cNvPr id="214" name="StarryXStyle-nav-5"/>
+          <p:cNvPr id="213" name="StarryXStyle-nav-5"/>
           <p:cNvSpPr/>
           <p:nvPr/>
         </p:nvSpPr>
         <p:spPr>
           <a:xfrm>
             <a:off x="8638200" y="245160"/>
-            <a:ext cx="1083240" cy="258480"/>
+            <a:ext cx="1082880" cy="258120"/>
           </a:xfrm>
           <a:prstGeom prst="rect">
             <a:avLst/>
@@ -31216,14 +31334,14 @@
       </p:sp>
       <p:sp>
         <p:nvSpPr>
-          <p:cNvPr id="215" name="StarryXStyle-nav-6"/>
+          <p:cNvPr id="214" name="StarryXStyle-nav-6"/>
           <p:cNvSpPr/>
           <p:nvPr/>
         </p:nvSpPr>
         <p:spPr>
           <a:xfrm>
             <a:off x="9722880" y="245160"/>
-            <a:ext cx="1083240" cy="258480"/>
+            <a:ext cx="1082880" cy="258120"/>
           </a:xfrm>
           <a:prstGeom prst="rect">
             <a:avLst/>
@@ -31270,14 +31388,14 @@
       </p:sp>
       <p:sp>
         <p:nvSpPr>
-          <p:cNvPr id="216" name="StarryXStyle-nav-7"/>
+          <p:cNvPr id="215" name="StarryXStyle-nav-7"/>
           <p:cNvSpPr/>
           <p:nvPr/>
         </p:nvSpPr>
         <p:spPr>
           <a:xfrm>
             <a:off x="10807560" y="245160"/>
-            <a:ext cx="1083240" cy="258480"/>
+            <a:ext cx="1082880" cy="258120"/>
           </a:xfrm>
           <a:prstGeom prst="rect">
             <a:avLst/>
@@ -31324,14 +31442,14 @@
       </p:sp>
       <p:sp>
         <p:nvSpPr>
-          <p:cNvPr id="217" name="StarryXStyle-title-marker"/>
+          <p:cNvPr id="216" name="StarryXStyle-title-marker"/>
           <p:cNvSpPr/>
           <p:nvPr/>
         </p:nvSpPr>
         <p:spPr>
           <a:xfrm>
             <a:off x="529920" y="1239840"/>
-            <a:ext cx="168480" cy="228600"/>
+            <a:ext cx="168120" cy="228240"/>
           </a:xfrm>
           <a:prstGeom prst="rect">
             <a:avLst/>
